--- a/assets/finance/D17_Derivs_I_Forwards_Futures_Swaps.pptx
+++ b/assets/finance/D17_Derivs_I_Forwards_Futures_Swaps.pptx
@@ -537,7 +537,11 @@
           <a:p>
             <a:r>
               <a:rPr lang="en-US" dirty="0"/>
-              <a:t/>
+              <a:t>ANGLE — Two hours. One idea: a firm commitment has no value at inception, and everything after that is bookkeeping on carry.
+•  Hold this slide ~40 seconds. Name the split: today firm commitments, tomorrow options.
+•  Flag that nothing here needs a probability. Pricing is arbitrage, not forecasting.
+•  Warn them: the whole deck lives or dies on getting long/short and add/subtract carry right.
+NEXT — Roadmap — five blocks, the last two are where the marks are.</a:t>
             </a:r>
             <a:endParaRPr lang="en-US" dirty="0"/>
           </a:p>
@@ -625,7 +629,14 @@
           <a:p>
             <a:r>
               <a:rPr lang="en-US" dirty="0"/>
-              <a:t/>
+              <a:t>ANGLE — Four benefits, and the curriculum names them precisely. "Information discovery" — not just price discovery — is the Exhibit 1 wording.
+•  Do the Procam arithmetic live: 4,950 × 5% ÷ 4 = 61.88 vs 177,000 × 5% ÷ 4 = 2,212.50.
+•  Then immediately say what the comparison HIDES — margin calls, storage, and the fact that f₀ ≠ S₀.
+•  WTI closing at −USD 37.63 on 20 April 2020 (printed p. 59): futures discovered a storage shortage before the cash market did.
+•  Price discovery ≠ forecast. Futures reveal expectations; they are not an unbiased forecast of future spot.
+•  Land: the same 36× that makes it efficient is the 36× that makes it dangerous — next slide.
+FROM THE DESK — Capital efficiency is the pitch and the trap. What a treasury actually budgets for is the contingent liquidity line behind the margin account, not the margin itself.
+NEXT — Flip it over: the six risks the curriculum names.</a:t>
             </a:r>
             <a:endParaRPr lang="en-US" dirty="0"/>
           </a:p>
@@ -713,7 +724,14 @@
           <a:p>
             <a:r>
               <a:rPr lang="en-US" dirty="0"/>
-              <a:t/>
+              <a:t>ANGLE — The count matters. Four is the answer students give; the curriculum gives six, and the two they drop — opacity and systemic risk — are the two that caused 2008.
+•  Read the six off Exhibit 3 (printed p. 66) and make them write the list.
+•  Leverage number from Example 5: 23.5% loss on the futures vs 0.593% GAIN on the identical spot position. Same exposure, different denominator.
+•  Basis vs liquidity — use the callout. This is the pair that gets confused in item sets.
+•  Lack of transparency is about structured notes and embedded derivatives, not about market data.
+•  Systemic risk is why the clearing mandate exists — closes the loop with slide 6.
+FROM THE DESK — The hedge that looks free is the one to interrogate. If a structure costs nothing upfront, someone has sold optionality or accepted basis, and it is almost never the dealer.
+NEXT — So who uses them, and for what? Issuers and investors want different things.</a:t>
             </a:r>
             <a:endParaRPr lang="en-US" dirty="0"/>
           </a:p>
@@ -801,7 +819,14 @@
           <a:p>
             <a:r>
               <a:rPr lang="en-US" dirty="0"/>
-              <a:t/>
+              <a:t>ANGLE — One test separates the two columns: is the exposure incidental to running a business, or is it the business?
+•  Issuers OFFSET exposures that arrive from commerce and financing. Investors CREATE or MODIFY exposures deliberately.
+•  Hedge accounting taxonomy (printed p. 69): cash-flow = variable cash flow; fair-value = fair value of an asset/liability; net-investment = FX on foreign equity.
+•  Mnemonic: pay-fixed on floating debt = cash-flow hedge. Receive-fixed on fixed debt = fair-value hedge. Draw it if needed.
+•  Note WHY issuers prefer OTC: hedge accounting needs dates and notionals to MATCH, and a standardized future will not (printed p. 69).
+•  Montau again — the same name recurs across LM 3 and LM 4. Point that out so they track it.
+FROM THE DESK — Hedge accounting drives the structure more than the risk does. A treasurer will hedge 80% of an exposure with a plain forward that qualifies rather than 100% with a structure that does not — the earnings volatility is the real constraint.
+NEXT — Section 3 — now the engine. Where does the forward price actually come from?</a:t>
             </a:r>
             <a:endParaRPr lang="en-US" dirty="0"/>
           </a:p>
@@ -889,7 +914,10 @@
           <a:p>
             <a:r>
               <a:rPr lang="en-US" dirty="0"/>
-              <a:t/>
+              <a:t>ANGLE — The most important section in the deck. Four slides, ≈25 minutes, and nobody leaves the room until the replication identity has landed.
+•  Say up front: no probabilities, no expected returns, no risk premium. Only arbitrage.
+•  This section is the reason a derivative price is a PRICE and not a FORECAST.
+NEXT — Start with the one law that does all the work.</a:t>
             </a:r>
             <a:endParaRPr lang="en-US" dirty="0"/>
           </a:p>
@@ -977,7 +1005,14 @@
           <a:p>
             <a:r>
               <a:rPr lang="en-US" dirty="0"/>
-              <a:t/>
+              <a:t>ANGLE — F₀(T) is not a prediction of S_T. It is today's spot compounded at the carry — a number you can lock in, not a number you expect.
+•  Say the "price vs forecast" line explicitly. It is the single most common conceptual error in this material.
+•  Arbitrage has two conditions: riskless AND zero net investment. Drop either and it is a trade, not an arbitrage.
+•  Cost of carry, sign discipline: costs ADD to F, income SUBTRACTS from F. Write "+C −I" on the board and leave it there.
+•  Intuition for −I: the spot holder collects the dividend, the forward buyer does not, so the forward buyer pays less.
+•  Intuition for +C: the spot holder pays for storage, so they demand more to deliver later.
+ASK THE ROOM — If r is negative, is the forward above or below spot?
+NEXT — Prove it with a trade. If F is wrong, here is the money.</a:t>
             </a:r>
             <a:endParaRPr lang="en-US" dirty="0"/>
           </a:p>
@@ -1065,7 +1100,14 @@
           <a:p>
             <a:r>
               <a:rPr lang="en-US" dirty="0"/>
-              <a:t/>
+              <a:t>ANGLE — The formula is a consequence, not an assumption. Show them the cash and the formula becomes unforgettable.
+•  Do NOT reveal 101.23. Give them S₀ = 100, r = 5%, T = 0.25 and let them compute it.
+•  Then reveal F = 102 and ask which leg is rich. Sell the rich one.
+•  Insist on the zero-net-investment point — they borrow the whole 100, so nothing of theirs is at risk.
+•  Run the mirror case: if F were 100.50, reverse every leg — short spot, lend the proceeds, buy the forward.
+•  Note this is a Question Set item, not an end-of-module Practice Problem. LM 4 has no Practice Problems.
+FROM THE DESK — Real cash-and-carry dies on the details this example ignores: the short-borrow fee, the bid-offer on both legs, and the balance-sheet charge for holding the physical. That is why 77bp of theoretical edge is usually nobody's trade.
+NEXT — Generalise the trade into an identity you can write down.</a:t>
             </a:r>
             <a:endParaRPr lang="en-US" dirty="0"/>
           </a:p>
@@ -1153,7 +1195,13 @@
           <a:p>
             <a:r>
               <a:rPr lang="en-US" dirty="0"/>
-              <a:t/>
+              <a:t>ANGLE — Make them watch S_T cancel. That cancellation is the entire reason a derivative can be priced without a view.
+•  Read row 1 against row 2, then row 3 against row 4. Two comparisons, not four rows.
+•  Circle S_T in the "Net at T" column and cross it out. No forecast survives.
+•  The long is FINANCED — that is where r enters. Nobody is assuming a return on the asset.
+•  Negative r (Question Set Q5, p. 88): (1+r)^T &lt; 1, so F₀ &lt; S₀. Not a trick, just arithmetic.
+•  Flag that shorting is the awkward leg in practice — borrow cost is a real friction the identity ignores.
+NEXT — Real assets pay dividends and cost money to store. Add the carry terms.</a:t>
             </a:r>
             <a:endParaRPr lang="en-US" dirty="0"/>
           </a:p>
@@ -1241,7 +1289,15 @@
           <a:p>
             <a:r>
               <a:rPr lang="en-US" dirty="0"/>
-              <a:t/>
+              <a:t>ANGLE — This is the slide the exam inverts. Costs ADD, benefits SUBTRACT — and the FX row is the one that catches everybody.
+•  Write "+C, −I" large. Then justify each sign from the spot holder's point of view, not from the formula.
+•  Coupon bond row is counter-intuitive and IS in the curriculum (p. 95): a par bond with a coupon above r has F BELOW S.
+•  FX row: with an f/d quote the underlying is the BASE currency, so r_d is the benefit and r_f is the opportunity cost. Hence F = S·e^((r_f − r_d)T).
+•  Commodity row: convenience yield is a non-cash benefit — you hold the barrel because you might need the barrel.
+•  Contango / backwardation are trading-floor words. Useful, but not curriculum vocabulary.
+FROM THE DESK — On a commodity desk the convenience yield is not estimated, it is inferred: you observe the curve, back out carry, and whatever refuses to reconcile is called convenience yield. It is a residual with a name.
+ASK THE ROOM — A stock's dividend yield exceeds the risk-free rate. Is its forward above or below spot?
+NEXT — Section 4 — put the formula to work, contract by contract.</a:t>
             </a:r>
             <a:endParaRPr lang="en-US" dirty="0"/>
           </a:p>
@@ -1329,7 +1385,11 @@
           <a:p>
             <a:r>
               <a:rPr lang="en-US" dirty="0"/>
-              <a:t/>
+              <a:t>ANGLE — Nine slides of calculation, ≈40 minutes. Everything from here is the same formula wearing different clothes.
+•  Announce the running distinction now: PRICE is set at inception and never moves; VALUE moves every day.
+•  Every worked example here is lifted from the curriculum with its printed page. Say so — it earns trust.
+•  Keep a calculator visible. Make them compute alongside, not watch.
+NEXT — Start at t = 0, where the value is zero by construction.</a:t>
             </a:r>
             <a:endParaRPr lang="en-US" dirty="0"/>
           </a:p>
@@ -1417,7 +1477,14 @@
           <a:p>
             <a:r>
               <a:rPr lang="en-US" dirty="0"/>
-              <a:t/>
+              <a:t>ANGLE — Price and value are two different objects with confusingly similar names. Separate them here or pay for it in the swap section.
+•  PRICE = the number in the contract, agreed once. VALUE = what the contract is worth to you now.
+•  V₀ = 0 does not mean the contract is worthless — it means neither side would pay to enter it.
+•  The curriculum runs this backwards in Example 2: given 295 and 300.84, solve for r = 4%. Show that too.
+•  Maturity check (Example 1, p. 105): VFO is SHORT, so it gains when the price FALLS. Make them state the sign.
+•  Note the seller already owns 10,000 shares — this is a hedge, not a speculation.
+ASK THE ROOM — If V₀ = 0 for both sides, why does the dealer bother doing the trade?
+NEXT — Move the clock forward three months and the value stops being zero.</a:t>
             </a:r>
             <a:endParaRPr lang="en-US" dirty="0"/>
           </a:p>
@@ -1505,7 +1572,12 @@
           <a:p>
             <a:r>
               <a:rPr lang="en-US" dirty="0"/>
-              <a:t/>
+              <a:t>ANGLE — Set the clock so nobody is surprised when we spend an hour on §4 and §5.
+•  §1–§2 fast (≈30 min) — vocabulary and market plumbing, low exam weight per minute.
+•  §3 is the engine. If they only remember one slide today, make it the replication identity.
+•  §4 and §5 are the calculation blocks — flag that every number we use is straight from the curriculum.
+•  Tell them the arithmetic is checkable: I will cite the printed page for each worked example.
+NEXT — Learning objectives — read them, then park them.</a:t>
             </a:r>
             <a:endParaRPr lang="en-US" dirty="0"/>
           </a:p>
@@ -1593,7 +1665,14 @@
           <a:p>
             <a:r>
               <a:rPr lang="en-US" dirty="0"/>
-              <a:t/>
+              <a:t>ANGLE — Two drivers, not one. Spot moved AND the discount rate moved — students almost always see only the first.
+•  Spot fell from 295 to 285. The short is winning — establish that before touching the formula.
+•  Discounting: F₀ is a fixed future payment, so a higher r makes its PV smaller.
+•  The short's value is PV(F₀) − S_t, so shrinking PV(F₀) shrinks the short's gain. That is the 12.90 → 10.11 move.
+•  Same logic mirrored: a higher r HELPS the long, because the long owes that PV.
+•  CFA wording (p. 108): higher r raises the opportunity cost of holding cash and lowers the PV of the forward price.
+FROM THE DESK — On a real book the r that moves this is the discount curve, and post-CSA that is the collateral rate, not a textbook risk-free rate. Two dealers can mark the same forward differently purely on curve choice.
+NEXT — Now add a dividend and watch the forward price drop.</a:t>
             </a:r>
             <a:endParaRPr lang="en-US" dirty="0"/>
           </a:p>
@@ -1681,7 +1760,13 @@
           <a:p>
             <a:r>
               <a:rPr lang="en-US" dirty="0"/>
-              <a:t/>
+              <a:t>ANGLE — Do not teach this as a formula. Teach it as: the forward buyer misses two dividends, so they refuse to pay for them.
+•  Compute the no-dividend case FIRST — 51.23 — then take the dividends off. The comparison is the lesson.
+•  The curriculum frames it exactly that way (p. 90): carry drops from 1.23 to about 0.63.
+•  Both dividends fall inside [0, T]. Ask what happens to one paid the day after maturity: nothing.
+•  Discount each dividend at its OWN timing — 0.25 and 0.5, not both at 0.5.
+•  Sanity check the direction: income lowers F. If your answer came out above 51.23, you added instead of subtracted.
+NEXT — An index has hundreds of dividend dates. Switch to a yield.</a:t>
             </a:r>
             <a:endParaRPr lang="en-US" dirty="0"/>
           </a:p>
@@ -1769,7 +1854,14 @@
           <a:p>
             <a:r>
               <a:rPr lang="en-US" dirty="0"/>
-              <a:t/>
+              <a:t>ANGLE — Same cost-of-carry logic as the last slide, only the dividend is now a rate instead of two cash amounts.
+•  Discrete vs continuous is a modelling convenience, not a different theory. Say that plainly.
+•  Why continuous for an index: hundreds of constituents, payment dates scattered — a yield is simply tidier.
+•  The whole calculation is the exponent. Get r − i right and the rest is a keystroke.
+•  Ask what F would be if i = 5% and r = 4%. Below spot. Perfectly normal, no arbitrage.
+•  Note the curriculum titles this "Stock Index Futures with Dividend Yield" — the formula is identical for futures.
+FROM THE DESK — Index futures are how a fund gets invested on Monday when the cash arrives on Friday. The basis you pay is the price of not waiting — and it is usually cheaper than being out of the market.
+NEXT — Same machinery in FX, where BOTH sides earn a rate.</a:t>
             </a:r>
             <a:endParaRPr lang="en-US" dirty="0"/>
           </a:p>
@@ -1857,7 +1949,15 @@
           <a:p>
             <a:r>
               <a:rPr lang="en-US" dirty="0"/>
-              <a:t/>
+              <a:t>ANGLE — One rule survives every FX question: the lower-yielding currency trades at a forward PREMIUM. Everything else is quote convention.
+•  Fix the convention first. AUD/USD here means AUD per one USD — price currency on top.
+•  Do NOT start from the formula. Walk the four replication steps on p. 91 and let F fall out of them.
+•  Then reconcile: AUD earns less, so you need fewer of them later. F falls from 1.3335 to 1.3325.
+•  Exhibit 9 (p. 93) is the lookup table: (r_f − r_d) &lt; 0 ⇒ F &lt; S ⇒ foreign currency at a premium.
+•  Say the "differential, not level" line twice. Rates at 0.2% or 20% — only the gap matters.
+FROM THE DESK — Covered interest parity broke after 2008 and the residual has a name: the cross-currency basis. It is a balance-sheet cost, not a mispricing, and it is why "free" arbitrage in FX forwards is nobody's free lunch.
+ASK THE ROOM — EUR rates are negative and USD rates are positive. Which currency is at a forward premium?
+NEXT — Same trade, opposite sign — and this time a real commercial hedge.</a:t>
             </a:r>
             <a:endParaRPr lang="en-US" dirty="0"/>
           </a:p>
@@ -1945,7 +2045,14 @@
           <a:p>
             <a:r>
               <a:rPr lang="en-US" dirty="0"/>
-              <a:t/>
+              <a:t>ANGLE — Mirror image of the AUD slide, and deliberately so: same formula, higher-rate currency this time, opposite conclusion.
+•  Anchor the commercial story: Montau sells a machine to a Korean buyer, gets paid in KRW in 75 days, has EUR costs.
+•  Watch the double negative — subtracting −0.25% ADDS 25bp. That is where the arithmetic goes wrong.
+•  The two proof legs are the payoff of the slide. Both start with the same value; both end at 1,302.67.
+•  Contrast explicitly with slide 23: AUD lower rate → premium; KRW higher rate → discount. Same rule.
+•  Day count 75/365, not 90/360. The curriculum uses actual days here.
+FROM THE DESK — A corporate hedging a receivable is hedging a receivable, not taking a rate view. If the counterparty defaults the hedge survives and is now an outright FX position — which is why hedge ratios sit below 100%.
+NEXT — Same instrument, exchange-traded: now the cash moves every single day.</a:t>
             </a:r>
             <a:endParaRPr lang="en-US" dirty="0"/>
           </a:p>
@@ -2033,7 +2140,14 @@
           <a:p>
             <a:r>
               <a:rPr lang="en-US" dirty="0"/>
-              <a:t/>
+              <a:t>ANGLE — Same P&amp;L as a forward, arriving on a completely different schedule. The schedule is what breaks people.
+•  Force the convention before any arithmetic: long gains when price rises, short gains when price falls.
+•  The price rose 1.99 — ask the room who is losing BEFORE showing the answer.
+•  Note the CFA table also carries the spot column: on day T, spot and futures both print 70.03. Convergence, visible.
+•  Contrast with slide 20: the forward accrued a paper MTM. The future just paid cash.
+•  The forward's counterparty credit risk grows with its MTM. The future's does not — it is settled away nightly.
+FROM THE DESK — This is exactly the mismatch that kills a hedge: physically correct, cash-flow fatal. A producer short futures into a rally faces real margin calls against a receivable that will not pay for months.
+NEXT — Which raises the obvious question — how much cash, and when?</a:t>
             </a:r>
             <a:endParaRPr lang="en-US" dirty="0"/>
           </a:p>
@@ -2121,7 +2235,15 @@
           <a:p>
             <a:r>
               <a:rPr lang="en-US" dirty="0"/>
-              <a:t/>
+              <a:t>ANGLE — The trigger is maintenance; the destination is initial. Get that backwards and every margin question in the item set falls over.
+•  Storage is a COST, so it goes in with a PLUS — closes the loop with slide 17.
+•  Do the trigger arithmetic slowly: 4,000 of room ÷ 25,000 lb = 16 cents per pound.
+•  Then hammer the top-up: back to 10,000, not to 6,000. Ask the room before you say it.
+•  Curriculum evidence (Procam, p. 32): balance falls to 4,362 against a 4,500 maintenance ⇒ call of 588 ⇒ back to 4,950 initial.
+•  This is a LONG position, so the call comes on a price FALL. A short gets called on a rally.
+•  Basis converges to zero at maturity — see the footnote for the curriculum's own data.
+FROM THE DESK — Exchanges raise initial margin exactly when volatility spikes, which is exactly when funding is hardest. Margin is pro-cyclical by design, and that is a liquidity risk you model, not a fee you budget.
+NEXT — If futures settle daily and forwards do not, should their prices even be the same?</a:t>
             </a:r>
             <a:endParaRPr lang="en-US" dirty="0"/>
           </a:p>
@@ -2209,7 +2331,15 @@
           <a:p>
             <a:r>
               <a:rPr lang="en-US" dirty="0"/>
-              <a:t/>
+              <a:t>ANGLE — Two independent mechanisms with one confusing name between them. Keep them in separate columns and separate sentences.
+•  Left column is about the CORRELATION of daily MTM cash with the reinvestment rate. Any underlying.
+•  Right column is about DISCOUNTING, and applies only to interest-rate contracts. Nothing to do with correlation.
+•  Read the CFA numbers aloud: 497.50 on the gain vs 497.01 on the loss. The forward keeps more of its gain than of its loss.
+•  That is positive convexity, and it is worth money — so the futures RATE must be higher to compensate.
+•  Warn on the language: "futures price above forward" (left) and "futures rate above forward rate" (right) are different claims. Rate futures quote as 100 − rate.
+•  Question Set Q4 (p. 144) tests exactly this direction. Falls, not rises.
+FROM THE DESK — On a swaps desk the convexity adjustment is a line item, not a subtlety. Build a curve from unadjusted futures out past two years and your swap marks will be visibly wrong.
+NEXT — Section 5 — string these single exchanges into a series and you have a swap.</a:t>
             </a:r>
             <a:endParaRPr lang="en-US" dirty="0"/>
           </a:p>
@@ -2297,7 +2427,10 @@
           <a:p>
             <a:r>
               <a:rPr lang="en-US" dirty="0"/>
-              <a:t/>
+              <a:t>ANGLE — Seven slides, ≈35 minutes. Nothing new is introduced — a swap is a strip of forwards priced at one rate.
+•  Promise them: if the forward section landed, this section is bookkeeping.
+•  Two ideas only: the par rate that sets V₀ = 0, and the bond-pair equivalence.
+NEXT — Start from the strip.</a:t>
             </a:r>
             <a:endParaRPr lang="en-US" dirty="0"/>
           </a:p>
@@ -2385,7 +2518,14 @@
           <a:p>
             <a:r>
               <a:rPr lang="en-US" dirty="0"/>
-              <a:t/>
+              <a:t>ANGLE — Same cash flows, repackaged. The swap does not create exposure the FRA strip lacks — it makes it administrable.
+•  Exhibit 2 (p. 153) is the picture: three FRAs at three different rates vs one swap at one rate.
+•  Fixed-rate payer GAINS when MRR sets above the fixed rate. Establish that sign and reuse it all section.
+•  Timing distinction (p. 152): an FRA settles at the START of its period discounted; the swap settles at the END, undiscounted.
+•  Same three similarities as any forward: symmetric payoff, no upfront cash, counterparty credit risk.
+•  Note "MRR" is generic — SOFR, SONIA, CORRA, EURIBOR all slot in.
+ASK THE ROOM — If a swap is just a strip of forwards, why does anyone still trade FRAs?
+NEXT — So how is that single fixed rate chosen?</a:t>
             </a:r>
             <a:endParaRPr lang="en-US" dirty="0"/>
           </a:p>
@@ -2473,7 +2613,11 @@
           <a:p>
             <a:r>
               <a:rPr lang="en-US" dirty="0"/>
-              <a:t/>
+              <a:t>ANGLE — Do not read these aloud. Point at objectives 4–6 and say "this is the exam".
+•  ≈45 seconds. Objectives 1–3 are recall; 4–6 are calculation.
+•  Note the verbs: describe / distinguish / evaluate vs apply / price / value.
+•  Tell them the LOS wording maps almost word-for-word onto the item-set stems.
+NEXT — Section 1 — what a derivative actually is, in contract terms.</a:t>
             </a:r>
             <a:endParaRPr lang="en-US" dirty="0"/>
           </a:p>
@@ -2561,7 +2705,13 @@
           <a:p>
             <a:r>
               <a:rPr lang="en-US" dirty="0"/>
-              <a:t/>
+              <a:t>ANGLE — V₀ = 0 for the swap as a whole, never for each exchange. That distinction is where the MTM comes from two slides later.
+•  Both sides discount at the SAME zero rates. The only unknown is s_N, and it factors out of the right-hand side.
+•  Hence s_N = PV(floating) ÷ Σ discount factors. One division, once you have the pieces.
+•  Draw Exhibit 3 (p. 155): rising forward curve, flat swap-rate line cutting through it.
+•  Curriculum wording: the fixed swap rate is the INTERNAL RATE OF RETURN on the implied forward rates.
+•  Say the last box line out loud — early exchanges negative, late ones positive, sum zero. It sets up slide 32.
+NEXT — Numbers. Three periods, one zero curve, one answer.</a:t>
             </a:r>
             <a:endParaRPr lang="en-US" dirty="0"/>
           </a:p>
@@ -2649,7 +2799,14 @@
           <a:p>
             <a:r>
               <a:rPr lang="en-US" dirty="0"/>
-              <a:t/>
+              <a:t>ANGLE — Nothing new here — it is bootstrapping from fixed income plus one division. Say that before they panic at the table.
+•  IFR₁ = z₁ always. Free marks; make sure they see why.
+•  Derive IFR₂ live on the board: (1.034197)² / 1.02396 − 1 = 4.4536%.
+•  Sense-check s₃ = 3.9641% BEFORE trusting it — it must sit inside the IFR range on an upward curve.
+•  Point out it is close to the 3-year YTM of 3.9703% but NOT equal: the swap has no principal exchange.
+•  If they get 2.396% or 5.172%, they have taken a single forward instead of the PV-weighted average.
+ASK THE ROOM — On a downward-sloping curve, would s₃ sit above or below the first forward rate?
+NEXT — Now let time pass and see what happens to the value.</a:t>
             </a:r>
             <a:endParaRPr lang="en-US" dirty="0"/>
           </a:p>
@@ -2737,7 +2894,14 @@
           <a:p>
             <a:r>
               <a:rPr lang="en-US" dirty="0"/>
-              <a:t/>
+              <a:t>ANGLE — V₀ = 0 does not mean every quarter nets to zero. The early quarters are supposed to hurt the fixed payer on an upward curve.
+•  Run period 1 on the calculator: (0.005 − 0.0205) × 250,000,000 × 0.25 = −968,750.
+•  Then ask when the sign flips. Answer from the curriculum: period 8, at 2.18% vs 2.05%.
+•  That crossover is the whole intuition — pay early, receive late, PV to zero on day one.
+•  Time passing with an UNCHANGED curve still creates MTM. Nothing has to move for the payer to gain.
+•  Reconnect to Example 2 (p. 156): with the loan spread, Esterr's all-in cost is a flat 3.55% whatever MRR does.
+FROM THE DESK — Which is why swaps get unwound rather than held. Once the curve has moved, the MTM is a receivable you can monetise today, and the hedge it was protecting has often already been refinanced.
+NEXT — There is a shortcut for all of this: stop thinking swap, start thinking bonds.</a:t>
             </a:r>
             <a:endParaRPr lang="en-US" dirty="0"/>
           </a:p>
@@ -2825,7 +2989,15 @@
           <a:p>
             <a:r>
               <a:rPr lang="en-US" dirty="0"/>
-              <a:t/>
+              <a:t>ANGLE — The single highest-leverage idea in the swap section. Once they see the bond pair they stop memorising sign tables.
+•  Build it on the board in the RECEIVE-fixed direction — buy the fixed bond, fund it with an FRN. Then flip.
+•  Show the cash flows cancelling at both ends. That is why a swap has no principal exchange.
+•  FRN duration ≈ the time to the next reset. Effectively zero, which is why the swap inherits the fixed bond's duration.
+•  Hence: receive-fixed = positive duration (long bond); pay-fixed = negative duration (short bond).
+•  Exhibit 4 (p. 157) is the lookup table for this — worth photographing.
+FROM THE DESK — This is how a rates book is actually run: everything reduces to DV01 by bucket. Nobody asks "am I long or short the swap" — they ask what the DV01 is in the 5-year bucket.
+ASK THE ROOM — A manager wants to extend portfolio duration without buying bonds. Which side of the swap?
+NEXT — Put the equivalence to work on the four cases that get examined.</a:t>
             </a:r>
             <a:endParaRPr lang="en-US" dirty="0"/>
           </a:p>
@@ -2913,7 +3085,13 @@
           <a:p>
             <a:r>
               <a:rPr lang="en-US" dirty="0"/>
-              <a:t/>
+              <a:t>ANGLE — Four rows, but only one rule: receive-fixed is long a bond. Derive every row from that rather than memorising the grid.
+•  Rows 1–2 are rate SHIFTS. Rows 3–4 are the passage of TIME with no shift at all.
+•  Rows 3–4 are the ones that get missed — see Esterr on slide 32 for exactly why.
+•  Cross-check with the fixed-income deck: long bond loses when rates rise. Receive-fixed loses when rates rise. Same thing.
+•  Curriculum Q1 (p. 164): a rise in forwards increases PV(floating) and causes a fixed-rate RECEIVER to lose value.
+•  Duration management is the practical takeaway — swaps move duration without touching the bond portfolio.
+NEXT — One last worked example, from the investor side.</a:t>
             </a:r>
             <a:endParaRPr lang="en-US" dirty="0"/>
           </a:p>
@@ -3001,7 +3179,14 @@
           <a:p>
             <a:r>
               <a:rPr lang="en-US" dirty="0"/>
-              <a:t/>
+              <a:t>ANGLE — Two answers, not one. A big first receipt does NOT mean the position is winning — that is the trap in this example.
+•  Compute the first settlement live: 1.67% × 200m × 0.5 = GBP 1,670,000. It looks like a great trade.
+•  Then Case A: on an unchanged upward curve, Fyleton is at an MTM LOSS. Let that land before moving on.
+•  The receipt was priced in at inception — it is exactly why 2.38% sits above the front MRR.
+•  Case B is the reason the position exists: Fyleton bought duration and wants the curve to fall.
+•  Bond analogy (p. 163): a par fixed bond prices at a discount as an upward curve rolls through; the FRN stays at par.
+FROM THE DESK — The reason an investor uses a swap rather than buying gilts is balance sheet. Same duration, almost no cash, and it can be unwound in a morning — which is also why leverage builds up unnoticed in exactly these books.
+NEXT — Wrap up — eight things to leave the room with.</a:t>
             </a:r>
             <a:endParaRPr lang="en-US" dirty="0"/>
           </a:p>
@@ -3089,7 +3274,13 @@
           <a:p>
             <a:r>
               <a:rPr lang="en-US" dirty="0"/>
-              <a:t/>
+              <a:t>ANGLE — Close on the two ideas that generalise: no-arbitrage pricing, and the bond-pair equivalence. The rest is application.
+•  Do not read all eight. Pick bullets 3, 6 and 8 and say why they matter.
+•  Repeat the price-vs-forecast line one final time. It is the idea that carries into option pricing.
+•  Flag the two sign traps: carry (+C, −I) and margin (trigger at maintenance, restore to initial).
+•  Preview deck 18: same no-arbitrage engine, asymmetric payoffs, and put-call parity as the new identity.
+•  Take questions on the swap section first — that is where the hands go up.
+NEXT — Deck 18 — Derivatives II: options, moneyness, and put-call parity.</a:t>
             </a:r>
             <a:endParaRPr lang="en-US" dirty="0"/>
           </a:p>
@@ -3177,7 +3368,10 @@
           <a:p>
             <a:r>
               <a:rPr lang="en-US" dirty="0"/>
-              <a:t/>
+              <a:t>ANGLE — Vocabulary block. Move briskly — the payoff is that later slides can use the words without stopping.
+•  ≈20 minutes for four slides. Do not linger.
+•  Land three words hard: underlying, notional, settlement.
+NEXT — Start with the definition and the term sheet behind it.</a:t>
             </a:r>
             <a:endParaRPr lang="en-US" dirty="0"/>
           </a:p>
@@ -3265,7 +3459,15 @@
           <a:p>
             <a:r>
               <a:rPr lang="en-US" dirty="0"/>
-              <a:t/>
+              <a:t>ANGLE — The long is the BUYER and gains when the price rises. Say it once here and you will not have to unpick it in the swap section.
+•  Airbus example, printed p. 6: sell forward at EUR 30, spot lands at EUR 25 — settle EUR 5,000 in cash or deliver.
+•  Force the sign: write S_T − F₀ on the board and ask which side that is.
+•  "Derives its value from" — the derivative does NOT pass the underlying return through, it transforms it.
+•  Notional is a calculation base, not an amount anyone pays. Repeat that later on swaps.
+•  Stand-alone vs embedded: a convertible bond is a derivative inside a bond.
+FROM THE DESK — On a real term sheet the fight is never over the payoff line — it is over business days, the fixing source and the settlement mechanic. Those three lines are what turns into a dispute three years later.
+ASK THE ROOM — A hedger sells forward and the price rallies. Has the hedge failed?
+NEXT — Where does that contract get traded? Two very different markets.</a:t>
             </a:r>
             <a:endParaRPr lang="en-US" dirty="0"/>
           </a:p>
@@ -3353,7 +3555,14 @@
           <a:p>
             <a:r>
               <a:rPr lang="en-US" dirty="0"/>
-              <a:t/>
+              <a:t>ANGLE — OTC vs ETD is a trade-off, not a ranking: you buy customization with credit risk, or you buy credit protection with standardization.
+•  Walk the table left to right, one row at a time. Do not summarize it.
+•  Novation (printed p. 16) is the exam word — CCP steps in between and becomes counterparty to both.
+•  Push back on "CCP = no risk": the risk moved and concentrated, it did not vanish.
+•  Self-assessment trap (printed p. 4): ETDs have LOWER transaction costs, not higher.
+•  Footnote: Master Agreement / CSA / Dodd-Frank are mine, not the curriculum's.
+FROM THE DESK — The ISDA is signed once and covers thousands of trades; the CSA underneath it is where the money is. Collateral terms — threshold, minimum transfer amount, eligible currency — move the price of a swap more than the credit view does.
+NEXT — Now split the instrument universe: obligation on both sides, or a right on one.</a:t>
             </a:r>
             <a:endParaRPr lang="en-US" dirty="0"/>
           </a:p>
@@ -3441,7 +3650,14 @@
           <a:p>
             <a:r>
               <a:rPr lang="en-US" dirty="0"/>
-              <a:t/>
+              <a:t>ANGLE — Symmetric vs asymmetric is the whole taxonomy. Everything else on this slide follows from it.
+•  Draw the two payoff lines on the board — straight line vs hockey stick. Ten seconds, worth more than the text.
+•  V₀ = 0 for a firm commitment vs V₀ = premium for an option. That is why only one of them has an upfront cash flow.
+•  Credit derivatives sit on the contingent side: payoff turns on a credit EVENT, not a price.
+•  Deck 18 takes the right-hand column apart. Today we stay on the left.
+•  Exam check (printed p. 26): which pair benefits from OPPOSITE moves? Short forward and short put.
+ASK THE ROOM — Who bears counterparty credit risk on a purchased call once the premium is paid?
+NEXT — Three firm commitments — same economics, three different cash-flow shapes.</a:t>
             </a:r>
             <a:endParaRPr lang="en-US" dirty="0"/>
           </a:p>
@@ -3529,7 +3745,13 @@
           <a:p>
             <a:r>
               <a:rPr lang="en-US" dirty="0"/>
-              <a:t/>
+              <a:t>ANGLE — Three instruments, one economics. The differences are all plumbing — and the plumbing is what shows up in a liquidity crisis.
+•  Row "Initial value" is the row that matters: all three are V₀ = 0. Nobody pays anybody at inception.
+•  Futures reset to zero EVERY DAY. That is what makes the MTM a realized cash flow rather than an unrealized one.
+•  Read the mental-model box aloud — the strip-of-forwards line is the whole swap section in one sentence.
+•  Cumulative P&amp;L on a future ≈ the forward's. Only the TIMING differs (printed p. 131).
+FROM THE DESK — A corporate treasurer will pay a visible spread to stay in forwards rather than futures, purely to avoid daily variation margin. Cheap hedge, expensive liquidity line — the cost just moved to a different page of the accounts.
+NEXT — Section 2 — why anyone bothers, and what it costs them.</a:t>
             </a:r>
             <a:endParaRPr lang="en-US" dirty="0"/>
           </a:p>
@@ -3617,7 +3839,10 @@
           <a:p>
             <a:r>
               <a:rPr lang="en-US" dirty="0"/>
-              <a:t/>
+              <a:t>ANGLE — Three slides, ≈12 minutes. High recall value, low calculation — but the risk list is a favourite for "which is NOT" questions.
+•  Warn them: the curriculum names FOUR benefits and SIX risks. Counts get tested.
+•  Keep the pace up; the maths starts in §3.
+NEXT — Benefits first.</a:t>
             </a:r>
             <a:endParaRPr lang="en-US" dirty="0"/>
           </a:p>
@@ -4351,7 +4576,7 @@
                 <a:ea typeface="Trebuchet MS" pitchFamily="34" charset="-122"/>
                 <a:cs typeface="Trebuchet MS" pitchFamily="34" charset="-120"/>
               </a:rPr>
-              <a:t>Derivatives deliver four core benefits — risk transfer, price discovery, operational efficiency, and market efficiency — that cash markets alone cannot match</a:t>
+              <a:t>Derivatives deliver four core benefits — risk transfer, information discovery, operational advantages, and market efficiency — that cash markets alone cannot match</a:t>
             </a:r>
             <a:endParaRPr lang="en-US" sz="1600" dirty="0"/>
           </a:p>
@@ -4455,7 +4680,7 @@
                 <a:ea typeface="Calibri" pitchFamily="34" charset="-122"/>
                 <a:cs typeface="Calibri" pitchFamily="34" charset="-120"/>
               </a:rPr>
-              <a:t>Source: CFA Institute, Curriculum Vol 7, Learning Module 3, "Derivative Benefits", pp. 55–62.</a:t>
+              <a:t>Source: CFA Institute, Curriculum Vol 7, Learning Module 3, "Derivative Benefits", Exhibit 1, pp. 55–62 (printed); Example 4, pp. 60–61.</a:t>
             </a:r>
             <a:endParaRPr lang="en-US" sz="750" dirty="0"/>
           </a:p>
@@ -4497,7 +4722,7 @@
                 <a:ea typeface="Calibri" pitchFamily="34" charset="-122"/>
                 <a:cs typeface="Calibri" pitchFamily="34" charset="-120"/>
               </a:rPr>
-              <a:t>Same underlying exposure as the cash market, a fraction of the capital, and a bridge between economic decisions and the moment they can be transacted.</a:t>
+              <a:t>Same underlying exposure as the cash market, a fraction of the capital, and a bridge between an economic decision and the moment it can be transacted.</a:t>
             </a:r>
             <a:endParaRPr lang="en-US" sz="1300" dirty="0"/>
           </a:p>
@@ -4526,9 +4751,9 @@
             <a:tbl>
               <a:tblPr/>
               <a:tblGrid>
-                <a:gridCol w="2194560"/>
-                <a:gridCol w="4480560"/>
-                <a:gridCol w="1828800"/>
+                <a:gridCol w="2103120"/>
+                <a:gridCol w="4023360"/>
+                <a:gridCol w="2377440"/>
               </a:tblGrid>
               <a:tr h="274320">
                 <a:tc>
@@ -4548,7 +4773,7 @@
                           <a:ea typeface="Trebuchet MS" pitchFamily="34" charset="-122"/>
                           <a:cs typeface="Trebuchet MS" pitchFamily="34" charset="-120"/>
                         </a:rPr>
-                        <a:t>Benefit</a:t>
+                        <a:t>Benefit (CFA Exhibit 1)</a:t>
                       </a:r>
                       <a:endParaRPr lang="en-US" sz="1100" dirty="0">
                         <a:latin typeface="Trebuchet MS" charset="0"/>
@@ -4648,7 +4873,7 @@
                           <a:ea typeface="Trebuchet MS" pitchFamily="34" charset="-122"/>
                           <a:cs typeface="Trebuchet MS" pitchFamily="34" charset="-120"/>
                         </a:rPr>
-                        <a:t>CFA vignette</a:t>
+                        <a:t>Where LM 3 shows it</a:t>
                       </a:r>
                       <a:endParaRPr lang="en-US" sz="1100" dirty="0">
                         <a:latin typeface="Trebuchet MS" charset="0"/>
@@ -4750,7 +4975,7 @@
                           <a:ea typeface="Consolas" pitchFamily="34" charset="-122"/>
                           <a:cs typeface="Consolas" pitchFamily="34" charset="-120"/>
                         </a:rPr>
-                        <a:t>Bridge the timing gap between an economic decision and the ability to transact</a:t>
+                        <a:t>Bridges decision-to-transaction timing gap</a:t>
                       </a:r>
                       <a:endParaRPr lang="en-US" sz="1100" dirty="0">
                         <a:latin typeface="Consolas" charset="0"/>
@@ -4800,7 +5025,7 @@
                           <a:ea typeface="Consolas" pitchFamily="34" charset="-122"/>
                           <a:cs typeface="Consolas" pitchFamily="34" charset="-120"/>
                         </a:rPr>
-                        <a:t>Montau FX hedge</a:t>
+                        <a:t>Montau KRW/EUR forward</a:t>
                       </a:r>
                       <a:endParaRPr lang="en-US" sz="1100" dirty="0">
                         <a:latin typeface="Consolas" charset="0"/>
@@ -4852,7 +5077,7 @@
                           <a:ea typeface="Calibri" pitchFamily="34" charset="-122"/>
                           <a:cs typeface="Calibri" pitchFamily="34" charset="-120"/>
                         </a:rPr>
-                        <a:t>Price discovery</a:t>
+                        <a:t>Information discovery</a:t>
                       </a:r>
                       <a:endParaRPr lang="en-US" sz="1100" dirty="0">
                         <a:latin typeface="Calibri" charset="0"/>
@@ -4902,7 +5127,7 @@
                           <a:ea typeface="Consolas" pitchFamily="34" charset="-122"/>
                           <a:cs typeface="Consolas" pitchFamily="34" charset="-120"/>
                         </a:rPr>
-                        <a:t>Derivative prices reveal expectations: index futures, rate futures, implied vol</a:t>
+                        <a:t>Futures and implied vol reveal expectations</a:t>
                       </a:r>
                       <a:endParaRPr lang="en-US" sz="1100" dirty="0">
                         <a:latin typeface="Consolas" charset="0"/>
@@ -4952,7 +5177,7 @@
                           <a:ea typeface="Consolas" pitchFamily="34" charset="-122"/>
                           <a:cs typeface="Consolas" pitchFamily="34" charset="-120"/>
                         </a:rPr>
-                        <a:t>Index futures open</a:t>
+                        <a:t>Ex 3: WTI at −USD 37.63</a:t>
                       </a:r>
                       <a:endParaRPr lang="en-US" sz="1100" dirty="0">
                         <a:latin typeface="Consolas" charset="0"/>
@@ -5004,7 +5229,7 @@
                           <a:ea typeface="Calibri" pitchFamily="34" charset="-122"/>
                           <a:cs typeface="Calibri" pitchFamily="34" charset="-120"/>
                         </a:rPr>
-                        <a:t>Operational efficiency</a:t>
+                        <a:t>Operational advantages</a:t>
                       </a:r>
                       <a:endParaRPr lang="en-US" sz="1100" dirty="0">
                         <a:latin typeface="Calibri" charset="0"/>
@@ -5054,7 +5279,7 @@
                           <a:ea typeface="Consolas" pitchFamily="34" charset="-122"/>
                           <a:cs typeface="Consolas" pitchFamily="34" charset="-120"/>
                         </a:rPr>
-                        <a:t>Lower transaction costs, higher liquidity, small upfront cash, easy shorting</a:t>
+                        <a:t>Low outlay, low cost, liquid, easy to short</a:t>
                       </a:r>
                       <a:endParaRPr lang="en-US" sz="1100" dirty="0">
                         <a:latin typeface="Consolas" charset="0"/>
@@ -5104,7 +5329,7 @@
                           <a:ea typeface="Consolas" pitchFamily="34" charset="-122"/>
                           <a:cs typeface="Consolas" pitchFamily="34" charset="-120"/>
                         </a:rPr>
-                        <a:t>Procam gold margin</a:t>
+                        <a:t>Ex 4: Procam gold margin</a:t>
                       </a:r>
                       <a:endParaRPr lang="en-US" sz="1100" dirty="0">
                         <a:latin typeface="Consolas" charset="0"/>
@@ -5206,7 +5431,7 @@
                           <a:ea typeface="Consolas" pitchFamily="34" charset="-122"/>
                           <a:cs typeface="Consolas" pitchFamily="34" charset="-120"/>
                         </a:rPr>
-                        <a:t>Cheaper to exploit mispricings → prices converge on fundamentals faster</a:t>
+                        <a:t>Cheaper to arbitrage mispricings away</a:t>
                       </a:r>
                       <a:endParaRPr lang="en-US" sz="1100" dirty="0">
                         <a:latin typeface="Consolas" charset="0"/>
@@ -5256,7 +5481,7 @@
                           <a:ea typeface="Consolas" pitchFamily="34" charset="-122"/>
                           <a:cs typeface="Consolas" pitchFamily="34" charset="-120"/>
                         </a:rPr>
-                        <a:t>Arbitrage enforcement</a:t>
+                        <a:t>Printed pp. 61–62</a:t>
                       </a:r>
                       <a:endParaRPr lang="en-US" sz="1100" dirty="0">
                         <a:latin typeface="Consolas" charset="0"/>
@@ -5302,8 +5527,8 @@
         </p:nvSpPr>
         <p:spPr>
           <a:xfrm>
-            <a:off x="320040" y="3337560"/>
-            <a:ext cx="8503920" cy="1051560"/>
+            <a:off x="320040" y="2651760"/>
+            <a:ext cx="8503920" cy="1783080"/>
           </a:xfrm>
           <a:prstGeom prst="rect">
             <a:avLst/>
@@ -5327,7 +5552,7 @@
         </p:nvSpPr>
         <p:spPr>
           <a:xfrm>
-            <a:off x="457200" y="3383280"/>
+            <a:off x="457200" y="2697480"/>
             <a:ext cx="8229600" cy="256032"/>
           </a:xfrm>
           <a:prstGeom prst="rect">
@@ -5355,7 +5580,7 @@
                 <a:ea typeface="Trebuchet MS" pitchFamily="34" charset="-122"/>
                 <a:cs typeface="Trebuchet MS" pitchFamily="34" charset="-120"/>
               </a:rPr>
-              <a:t>OPERATIONAL EFFICIENCY — PROCAM GOLD FUTURES VS SPOT</a:t>
+              <a:t>CFA LM 3 EXAMPLE 4 — PROCAM: GOLD FUTURES VS SPOT (pp. 60–61)</a:t>
             </a:r>
             <a:endParaRPr lang="en-US" sz="1100" dirty="0"/>
           </a:p>
@@ -5369,7 +5594,7 @@
         </p:nvSpPr>
         <p:spPr>
           <a:xfrm>
-            <a:off x="457200" y="3675888"/>
+            <a:off x="457200" y="2990088"/>
             <a:ext cx="8229600" cy="457200"/>
           </a:xfrm>
           <a:prstGeom prst="rect">
@@ -5397,7 +5622,7 @@
                 <a:ea typeface="Calibri" pitchFamily="34" charset="-122"/>
                 <a:cs typeface="Calibri" pitchFamily="34" charset="-120"/>
               </a:rPr>
-              <a:t>Same 100-oz long-gold exposure for 3 months; 5% funding cost.</a:t>
+              <a:t>Same 100-oz long-gold exposure for three months; 5% borrowing rate.</a:t>
             </a:r>
             <a:endParaRPr lang="en-US" sz="1200" dirty="0"/>
           </a:p>
@@ -5405,13 +5630,110 @@
       </p:sp>
       <p:sp>
         <p:nvSpPr>
-          <p:cNvPr id="13" name="Shape 10"/>
+          <p:cNvPr id="13" name="Text 10"/>
+          <p:cNvSpPr txBox="1"/>
+          <p:nvPr/>
+        </p:nvSpPr>
+        <p:spPr>
+          <a:xfrm>
+            <a:off x="457200" y="3502152"/>
+            <a:ext cx="8229600" cy="420624"/>
+          </a:xfrm>
+          <a:prstGeom prst="rect">
+            <a:avLst/>
+          </a:prstGeom>
+          <a:noFill/>
+          <a:ln/>
+        </p:spPr>
+        <p:txBody>
+          <a:bodyPr wrap="square" lIns="254" tIns="254" rIns="254" bIns="254" rtlCol="0" anchor="t">
+            <a:normAutofit/>
+            <a:spAutoFit/>
+          </a:bodyPr>
+          <a:lstStyle/>
+          <a:p>
+            <a:pPr indent="0" marL="0">
+              <a:spcAft>
+                <a:spcPts val="200"/>
+              </a:spcAft>
+              <a:buNone/>
+            </a:pPr>
+            <a:r>
+              <a:rPr lang="en-US" sz="1150" b="1" dirty="0">
+                <a:solidFill>
+                  <a:srgbClr val="1B2A4A"/>
+                </a:solidFill>
+                <a:latin typeface="Calibri" pitchFamily="34" charset="0"/>
+                <a:ea typeface="Calibri" pitchFamily="34" charset="-122"/>
+                <a:cs typeface="Calibri" pitchFamily="34" charset="-120"/>
+              </a:rPr>
+              <a:t>1. </a:t>
+            </a:r>
+            <a:pPr indent="0" marL="0">
+              <a:spcAft>
+                <a:spcPts val="200"/>
+              </a:spcAft>
+              <a:buNone/>
+            </a:pPr>
+            <a:r>
+              <a:rPr lang="en-US" sz="1150" dirty="0">
+                <a:solidFill>
+                  <a:srgbClr val="334155"/>
+                </a:solidFill>
+                <a:latin typeface="Calibri" pitchFamily="34" charset="0"/>
+                <a:ea typeface="Calibri" pitchFamily="34" charset="-122"/>
+                <a:cs typeface="Calibri" pitchFamily="34" charset="-120"/>
+              </a:rPr>
+              <a:t>Futures route: post USD 4,950 initial margin → 4,950 × 5% ÷ 4 = USD 61.88 of interest.
+</a:t>
+            </a:r>
+            <a:pPr indent="0" marL="0">
+              <a:spcAft>
+                <a:spcPts val="200"/>
+              </a:spcAft>
+              <a:buNone/>
+            </a:pPr>
+            <a:r>
+              <a:rPr lang="en-US" sz="1150" b="1" dirty="0">
+                <a:solidFill>
+                  <a:srgbClr val="1B2A4A"/>
+                </a:solidFill>
+                <a:latin typeface="Calibri" pitchFamily="34" charset="0"/>
+                <a:ea typeface="Calibri" pitchFamily="34" charset="-122"/>
+                <a:cs typeface="Calibri" pitchFamily="34" charset="-120"/>
+              </a:rPr>
+              <a:t>2. </a:t>
+            </a:r>
+            <a:pPr indent="0" marL="0">
+              <a:spcAft>
+                <a:spcPts val="200"/>
+              </a:spcAft>
+              <a:buNone/>
+            </a:pPr>
+            <a:r>
+              <a:rPr lang="en-US" sz="1150" dirty="0">
+                <a:solidFill>
+                  <a:srgbClr val="334155"/>
+                </a:solidFill>
+                <a:latin typeface="Calibri" pitchFamily="34" charset="0"/>
+                <a:ea typeface="Calibri" pitchFamily="34" charset="-122"/>
+                <a:cs typeface="Calibri" pitchFamily="34" charset="-120"/>
+              </a:rPr>
+              <a:t>Spot route: pay 1,770 × 100 = USD 177,000 → 177,000 × 5% ÷ 4 = USD 2,212.50 of interest.</a:t>
+            </a:r>
+            <a:endParaRPr lang="en-US" sz="1150" dirty="0"/>
+          </a:p>
+        </p:txBody>
+      </p:sp>
+      <p:sp>
+        <p:nvSpPr>
+          <p:cNvPr id="14" name="Shape 11"/>
           <p:cNvSpPr/>
           <p:nvPr/>
         </p:nvSpPr>
         <p:spPr>
           <a:xfrm>
-            <a:off x="411480" y="3950208"/>
+            <a:off x="411480" y="3995928"/>
             <a:ext cx="8321040" cy="365760"/>
           </a:xfrm>
           <a:prstGeom prst="rect">
@@ -5425,13 +5747,13 @@
       </p:sp>
       <p:sp>
         <p:nvSpPr>
-          <p:cNvPr id="14" name="Text 11"/>
+          <p:cNvPr id="15" name="Text 12"/>
           <p:cNvSpPr txBox="1"/>
           <p:nvPr/>
         </p:nvSpPr>
         <p:spPr>
           <a:xfrm>
-            <a:off x="457200" y="3950208"/>
+            <a:off x="457200" y="3995928"/>
             <a:ext cx="8229600" cy="365760"/>
           </a:xfrm>
           <a:prstGeom prst="rect">
@@ -5459,7 +5781,7 @@
                 <a:ea typeface="Consolas" pitchFamily="34" charset="-122"/>
                 <a:cs typeface="Consolas" pitchFamily="34" charset="-120"/>
               </a:rPr>
-              <a:t>Futures: USD 4,950 margin → 3m interest USD 61.88. Spot: USD 177,000 → 3m interest USD 2,212.50. 36× capital efficiency.</a:t>
+              <a:t>Same exposure: USD 61.88 of carry against USD 2,212.50 — roughly 36× less.</a:t>
             </a:r>
             <a:endParaRPr lang="en-US" sz="1150" dirty="0"/>
           </a:p>
@@ -5566,7 +5888,7 @@
                 <a:ea typeface="Trebuchet MS" pitchFamily="34" charset="-122"/>
                 <a:cs typeface="Trebuchet MS" pitchFamily="34" charset="-120"/>
               </a:rPr>
-              <a:t>The same leverage that makes derivatives efficient also creates hidden risks — leverage, basis, liquidity, and counterparty credit risk demand explicit management</a:t>
+              <a:t>The curriculum names SIX risks, not four — implicit leverage, opacity, basis, liquidity, counterparty credit, and destabilisation of the system as a whole</a:t>
             </a:r>
             <a:endParaRPr lang="en-US" sz="1600" dirty="0"/>
           </a:p>
@@ -5667,7 +5989,7 @@
                 <a:ea typeface="Calibri" pitchFamily="34" charset="-122"/>
                 <a:cs typeface="Calibri" pitchFamily="34" charset="-120"/>
               </a:rPr>
-              <a:t>¹ Excessive derivative leverage was a catalyst in the 2008 financial crisis (AIG CDS, Lehman bilateral exposures) — motivating post-crisis central clearing mandates.
+              <a:t>¹ CFA LM 3 Ex 5 (p. 64): Procam controls USD 177,000 of gold risk on USD 61.88 of financing — a leverage ratio of 2,860.
 </a:t>
             </a:r>
             <a:endParaRPr lang="en-US" sz="1000" dirty="0"/>
@@ -5710,7 +6032,7 @@
                 <a:ea typeface="Calibri" pitchFamily="34" charset="-122"/>
                 <a:cs typeface="Calibri" pitchFamily="34" charset="-120"/>
               </a:rPr>
-              <a:t>Source: CFA Institute, Curriculum Vol 7, Learning Module 3, "Derivative Risks", pp. 63–66.</a:t>
+              <a:t>Source: CFA Institute, Curriculum Vol 7, Learning Module 3, "Derivative Risks", Exhibit 3, p. 66 (printed); Example 5, pp. 63–64.</a:t>
             </a:r>
             <a:endParaRPr lang="en-US" sz="750" dirty="0"/>
           </a:p>
@@ -5752,42 +6074,1137 @@
                 <a:ea typeface="Calibri" pitchFamily="34" charset="-122"/>
                 <a:cs typeface="Calibri" pitchFamily="34" charset="-120"/>
               </a:rPr>
-              <a:t>The tools are powerful because they are leveraged; the same property makes unmanaged positions a route to systemic stress.</a:t>
+              <a:t>The tools are powerful because they are leveraged; the same property makes an unmanaged position a route to systemic stress.</a:t>
             </a:r>
             <a:endParaRPr lang="en-US" sz="1300" dirty="0"/>
           </a:p>
         </p:txBody>
       </p:sp>
-      <p:sp>
-        <p:nvSpPr>
-          <p:cNvPr id="10" name="Shape 8"/>
+      <p:graphicFrame>
+        <p:nvGraphicFramePr>
+          <p:cNvPr id="12" name="Table 0"/>
+          <p:cNvGraphicFramePr>
+            <a:graphicFrameLocks noGrp="1"/>
+          </p:cNvGraphicFramePr>
+          <p:nvPr>
+            <p:extLst>
+              <p:ext uri="{D42A27DB-BD31-4B8C-83A1-F6EECF244321}">
+                <p14:modId xmlns:p14="http://schemas.microsoft.com/office/powerpoint/2010/main" val="1579011935"/>
+              </p:ext>
+            </p:extLst>
+          </p:nvPr>
+        </p:nvGraphicFramePr>
+        <p:xfrm>
+          <a:off x="320040" y="1188720"/>
+          <a:ext cx="8503920" cy="914400"/>
+        </p:xfrm>
+        <a:graphic>
+          <a:graphicData uri="http://schemas.openxmlformats.org/drawingml/2006/table">
+            <a:tbl>
+              <a:tblPr/>
+              <a:tblGrid>
+                <a:gridCol w="2103120"/>
+                <a:gridCol w="3840480"/>
+                <a:gridCol w="2560320"/>
+              </a:tblGrid>
+              <a:tr h="274320">
+                <a:tc>
+                  <a:txBody>
+                    <a:bodyPr/>
+                    <a:lstStyle/>
+                    <a:p>
+                      <a:pPr algn="ctr" indent="0" marL="0">
+                        <a:buNone/>
+                      </a:pPr>
+                      <a:r>
+                        <a:rPr lang="en-US" sz="1100" b="1" dirty="0">
+                          <a:solidFill>
+                            <a:srgbClr val="FFFFFF"/>
+                          </a:solidFill>
+                          <a:latin typeface="Trebuchet MS" pitchFamily="34" charset="0"/>
+                          <a:ea typeface="Trebuchet MS" pitchFamily="34" charset="-122"/>
+                          <a:cs typeface="Trebuchet MS" pitchFamily="34" charset="-120"/>
+                        </a:rPr>
+                        <a:t>Risk (CFA Exhibit 3)</a:t>
+                      </a:r>
+                      <a:endParaRPr lang="en-US" sz="1100" dirty="0">
+                        <a:latin typeface="Trebuchet MS" charset="0"/>
+                        <a:ea typeface="Trebuchet MS" charset="0"/>
+                        <a:cs typeface="Trebuchet MS" charset="0"/>
+                      </a:endParaRPr>
+                    </a:p>
+                  </a:txBody>
+                  <a:tcPr marL="91440" marR="91440" marT="45720" marB="45720" anchor="ctr">
+                    <a:lnL w="0" cap="flat" cmpd="sng" algn="ctr">
+                      <a:noFill/>
+                    </a:lnL>
+                    <a:lnR w="0" cap="flat" cmpd="sng" algn="ctr">
+                      <a:noFill/>
+                    </a:lnR>
+                    <a:lnT w="6350" cap="flat" cmpd="sng" algn="ctr">
+                      <a:solidFill>
+                        <a:srgbClr val="1B2A4A"/>
+                      </a:solidFill>
+                      <a:prstDash val="solid"/>
+                      <a:round/>
+                      <a:headEnd type="none" w="med" len="med"/>
+                      <a:tailEnd type="none" w="med" len="med"/>
+                    </a:lnT>
+                    <a:lnB w="0" cap="flat" cmpd="sng" algn="ctr">
+                      <a:noFill/>
+                    </a:lnB>
+                    <a:solidFill>
+                      <a:srgbClr val="1B2A4A"/>
+                    </a:solidFill>
+                  </a:tcPr>
+                </a:tc>
+                <a:tc>
+                  <a:txBody>
+                    <a:bodyPr/>
+                    <a:lstStyle/>
+                    <a:p>
+                      <a:pPr algn="ctr" indent="0" marL="0">
+                        <a:buNone/>
+                      </a:pPr>
+                      <a:r>
+                        <a:rPr lang="en-US" sz="1100" b="1" dirty="0">
+                          <a:solidFill>
+                            <a:srgbClr val="FFFFFF"/>
+                          </a:solidFill>
+                          <a:latin typeface="Trebuchet MS" pitchFamily="34" charset="0"/>
+                          <a:ea typeface="Trebuchet MS" pitchFamily="34" charset="-122"/>
+                          <a:cs typeface="Trebuchet MS" pitchFamily="34" charset="-120"/>
+                        </a:rPr>
+                        <a:t>What it is</a:t>
+                      </a:r>
+                      <a:endParaRPr lang="en-US" sz="1100" dirty="0">
+                        <a:latin typeface="Trebuchet MS" charset="0"/>
+                        <a:ea typeface="Trebuchet MS" charset="0"/>
+                        <a:cs typeface="Trebuchet MS" charset="0"/>
+                      </a:endParaRPr>
+                    </a:p>
+                  </a:txBody>
+                  <a:tcPr marL="91440" marR="91440" marT="45720" marB="45720" anchor="ctr">
+                    <a:lnL w="0" cap="flat" cmpd="sng" algn="ctr">
+                      <a:noFill/>
+                    </a:lnL>
+                    <a:lnR w="0" cap="flat" cmpd="sng" algn="ctr">
+                      <a:noFill/>
+                    </a:lnR>
+                    <a:lnT w="6350" cap="flat" cmpd="sng" algn="ctr">
+                      <a:solidFill>
+                        <a:srgbClr val="1B2A4A"/>
+                      </a:solidFill>
+                      <a:prstDash val="solid"/>
+                      <a:round/>
+                      <a:headEnd type="none" w="med" len="med"/>
+                      <a:tailEnd type="none" w="med" len="med"/>
+                    </a:lnT>
+                    <a:lnB w="0" cap="flat" cmpd="sng" algn="ctr">
+                      <a:noFill/>
+                    </a:lnB>
+                    <a:solidFill>
+                      <a:srgbClr val="1B2A4A"/>
+                    </a:solidFill>
+                  </a:tcPr>
+                </a:tc>
+                <a:tc>
+                  <a:txBody>
+                    <a:bodyPr/>
+                    <a:lstStyle/>
+                    <a:p>
+                      <a:pPr algn="ctr" indent="0" marL="0">
+                        <a:buNone/>
+                      </a:pPr>
+                      <a:r>
+                        <a:rPr lang="en-US" sz="1100" b="1" dirty="0">
+                          <a:solidFill>
+                            <a:srgbClr val="FFFFFF"/>
+                          </a:solidFill>
+                          <a:latin typeface="Trebuchet MS" pitchFamily="34" charset="0"/>
+                          <a:ea typeface="Trebuchet MS" pitchFamily="34" charset="-122"/>
+                          <a:cs typeface="Trebuchet MS" pitchFamily="34" charset="-120"/>
+                        </a:rPr>
+                        <a:t>Where it bites</a:t>
+                      </a:r>
+                      <a:endParaRPr lang="en-US" sz="1100" dirty="0">
+                        <a:latin typeface="Trebuchet MS" charset="0"/>
+                        <a:ea typeface="Trebuchet MS" charset="0"/>
+                        <a:cs typeface="Trebuchet MS" charset="0"/>
+                      </a:endParaRPr>
+                    </a:p>
+                  </a:txBody>
+                  <a:tcPr marL="91440" marR="91440" marT="45720" marB="45720" anchor="ctr">
+                    <a:lnL w="0" cap="flat" cmpd="sng" algn="ctr">
+                      <a:noFill/>
+                    </a:lnL>
+                    <a:lnR w="0" cap="flat" cmpd="sng" algn="ctr">
+                      <a:noFill/>
+                    </a:lnR>
+                    <a:lnT w="6350" cap="flat" cmpd="sng" algn="ctr">
+                      <a:solidFill>
+                        <a:srgbClr val="1B2A4A"/>
+                      </a:solidFill>
+                      <a:prstDash val="solid"/>
+                      <a:round/>
+                      <a:headEnd type="none" w="med" len="med"/>
+                      <a:tailEnd type="none" w="med" len="med"/>
+                    </a:lnT>
+                    <a:lnB w="0" cap="flat" cmpd="sng" algn="ctr">
+                      <a:noFill/>
+                    </a:lnB>
+                    <a:solidFill>
+                      <a:srgbClr val="1B2A4A"/>
+                    </a:solidFill>
+                  </a:tcPr>
+                </a:tc>
+              </a:tr>
+              <a:tr h="274320">
+                <a:tc>
+                  <a:txBody>
+                    <a:bodyPr/>
+                    <a:lstStyle/>
+                    <a:p>
+                      <a:pPr algn="l" indent="0" marL="0">
+                        <a:buNone/>
+                      </a:pPr>
+                      <a:r>
+                        <a:rPr lang="en-US" sz="1100" dirty="0">
+                          <a:solidFill>
+                            <a:srgbClr val="334155"/>
+                          </a:solidFill>
+                          <a:latin typeface="Calibri" pitchFamily="34" charset="0"/>
+                          <a:ea typeface="Calibri" pitchFamily="34" charset="-122"/>
+                          <a:cs typeface="Calibri" pitchFamily="34" charset="-120"/>
+                        </a:rPr>
+                        <a:t>Speculative use (leverage)</a:t>
+                      </a:r>
+                      <a:endParaRPr lang="en-US" sz="1100" dirty="0">
+                        <a:latin typeface="Calibri" charset="0"/>
+                        <a:ea typeface="Calibri" charset="0"/>
+                        <a:cs typeface="Calibri" charset="0"/>
+                      </a:endParaRPr>
+                    </a:p>
+                  </a:txBody>
+                  <a:tcPr marL="91440" marR="91440" marT="45720" marB="45720" anchor="ctr">
+                    <a:lnL w="0" cap="flat" cmpd="sng" algn="ctr">
+                      <a:noFill/>
+                    </a:lnL>
+                    <a:lnR w="0" cap="flat" cmpd="sng" algn="ctr">
+                      <a:noFill/>
+                    </a:lnR>
+                    <a:lnT w="0" cap="flat" cmpd="sng" algn="ctr">
+                      <a:noFill/>
+                    </a:lnT>
+                    <a:lnB w="3175" cap="flat" cmpd="sng" algn="ctr">
+                      <a:solidFill>
+                        <a:srgbClr val="D0D8E8"/>
+                      </a:solidFill>
+                      <a:prstDash val="solid"/>
+                      <a:round/>
+                      <a:headEnd type="none" w="med" len="med"/>
+                      <a:tailEnd type="none" w="med" len="med"/>
+                    </a:lnB>
+                    <a:solidFill>
+                      <a:srgbClr val="FFFFFF"/>
+                    </a:solidFill>
+                  </a:tcPr>
+                </a:tc>
+                <a:tc>
+                  <a:txBody>
+                    <a:bodyPr/>
+                    <a:lstStyle/>
+                    <a:p>
+                      <a:pPr algn="ctr" indent="0" marL="0">
+                        <a:buNone/>
+                      </a:pPr>
+                      <a:r>
+                        <a:rPr lang="en-US" sz="1100" dirty="0">
+                          <a:solidFill>
+                            <a:srgbClr val="334155"/>
+                          </a:solidFill>
+                          <a:latin typeface="Consolas" pitchFamily="34" charset="0"/>
+                          <a:ea typeface="Consolas" pitchFamily="34" charset="-122"/>
+                          <a:cs typeface="Consolas" pitchFamily="34" charset="-120"/>
+                        </a:rPr>
+                        <a:t>Small margin controls large notional</a:t>
+                      </a:r>
+                      <a:endParaRPr lang="en-US" sz="1100" dirty="0">
+                        <a:latin typeface="Consolas" charset="0"/>
+                        <a:ea typeface="Consolas" charset="0"/>
+                        <a:cs typeface="Consolas" charset="0"/>
+                      </a:endParaRPr>
+                    </a:p>
+                  </a:txBody>
+                  <a:tcPr marL="91440" marR="91440" marT="45720" marB="45720" anchor="ctr">
+                    <a:lnL w="0" cap="flat" cmpd="sng" algn="ctr">
+                      <a:noFill/>
+                    </a:lnL>
+                    <a:lnR w="0" cap="flat" cmpd="sng" algn="ctr">
+                      <a:noFill/>
+                    </a:lnR>
+                    <a:lnT w="0" cap="flat" cmpd="sng" algn="ctr">
+                      <a:noFill/>
+                    </a:lnT>
+                    <a:lnB w="3175" cap="flat" cmpd="sng" algn="ctr">
+                      <a:solidFill>
+                        <a:srgbClr val="D0D8E8"/>
+                      </a:solidFill>
+                      <a:prstDash val="solid"/>
+                      <a:round/>
+                      <a:headEnd type="none" w="med" len="med"/>
+                      <a:tailEnd type="none" w="med" len="med"/>
+                    </a:lnB>
+                    <a:solidFill>
+                      <a:srgbClr val="FFFFFF"/>
+                    </a:solidFill>
+                  </a:tcPr>
+                </a:tc>
+                <a:tc>
+                  <a:txBody>
+                    <a:bodyPr/>
+                    <a:lstStyle/>
+                    <a:p>
+                      <a:pPr algn="ctr" indent="0" marL="0">
+                        <a:buNone/>
+                      </a:pPr>
+                      <a:r>
+                        <a:rPr lang="en-US" sz="1100" dirty="0">
+                          <a:solidFill>
+                            <a:srgbClr val="334155"/>
+                          </a:solidFill>
+                          <a:latin typeface="Consolas" pitchFamily="34" charset="0"/>
+                          <a:ea typeface="Consolas" pitchFamily="34" charset="-122"/>
+                          <a:cs typeface="Consolas" pitchFamily="34" charset="-120"/>
+                        </a:rPr>
+                        <a:t>Margin calls, forced unwind</a:t>
+                      </a:r>
+                      <a:endParaRPr lang="en-US" sz="1100" dirty="0">
+                        <a:latin typeface="Consolas" charset="0"/>
+                        <a:ea typeface="Consolas" charset="0"/>
+                        <a:cs typeface="Consolas" charset="0"/>
+                      </a:endParaRPr>
+                    </a:p>
+                  </a:txBody>
+                  <a:tcPr marL="91440" marR="91440" marT="45720" marB="45720" anchor="ctr">
+                    <a:lnL w="0" cap="flat" cmpd="sng" algn="ctr">
+                      <a:noFill/>
+                    </a:lnL>
+                    <a:lnR w="0" cap="flat" cmpd="sng" algn="ctr">
+                      <a:noFill/>
+                    </a:lnR>
+                    <a:lnT w="0" cap="flat" cmpd="sng" algn="ctr">
+                      <a:noFill/>
+                    </a:lnT>
+                    <a:lnB w="3175" cap="flat" cmpd="sng" algn="ctr">
+                      <a:solidFill>
+                        <a:srgbClr val="D0D8E8"/>
+                      </a:solidFill>
+                      <a:prstDash val="solid"/>
+                      <a:round/>
+                      <a:headEnd type="none" w="med" len="med"/>
+                      <a:tailEnd type="none" w="med" len="med"/>
+                    </a:lnB>
+                    <a:solidFill>
+                      <a:srgbClr val="FFFFFF"/>
+                    </a:solidFill>
+                  </a:tcPr>
+                </a:tc>
+              </a:tr>
+              <a:tr h="274320">
+                <a:tc>
+                  <a:txBody>
+                    <a:bodyPr/>
+                    <a:lstStyle/>
+                    <a:p>
+                      <a:pPr algn="l" indent="0" marL="0">
+                        <a:buNone/>
+                      </a:pPr>
+                      <a:r>
+                        <a:rPr lang="en-US" sz="1100" dirty="0">
+                          <a:solidFill>
+                            <a:srgbClr val="334155"/>
+                          </a:solidFill>
+                          <a:latin typeface="Calibri" pitchFamily="34" charset="0"/>
+                          <a:ea typeface="Calibri" pitchFamily="34" charset="-122"/>
+                          <a:cs typeface="Calibri" pitchFamily="34" charset="-120"/>
+                        </a:rPr>
+                        <a:t>Lack of transparency</a:t>
+                      </a:r>
+                      <a:endParaRPr lang="en-US" sz="1100" dirty="0">
+                        <a:latin typeface="Calibri" charset="0"/>
+                        <a:ea typeface="Calibri" charset="0"/>
+                        <a:cs typeface="Calibri" charset="0"/>
+                      </a:endParaRPr>
+                    </a:p>
+                  </a:txBody>
+                  <a:tcPr marL="91440" marR="91440" marT="45720" marB="45720" anchor="ctr">
+                    <a:lnL w="0" cap="flat" cmpd="sng" algn="ctr">
+                      <a:noFill/>
+                    </a:lnL>
+                    <a:lnR w="0" cap="flat" cmpd="sng" algn="ctr">
+                      <a:noFill/>
+                    </a:lnR>
+                    <a:lnT w="0" cap="flat" cmpd="sng" algn="ctr">
+                      <a:noFill/>
+                    </a:lnT>
+                    <a:lnB w="3175" cap="flat" cmpd="sng" algn="ctr">
+                      <a:solidFill>
+                        <a:srgbClr val="D0D8E8"/>
+                      </a:solidFill>
+                      <a:prstDash val="solid"/>
+                      <a:round/>
+                      <a:headEnd type="none" w="med" len="med"/>
+                      <a:tailEnd type="none" w="med" len="med"/>
+                    </a:lnB>
+                    <a:solidFill>
+                      <a:srgbClr val="F5F7FA"/>
+                    </a:solidFill>
+                  </a:tcPr>
+                </a:tc>
+                <a:tc>
+                  <a:txBody>
+                    <a:bodyPr/>
+                    <a:lstStyle/>
+                    <a:p>
+                      <a:pPr algn="ctr" indent="0" marL="0">
+                        <a:buNone/>
+                      </a:pPr>
+                      <a:r>
+                        <a:rPr lang="en-US" sz="1100" dirty="0">
+                          <a:solidFill>
+                            <a:srgbClr val="334155"/>
+                          </a:solidFill>
+                          <a:latin typeface="Consolas" pitchFamily="34" charset="0"/>
+                          <a:ea typeface="Consolas" pitchFamily="34" charset="-122"/>
+                          <a:cs typeface="Consolas" pitchFamily="34" charset="-120"/>
+                        </a:rPr>
+                        <a:t>Complexity hides the true exposure profile</a:t>
+                      </a:r>
+                      <a:endParaRPr lang="en-US" sz="1100" dirty="0">
+                        <a:latin typeface="Consolas" charset="0"/>
+                        <a:ea typeface="Consolas" charset="0"/>
+                        <a:cs typeface="Consolas" charset="0"/>
+                      </a:endParaRPr>
+                    </a:p>
+                  </a:txBody>
+                  <a:tcPr marL="91440" marR="91440" marT="45720" marB="45720" anchor="ctr">
+                    <a:lnL w="0" cap="flat" cmpd="sng" algn="ctr">
+                      <a:noFill/>
+                    </a:lnL>
+                    <a:lnR w="0" cap="flat" cmpd="sng" algn="ctr">
+                      <a:noFill/>
+                    </a:lnR>
+                    <a:lnT w="0" cap="flat" cmpd="sng" algn="ctr">
+                      <a:noFill/>
+                    </a:lnT>
+                    <a:lnB w="3175" cap="flat" cmpd="sng" algn="ctr">
+                      <a:solidFill>
+                        <a:srgbClr val="D0D8E8"/>
+                      </a:solidFill>
+                      <a:prstDash val="solid"/>
+                      <a:round/>
+                      <a:headEnd type="none" w="med" len="med"/>
+                      <a:tailEnd type="none" w="med" len="med"/>
+                    </a:lnB>
+                    <a:solidFill>
+                      <a:srgbClr val="F5F7FA"/>
+                    </a:solidFill>
+                  </a:tcPr>
+                </a:tc>
+                <a:tc>
+                  <a:txBody>
+                    <a:bodyPr/>
+                    <a:lstStyle/>
+                    <a:p>
+                      <a:pPr algn="ctr" indent="0" marL="0">
+                        <a:buNone/>
+                      </a:pPr>
+                      <a:r>
+                        <a:rPr lang="en-US" sz="1100" dirty="0">
+                          <a:solidFill>
+                            <a:srgbClr val="334155"/>
+                          </a:solidFill>
+                          <a:latin typeface="Consolas" pitchFamily="34" charset="0"/>
+                          <a:ea typeface="Consolas" pitchFamily="34" charset="-122"/>
+                          <a:cs typeface="Consolas" pitchFamily="34" charset="-120"/>
+                        </a:rPr>
+                        <a:t>Stakeholders misprice risk</a:t>
+                      </a:r>
+                      <a:endParaRPr lang="en-US" sz="1100" dirty="0">
+                        <a:latin typeface="Consolas" charset="0"/>
+                        <a:ea typeface="Consolas" charset="0"/>
+                        <a:cs typeface="Consolas" charset="0"/>
+                      </a:endParaRPr>
+                    </a:p>
+                  </a:txBody>
+                  <a:tcPr marL="91440" marR="91440" marT="45720" marB="45720" anchor="ctr">
+                    <a:lnL w="0" cap="flat" cmpd="sng" algn="ctr">
+                      <a:noFill/>
+                    </a:lnL>
+                    <a:lnR w="0" cap="flat" cmpd="sng" algn="ctr">
+                      <a:noFill/>
+                    </a:lnR>
+                    <a:lnT w="0" cap="flat" cmpd="sng" algn="ctr">
+                      <a:noFill/>
+                    </a:lnT>
+                    <a:lnB w="3175" cap="flat" cmpd="sng" algn="ctr">
+                      <a:solidFill>
+                        <a:srgbClr val="D0D8E8"/>
+                      </a:solidFill>
+                      <a:prstDash val="solid"/>
+                      <a:round/>
+                      <a:headEnd type="none" w="med" len="med"/>
+                      <a:tailEnd type="none" w="med" len="med"/>
+                    </a:lnB>
+                    <a:solidFill>
+                      <a:srgbClr val="F5F7FA"/>
+                    </a:solidFill>
+                  </a:tcPr>
+                </a:tc>
+              </a:tr>
+              <a:tr h="274320">
+                <a:tc>
+                  <a:txBody>
+                    <a:bodyPr/>
+                    <a:lstStyle/>
+                    <a:p>
+                      <a:pPr algn="l" indent="0" marL="0">
+                        <a:buNone/>
+                      </a:pPr>
+                      <a:r>
+                        <a:rPr lang="en-US" sz="1100" dirty="0">
+                          <a:solidFill>
+                            <a:srgbClr val="334155"/>
+                          </a:solidFill>
+                          <a:latin typeface="Calibri" pitchFamily="34" charset="0"/>
+                          <a:ea typeface="Calibri" pitchFamily="34" charset="-122"/>
+                          <a:cs typeface="Calibri" pitchFamily="34" charset="-120"/>
+                        </a:rPr>
+                        <a:t>Basis risk</a:t>
+                      </a:r>
+                      <a:endParaRPr lang="en-US" sz="1100" dirty="0">
+                        <a:latin typeface="Calibri" charset="0"/>
+                        <a:ea typeface="Calibri" charset="0"/>
+                        <a:cs typeface="Calibri" charset="0"/>
+                      </a:endParaRPr>
+                    </a:p>
+                  </a:txBody>
+                  <a:tcPr marL="91440" marR="91440" marT="45720" marB="45720" anchor="ctr">
+                    <a:lnL w="0" cap="flat" cmpd="sng" algn="ctr">
+                      <a:noFill/>
+                    </a:lnL>
+                    <a:lnR w="0" cap="flat" cmpd="sng" algn="ctr">
+                      <a:noFill/>
+                    </a:lnR>
+                    <a:lnT w="0" cap="flat" cmpd="sng" algn="ctr">
+                      <a:noFill/>
+                    </a:lnT>
+                    <a:lnB w="3175" cap="flat" cmpd="sng" algn="ctr">
+                      <a:solidFill>
+                        <a:srgbClr val="D0D8E8"/>
+                      </a:solidFill>
+                      <a:prstDash val="solid"/>
+                      <a:round/>
+                      <a:headEnd type="none" w="med" len="med"/>
+                      <a:tailEnd type="none" w="med" len="med"/>
+                    </a:lnB>
+                    <a:solidFill>
+                      <a:srgbClr val="FFFFFF"/>
+                    </a:solidFill>
+                  </a:tcPr>
+                </a:tc>
+                <a:tc>
+                  <a:txBody>
+                    <a:bodyPr/>
+                    <a:lstStyle/>
+                    <a:p>
+                      <a:pPr algn="ctr" indent="0" marL="0">
+                        <a:buNone/>
+                      </a:pPr>
+                      <a:r>
+                        <a:rPr lang="en-US" sz="1100" dirty="0">
+                          <a:solidFill>
+                            <a:srgbClr val="334155"/>
+                          </a:solidFill>
+                          <a:latin typeface="Consolas" pitchFamily="34" charset="0"/>
+                          <a:ea typeface="Consolas" pitchFamily="34" charset="-122"/>
+                          <a:cs typeface="Consolas" pitchFamily="34" charset="-120"/>
+                        </a:rPr>
+                        <a:t>Derivative underlying is not the hedged item</a:t>
+                      </a:r>
+                      <a:endParaRPr lang="en-US" sz="1100" dirty="0">
+                        <a:latin typeface="Consolas" charset="0"/>
+                        <a:ea typeface="Consolas" charset="0"/>
+                        <a:cs typeface="Consolas" charset="0"/>
+                      </a:endParaRPr>
+                    </a:p>
+                  </a:txBody>
+                  <a:tcPr marL="91440" marR="91440" marT="45720" marB="45720" anchor="ctr">
+                    <a:lnL w="0" cap="flat" cmpd="sng" algn="ctr">
+                      <a:noFill/>
+                    </a:lnL>
+                    <a:lnR w="0" cap="flat" cmpd="sng" algn="ctr">
+                      <a:noFill/>
+                    </a:lnR>
+                    <a:lnT w="0" cap="flat" cmpd="sng" algn="ctr">
+                      <a:noFill/>
+                    </a:lnT>
+                    <a:lnB w="3175" cap="flat" cmpd="sng" algn="ctr">
+                      <a:solidFill>
+                        <a:srgbClr val="D0D8E8"/>
+                      </a:solidFill>
+                      <a:prstDash val="solid"/>
+                      <a:round/>
+                      <a:headEnd type="none" w="med" len="med"/>
+                      <a:tailEnd type="none" w="med" len="med"/>
+                    </a:lnB>
+                    <a:solidFill>
+                      <a:srgbClr val="FFFFFF"/>
+                    </a:solidFill>
+                  </a:tcPr>
+                </a:tc>
+                <a:tc>
+                  <a:txBody>
+                    <a:bodyPr/>
+                    <a:lstStyle/>
+                    <a:p>
+                      <a:pPr algn="ctr" indent="0" marL="0">
+                        <a:buNone/>
+                      </a:pPr>
+                      <a:r>
+                        <a:rPr lang="en-US" sz="1100" dirty="0">
+                          <a:solidFill>
+                            <a:srgbClr val="334155"/>
+                          </a:solidFill>
+                          <a:latin typeface="Consolas" pitchFamily="34" charset="0"/>
+                          <a:ea typeface="Consolas" pitchFamily="34" charset="-122"/>
+                          <a:cs typeface="Consolas" pitchFamily="34" charset="-120"/>
+                        </a:rPr>
+                        <a:t>Residual P&amp;L after hedging</a:t>
+                      </a:r>
+                      <a:endParaRPr lang="en-US" sz="1100" dirty="0">
+                        <a:latin typeface="Consolas" charset="0"/>
+                        <a:ea typeface="Consolas" charset="0"/>
+                        <a:cs typeface="Consolas" charset="0"/>
+                      </a:endParaRPr>
+                    </a:p>
+                  </a:txBody>
+                  <a:tcPr marL="91440" marR="91440" marT="45720" marB="45720" anchor="ctr">
+                    <a:lnL w="0" cap="flat" cmpd="sng" algn="ctr">
+                      <a:noFill/>
+                    </a:lnL>
+                    <a:lnR w="0" cap="flat" cmpd="sng" algn="ctr">
+                      <a:noFill/>
+                    </a:lnR>
+                    <a:lnT w="0" cap="flat" cmpd="sng" algn="ctr">
+                      <a:noFill/>
+                    </a:lnT>
+                    <a:lnB w="3175" cap="flat" cmpd="sng" algn="ctr">
+                      <a:solidFill>
+                        <a:srgbClr val="D0D8E8"/>
+                      </a:solidFill>
+                      <a:prstDash val="solid"/>
+                      <a:round/>
+                      <a:headEnd type="none" w="med" len="med"/>
+                      <a:tailEnd type="none" w="med" len="med"/>
+                    </a:lnB>
+                    <a:solidFill>
+                      <a:srgbClr val="FFFFFF"/>
+                    </a:solidFill>
+                  </a:tcPr>
+                </a:tc>
+              </a:tr>
+              <a:tr h="274320">
+                <a:tc>
+                  <a:txBody>
+                    <a:bodyPr/>
+                    <a:lstStyle/>
+                    <a:p>
+                      <a:pPr algn="l" indent="0" marL="0">
+                        <a:buNone/>
+                      </a:pPr>
+                      <a:r>
+                        <a:rPr lang="en-US" sz="1100" dirty="0">
+                          <a:solidFill>
+                            <a:srgbClr val="334155"/>
+                          </a:solidFill>
+                          <a:latin typeface="Calibri" pitchFamily="34" charset="0"/>
+                          <a:ea typeface="Calibri" pitchFamily="34" charset="-122"/>
+                          <a:cs typeface="Calibri" pitchFamily="34" charset="-120"/>
+                        </a:rPr>
+                        <a:t>Liquidity risk</a:t>
+                      </a:r>
+                      <a:endParaRPr lang="en-US" sz="1100" dirty="0">
+                        <a:latin typeface="Calibri" charset="0"/>
+                        <a:ea typeface="Calibri" charset="0"/>
+                        <a:cs typeface="Calibri" charset="0"/>
+                      </a:endParaRPr>
+                    </a:p>
+                  </a:txBody>
+                  <a:tcPr marL="91440" marR="91440" marT="45720" marB="45720" anchor="ctr">
+                    <a:lnL w="0" cap="flat" cmpd="sng" algn="ctr">
+                      <a:noFill/>
+                    </a:lnL>
+                    <a:lnR w="0" cap="flat" cmpd="sng" algn="ctr">
+                      <a:noFill/>
+                    </a:lnR>
+                    <a:lnT w="0" cap="flat" cmpd="sng" algn="ctr">
+                      <a:noFill/>
+                    </a:lnT>
+                    <a:lnB w="3175" cap="flat" cmpd="sng" algn="ctr">
+                      <a:solidFill>
+                        <a:srgbClr val="D0D8E8"/>
+                      </a:solidFill>
+                      <a:prstDash val="solid"/>
+                      <a:round/>
+                      <a:headEnd type="none" w="med" len="med"/>
+                      <a:tailEnd type="none" w="med" len="med"/>
+                    </a:lnB>
+                    <a:solidFill>
+                      <a:srgbClr val="F5F7FA"/>
+                    </a:solidFill>
+                  </a:tcPr>
+                </a:tc>
+                <a:tc>
+                  <a:txBody>
+                    <a:bodyPr/>
+                    <a:lstStyle/>
+                    <a:p>
+                      <a:pPr algn="ctr" indent="0" marL="0">
+                        <a:buNone/>
+                      </a:pPr>
+                      <a:r>
+                        <a:rPr lang="en-US" sz="1100" dirty="0">
+                          <a:solidFill>
+                            <a:srgbClr val="334155"/>
+                          </a:solidFill>
+                          <a:latin typeface="Consolas" pitchFamily="34" charset="0"/>
+                          <a:ea typeface="Consolas" pitchFamily="34" charset="-122"/>
+                          <a:cs typeface="Consolas" pitchFamily="34" charset="-120"/>
+                        </a:rPr>
+                        <a:t>Cash-flow TIMING mismatch vs hedged item</a:t>
+                      </a:r>
+                      <a:endParaRPr lang="en-US" sz="1100" dirty="0">
+                        <a:latin typeface="Consolas" charset="0"/>
+                        <a:ea typeface="Consolas" charset="0"/>
+                        <a:cs typeface="Consolas" charset="0"/>
+                      </a:endParaRPr>
+                    </a:p>
+                  </a:txBody>
+                  <a:tcPr marL="91440" marR="91440" marT="45720" marB="45720" anchor="ctr">
+                    <a:lnL w="0" cap="flat" cmpd="sng" algn="ctr">
+                      <a:noFill/>
+                    </a:lnL>
+                    <a:lnR w="0" cap="flat" cmpd="sng" algn="ctr">
+                      <a:noFill/>
+                    </a:lnR>
+                    <a:lnT w="0" cap="flat" cmpd="sng" algn="ctr">
+                      <a:noFill/>
+                    </a:lnT>
+                    <a:lnB w="3175" cap="flat" cmpd="sng" algn="ctr">
+                      <a:solidFill>
+                        <a:srgbClr val="D0D8E8"/>
+                      </a:solidFill>
+                      <a:prstDash val="solid"/>
+                      <a:round/>
+                      <a:headEnd type="none" w="med" len="med"/>
+                      <a:tailEnd type="none" w="med" len="med"/>
+                    </a:lnB>
+                    <a:solidFill>
+                      <a:srgbClr val="F5F7FA"/>
+                    </a:solidFill>
+                  </a:tcPr>
+                </a:tc>
+                <a:tc>
+                  <a:txBody>
+                    <a:bodyPr/>
+                    <a:lstStyle/>
+                    <a:p>
+                      <a:pPr algn="ctr" indent="0" marL="0">
+                        <a:buNone/>
+                      </a:pPr>
+                      <a:r>
+                        <a:rPr lang="en-US" sz="1100" dirty="0">
+                          <a:solidFill>
+                            <a:srgbClr val="334155"/>
+                          </a:solidFill>
+                          <a:latin typeface="Consolas" pitchFamily="34" charset="0"/>
+                          <a:ea typeface="Consolas" pitchFamily="34" charset="-122"/>
+                          <a:cs typeface="Consolas" pitchFamily="34" charset="-120"/>
+                        </a:rPr>
+                        <a:t>Margin call you cannot fund</a:t>
+                      </a:r>
+                      <a:endParaRPr lang="en-US" sz="1100" dirty="0">
+                        <a:latin typeface="Consolas" charset="0"/>
+                        <a:ea typeface="Consolas" charset="0"/>
+                        <a:cs typeface="Consolas" charset="0"/>
+                      </a:endParaRPr>
+                    </a:p>
+                  </a:txBody>
+                  <a:tcPr marL="91440" marR="91440" marT="45720" marB="45720" anchor="ctr">
+                    <a:lnL w="0" cap="flat" cmpd="sng" algn="ctr">
+                      <a:noFill/>
+                    </a:lnL>
+                    <a:lnR w="0" cap="flat" cmpd="sng" algn="ctr">
+                      <a:noFill/>
+                    </a:lnR>
+                    <a:lnT w="0" cap="flat" cmpd="sng" algn="ctr">
+                      <a:noFill/>
+                    </a:lnT>
+                    <a:lnB w="3175" cap="flat" cmpd="sng" algn="ctr">
+                      <a:solidFill>
+                        <a:srgbClr val="D0D8E8"/>
+                      </a:solidFill>
+                      <a:prstDash val="solid"/>
+                      <a:round/>
+                      <a:headEnd type="none" w="med" len="med"/>
+                      <a:tailEnd type="none" w="med" len="med"/>
+                    </a:lnB>
+                    <a:solidFill>
+                      <a:srgbClr val="F5F7FA"/>
+                    </a:solidFill>
+                  </a:tcPr>
+                </a:tc>
+              </a:tr>
+              <a:tr h="274320">
+                <a:tc>
+                  <a:txBody>
+                    <a:bodyPr/>
+                    <a:lstStyle/>
+                    <a:p>
+                      <a:pPr algn="l" indent="0" marL="0">
+                        <a:buNone/>
+                      </a:pPr>
+                      <a:r>
+                        <a:rPr lang="en-US" sz="1100" dirty="0">
+                          <a:solidFill>
+                            <a:srgbClr val="334155"/>
+                          </a:solidFill>
+                          <a:latin typeface="Calibri" pitchFamily="34" charset="0"/>
+                          <a:ea typeface="Calibri" pitchFamily="34" charset="-122"/>
+                          <a:cs typeface="Calibri" pitchFamily="34" charset="-120"/>
+                        </a:rPr>
+                        <a:t>Counterparty credit risk</a:t>
+                      </a:r>
+                      <a:endParaRPr lang="en-US" sz="1100" dirty="0">
+                        <a:latin typeface="Calibri" charset="0"/>
+                        <a:ea typeface="Calibri" charset="0"/>
+                        <a:cs typeface="Calibri" charset="0"/>
+                      </a:endParaRPr>
+                    </a:p>
+                  </a:txBody>
+                  <a:tcPr marL="91440" marR="91440" marT="45720" marB="45720" anchor="ctr">
+                    <a:lnL w="0" cap="flat" cmpd="sng" algn="ctr">
+                      <a:noFill/>
+                    </a:lnL>
+                    <a:lnR w="0" cap="flat" cmpd="sng" algn="ctr">
+                      <a:noFill/>
+                    </a:lnR>
+                    <a:lnT w="0" cap="flat" cmpd="sng" algn="ctr">
+                      <a:noFill/>
+                    </a:lnT>
+                    <a:lnB w="3175" cap="flat" cmpd="sng" algn="ctr">
+                      <a:solidFill>
+                        <a:srgbClr val="D0D8E8"/>
+                      </a:solidFill>
+                      <a:prstDash val="solid"/>
+                      <a:round/>
+                      <a:headEnd type="none" w="med" len="med"/>
+                      <a:tailEnd type="none" w="med" len="med"/>
+                    </a:lnB>
+                    <a:solidFill>
+                      <a:srgbClr val="FFFFFF"/>
+                    </a:solidFill>
+                  </a:tcPr>
+                </a:tc>
+                <a:tc>
+                  <a:txBody>
+                    <a:bodyPr/>
+                    <a:lstStyle/>
+                    <a:p>
+                      <a:pPr algn="ctr" indent="0" marL="0">
+                        <a:buNone/>
+                      </a:pPr>
+                      <a:r>
+                        <a:rPr lang="en-US" sz="1100" dirty="0">
+                          <a:solidFill>
+                            <a:srgbClr val="334155"/>
+                          </a:solidFill>
+                          <a:latin typeface="Consolas" pitchFamily="34" charset="0"/>
+                          <a:ea typeface="Consolas" pitchFamily="34" charset="-122"/>
+                          <a:cs typeface="Consolas" pitchFamily="34" charset="-120"/>
+                        </a:rPr>
+                        <a:t>OTC dealer may not perform on the contract</a:t>
+                      </a:r>
+                      <a:endParaRPr lang="en-US" sz="1100" dirty="0">
+                        <a:latin typeface="Consolas" charset="0"/>
+                        <a:ea typeface="Consolas" charset="0"/>
+                        <a:cs typeface="Consolas" charset="0"/>
+                      </a:endParaRPr>
+                    </a:p>
+                  </a:txBody>
+                  <a:tcPr marL="91440" marR="91440" marT="45720" marB="45720" anchor="ctr">
+                    <a:lnL w="0" cap="flat" cmpd="sng" algn="ctr">
+                      <a:noFill/>
+                    </a:lnL>
+                    <a:lnR w="0" cap="flat" cmpd="sng" algn="ctr">
+                      <a:noFill/>
+                    </a:lnR>
+                    <a:lnT w="0" cap="flat" cmpd="sng" algn="ctr">
+                      <a:noFill/>
+                    </a:lnT>
+                    <a:lnB w="3175" cap="flat" cmpd="sng" algn="ctr">
+                      <a:solidFill>
+                        <a:srgbClr val="D0D8E8"/>
+                      </a:solidFill>
+                      <a:prstDash val="solid"/>
+                      <a:round/>
+                      <a:headEnd type="none" w="med" len="med"/>
+                      <a:tailEnd type="none" w="med" len="med"/>
+                    </a:lnB>
+                    <a:solidFill>
+                      <a:srgbClr val="FFFFFF"/>
+                    </a:solidFill>
+                  </a:tcPr>
+                </a:tc>
+                <a:tc>
+                  <a:txBody>
+                    <a:bodyPr/>
+                    <a:lstStyle/>
+                    <a:p>
+                      <a:pPr algn="ctr" indent="0" marL="0">
+                        <a:buNone/>
+                      </a:pPr>
+                      <a:r>
+                        <a:rPr lang="en-US" sz="1100" dirty="0">
+                          <a:solidFill>
+                            <a:srgbClr val="334155"/>
+                          </a:solidFill>
+                          <a:latin typeface="Consolas" pitchFamily="34" charset="0"/>
+                          <a:ea typeface="Consolas" pitchFamily="34" charset="-122"/>
+                          <a:cs typeface="Consolas" pitchFamily="34" charset="-120"/>
+                        </a:rPr>
+                        <a:t>CCP, ISDA, collateral</a:t>
+                      </a:r>
+                      <a:endParaRPr lang="en-US" sz="1100" dirty="0">
+                        <a:latin typeface="Consolas" charset="0"/>
+                        <a:ea typeface="Consolas" charset="0"/>
+                        <a:cs typeface="Consolas" charset="0"/>
+                      </a:endParaRPr>
+                    </a:p>
+                  </a:txBody>
+                  <a:tcPr marL="91440" marR="91440" marT="45720" marB="45720" anchor="ctr">
+                    <a:lnL w="0" cap="flat" cmpd="sng" algn="ctr">
+                      <a:noFill/>
+                    </a:lnL>
+                    <a:lnR w="0" cap="flat" cmpd="sng" algn="ctr">
+                      <a:noFill/>
+                    </a:lnR>
+                    <a:lnT w="0" cap="flat" cmpd="sng" algn="ctr">
+                      <a:noFill/>
+                    </a:lnT>
+                    <a:lnB w="3175" cap="flat" cmpd="sng" algn="ctr">
+                      <a:solidFill>
+                        <a:srgbClr val="D0D8E8"/>
+                      </a:solidFill>
+                      <a:prstDash val="solid"/>
+                      <a:round/>
+                      <a:headEnd type="none" w="med" len="med"/>
+                      <a:tailEnd type="none" w="med" len="med"/>
+                    </a:lnB>
+                    <a:solidFill>
+                      <a:srgbClr val="FFFFFF"/>
+                    </a:solidFill>
+                  </a:tcPr>
+                </a:tc>
+              </a:tr>
+              <a:tr h="274320">
+                <a:tc>
+                  <a:txBody>
+                    <a:bodyPr/>
+                    <a:lstStyle/>
+                    <a:p>
+                      <a:pPr algn="l" indent="0" marL="0">
+                        <a:buNone/>
+                      </a:pPr>
+                      <a:r>
+                        <a:rPr lang="en-US" sz="1100" dirty="0">
+                          <a:solidFill>
+                            <a:srgbClr val="334155"/>
+                          </a:solidFill>
+                          <a:latin typeface="Calibri" pitchFamily="34" charset="0"/>
+                          <a:ea typeface="Calibri" pitchFamily="34" charset="-122"/>
+                          <a:cs typeface="Calibri" pitchFamily="34" charset="-120"/>
+                        </a:rPr>
+                        <a:t>Destabilisation / systemic</a:t>
+                      </a:r>
+                      <a:endParaRPr lang="en-US" sz="1100" dirty="0">
+                        <a:latin typeface="Calibri" charset="0"/>
+                        <a:ea typeface="Calibri" charset="0"/>
+                        <a:cs typeface="Calibri" charset="0"/>
+                      </a:endParaRPr>
+                    </a:p>
+                  </a:txBody>
+                  <a:tcPr marL="91440" marR="91440" marT="45720" marB="45720" anchor="ctr">
+                    <a:lnL w="0" cap="flat" cmpd="sng" algn="ctr">
+                      <a:noFill/>
+                    </a:lnL>
+                    <a:lnR w="0" cap="flat" cmpd="sng" algn="ctr">
+                      <a:noFill/>
+                    </a:lnR>
+                    <a:lnT w="0" cap="flat" cmpd="sng" algn="ctr">
+                      <a:noFill/>
+                    </a:lnT>
+                    <a:lnB w="3175" cap="flat" cmpd="sng" algn="ctr">
+                      <a:solidFill>
+                        <a:srgbClr val="D0D8E8"/>
+                      </a:solidFill>
+                      <a:prstDash val="solid"/>
+                      <a:round/>
+                      <a:headEnd type="none" w="med" len="med"/>
+                      <a:tailEnd type="none" w="med" len="med"/>
+                    </a:lnB>
+                    <a:solidFill>
+                      <a:srgbClr val="F5F7FA"/>
+                    </a:solidFill>
+                  </a:tcPr>
+                </a:tc>
+                <a:tc>
+                  <a:txBody>
+                    <a:bodyPr/>
+                    <a:lstStyle/>
+                    <a:p>
+                      <a:pPr algn="ctr" indent="0" marL="0">
+                        <a:buNone/>
+                      </a:pPr>
+                      <a:r>
+                        <a:rPr lang="en-US" sz="1100" dirty="0">
+                          <a:solidFill>
+                            <a:srgbClr val="334155"/>
+                          </a:solidFill>
+                          <a:latin typeface="Consolas" pitchFamily="34" charset="0"/>
+                          <a:ea typeface="Consolas" pitchFamily="34" charset="-122"/>
+                          <a:cs typeface="Consolas" pitchFamily="34" charset="-120"/>
+                        </a:rPr>
+                        <a:t>Leverage across the system amplifies stress</a:t>
+                      </a:r>
+                      <a:endParaRPr lang="en-US" sz="1100" dirty="0">
+                        <a:latin typeface="Consolas" charset="0"/>
+                        <a:ea typeface="Consolas" charset="0"/>
+                        <a:cs typeface="Consolas" charset="0"/>
+                      </a:endParaRPr>
+                    </a:p>
+                  </a:txBody>
+                  <a:tcPr marL="91440" marR="91440" marT="45720" marB="45720" anchor="ctr">
+                    <a:lnL w="0" cap="flat" cmpd="sng" algn="ctr">
+                      <a:noFill/>
+                    </a:lnL>
+                    <a:lnR w="0" cap="flat" cmpd="sng" algn="ctr">
+                      <a:noFill/>
+                    </a:lnR>
+                    <a:lnT w="0" cap="flat" cmpd="sng" algn="ctr">
+                      <a:noFill/>
+                    </a:lnT>
+                    <a:lnB w="3175" cap="flat" cmpd="sng" algn="ctr">
+                      <a:solidFill>
+                        <a:srgbClr val="D0D8E8"/>
+                      </a:solidFill>
+                      <a:prstDash val="solid"/>
+                      <a:round/>
+                      <a:headEnd type="none" w="med" len="med"/>
+                      <a:tailEnd type="none" w="med" len="med"/>
+                    </a:lnB>
+                    <a:solidFill>
+                      <a:srgbClr val="F5F7FA"/>
+                    </a:solidFill>
+                  </a:tcPr>
+                </a:tc>
+                <a:tc>
+                  <a:txBody>
+                    <a:bodyPr/>
+                    <a:lstStyle/>
+                    <a:p>
+                      <a:pPr algn="ctr" indent="0" marL="0">
+                        <a:buNone/>
+                      </a:pPr>
+                      <a:r>
+                        <a:rPr lang="en-US" sz="1100" dirty="0">
+                          <a:solidFill>
+                            <a:srgbClr val="334155"/>
+                          </a:solidFill>
+                          <a:latin typeface="Consolas" pitchFamily="34" charset="0"/>
+                          <a:ea typeface="Consolas" pitchFamily="34" charset="-122"/>
+                          <a:cs typeface="Consolas" pitchFamily="34" charset="-120"/>
+                        </a:rPr>
+                        <a:t>2008 — AIG, Lehman</a:t>
+                      </a:r>
+                      <a:endParaRPr lang="en-US" sz="1100" dirty="0">
+                        <a:latin typeface="Consolas" charset="0"/>
+                        <a:ea typeface="Consolas" charset="0"/>
+                        <a:cs typeface="Consolas" charset="0"/>
+                      </a:endParaRPr>
+                    </a:p>
+                  </a:txBody>
+                  <a:tcPr marL="91440" marR="91440" marT="45720" marB="45720" anchor="ctr">
+                    <a:lnL w="0" cap="flat" cmpd="sng" algn="ctr">
+                      <a:noFill/>
+                    </a:lnL>
+                    <a:lnR w="0" cap="flat" cmpd="sng" algn="ctr">
+                      <a:noFill/>
+                    </a:lnR>
+                    <a:lnT w="0" cap="flat" cmpd="sng" algn="ctr">
+                      <a:noFill/>
+                    </a:lnT>
+                    <a:lnB w="3175" cap="flat" cmpd="sng" algn="ctr">
+                      <a:solidFill>
+                        <a:srgbClr val="D0D8E8"/>
+                      </a:solidFill>
+                      <a:prstDash val="solid"/>
+                      <a:round/>
+                      <a:headEnd type="none" w="med" len="med"/>
+                      <a:tailEnd type="none" w="med" len="med"/>
+                    </a:lnB>
+                    <a:solidFill>
+                      <a:srgbClr val="F5F7FA"/>
+                    </a:solidFill>
+                  </a:tcPr>
+                </a:tc>
+              </a:tr>
+            </a:tbl>
+          </a:graphicData>
+        </a:graphic>
+      </p:graphicFrame>
+      <p:sp>
+        <p:nvSpPr>
+          <p:cNvPr id="11" name="Shape 8"/>
           <p:cNvSpPr/>
           <p:nvPr/>
         </p:nvSpPr>
         <p:spPr>
           <a:xfrm>
-            <a:off x="320040" y="1188720"/>
-            <a:ext cx="8503920" cy="685800"/>
+            <a:off x="320040" y="3246120"/>
+            <a:ext cx="8503920" cy="1051560"/>
           </a:xfrm>
           <a:prstGeom prst="rect">
             <a:avLst/>
           </a:prstGeom>
           <a:solidFill>
-            <a:srgbClr val="FFFFFF"/>
+            <a:srgbClr val="FEF0E7"/>
           </a:solidFill>
           <a:ln/>
         </p:spPr>
       </p:sp>
       <p:sp>
         <p:nvSpPr>
-          <p:cNvPr id="11" name="Shape 9"/>
+          <p:cNvPr id="12" name="Shape 9"/>
           <p:cNvSpPr/>
           <p:nvPr/>
         </p:nvSpPr>
         <p:spPr>
           <a:xfrm>
-            <a:off x="320040" y="1188720"/>
-            <a:ext cx="91440" cy="685800"/>
+            <a:off x="320040" y="3246120"/>
+            <a:ext cx="73152" cy="1051560"/>
           </a:xfrm>
           <a:prstGeom prst="rect">
             <a:avLst/>
@@ -5800,14 +7217,14 @@
       </p:sp>
       <p:sp>
         <p:nvSpPr>
-          <p:cNvPr id="12" name="Text 10"/>
+          <p:cNvPr id="13" name="Text 10"/>
           <p:cNvSpPr txBox="1"/>
           <p:nvPr/>
         </p:nvSpPr>
         <p:spPr>
           <a:xfrm>
-            <a:off x="502920" y="1188720"/>
-            <a:ext cx="365760" cy="685800"/>
+            <a:off x="457200" y="3291840"/>
+            <a:ext cx="8275320" cy="256032"/>
           </a:xfrm>
           <a:prstGeom prst="rect">
             <a:avLst/>
@@ -5826,72 +7243,30 @@
               <a:buNone/>
             </a:pPr>
             <a:r>
-              <a:rPr lang="en-US" sz="1300" b="1" dirty="0">
-                <a:solidFill>
-                  <a:srgbClr val="1B2A4A"/>
+              <a:rPr lang="en-US" sz="1100" b="1" spc="400" kern="0" dirty="0">
+                <a:solidFill>
+                  <a:srgbClr val="E8600A"/>
                 </a:solidFill>
                 <a:latin typeface="Trebuchet MS" pitchFamily="34" charset="0"/>
                 <a:ea typeface="Trebuchet MS" pitchFamily="34" charset="-122"/>
                 <a:cs typeface="Trebuchet MS" pitchFamily="34" charset="-120"/>
               </a:rPr>
-              <a:t>1</a:t>
-            </a:r>
-            <a:endParaRPr lang="en-US" sz="1300" dirty="0"/>
-          </a:p>
-        </p:txBody>
-      </p:sp>
-      <p:sp>
-        <p:nvSpPr>
-          <p:cNvPr id="13" name="Text 11"/>
+              <a:t>BASIS VS LIQUIDITY — THE PAIR STUDENTS SWAP</a:t>
+            </a:r>
+            <a:endParaRPr lang="en-US" sz="1100" dirty="0"/>
+          </a:p>
+        </p:txBody>
+      </p:sp>
+      <p:sp>
+        <p:nvSpPr>
+          <p:cNvPr id="14" name="Text 11"/>
           <p:cNvSpPr txBox="1"/>
           <p:nvPr/>
         </p:nvSpPr>
         <p:spPr>
           <a:xfrm>
-            <a:off x="868680" y="1225296"/>
-            <a:ext cx="7863840" cy="308610"/>
-          </a:xfrm>
-          <a:prstGeom prst="rect">
-            <a:avLst/>
-          </a:prstGeom>
-          <a:noFill/>
-          <a:ln/>
-        </p:spPr>
-        <p:txBody>
-          <a:bodyPr wrap="square" lIns="508" tIns="508" rIns="508" bIns="508" rtlCol="0" anchor="ctr">
-            <a:normAutofit/>
-            <a:spAutoFit/>
-          </a:bodyPr>
-          <a:lstStyle/>
-          <a:p>
-            <a:pPr algn="l" indent="0" marL="0">
-              <a:buNone/>
-            </a:pPr>
-            <a:r>
-              <a:rPr lang="en-US" sz="1200" b="1" dirty="0">
-                <a:solidFill>
-                  <a:srgbClr val="1B2A4A"/>
-                </a:solidFill>
-                <a:latin typeface="Trebuchet MS" pitchFamily="34" charset="0"/>
-                <a:ea typeface="Trebuchet MS" pitchFamily="34" charset="-122"/>
-                <a:cs typeface="Trebuchet MS" pitchFamily="34" charset="-120"/>
-              </a:rPr>
-              <a:t>Implicit leverage</a:t>
-            </a:r>
-            <a:endParaRPr lang="en-US" sz="1200" dirty="0"/>
-          </a:p>
-        </p:txBody>
-      </p:sp>
-      <p:sp>
-        <p:nvSpPr>
-          <p:cNvPr id="14" name="Text 12"/>
-          <p:cNvSpPr txBox="1"/>
-          <p:nvPr/>
-        </p:nvSpPr>
-        <p:spPr>
-          <a:xfrm>
-            <a:off x="868680" y="1497330"/>
-            <a:ext cx="7863840" cy="377190"/>
+            <a:off x="457200" y="3566160"/>
+            <a:ext cx="8275320" cy="685800"/>
           </a:xfrm>
           <a:prstGeom prst="rect">
             <a:avLst/>
@@ -5918,505 +7293,7 @@
                 <a:ea typeface="Calibri" pitchFamily="34" charset="-122"/>
                 <a:cs typeface="Calibri" pitchFamily="34" charset="-120"/>
               </a:rPr>
-              <a:t>Small margin → large notional. A 1% move can wipe out the margin — derivatives are often the cheapest way to take risk and the fastest way to blow up.</a:t>
-            </a:r>
-            <a:endParaRPr lang="en-US" sz="1200" dirty="0"/>
-          </a:p>
-        </p:txBody>
-      </p:sp>
-      <p:sp>
-        <p:nvSpPr>
-          <p:cNvPr id="15" name="Shape 13"/>
-          <p:cNvSpPr/>
-          <p:nvPr/>
-        </p:nvSpPr>
-        <p:spPr>
-          <a:xfrm>
-            <a:off x="320040" y="1938528"/>
-            <a:ext cx="8503920" cy="685800"/>
-          </a:xfrm>
-          <a:prstGeom prst="rect">
-            <a:avLst/>
-          </a:prstGeom>
-          <a:solidFill>
-            <a:srgbClr val="F5F7FA"/>
-          </a:solidFill>
-          <a:ln/>
-        </p:spPr>
-      </p:sp>
-      <p:sp>
-        <p:nvSpPr>
-          <p:cNvPr id="16" name="Shape 14"/>
-          <p:cNvSpPr/>
-          <p:nvPr/>
-        </p:nvSpPr>
-        <p:spPr>
-          <a:xfrm>
-            <a:off x="320040" y="1938528"/>
-            <a:ext cx="91440" cy="685800"/>
-          </a:xfrm>
-          <a:prstGeom prst="rect">
-            <a:avLst/>
-          </a:prstGeom>
-          <a:solidFill>
-            <a:srgbClr val="E8600A"/>
-          </a:solidFill>
-          <a:ln/>
-        </p:spPr>
-      </p:sp>
-      <p:sp>
-        <p:nvSpPr>
-          <p:cNvPr id="17" name="Text 15"/>
-          <p:cNvSpPr txBox="1"/>
-          <p:nvPr/>
-        </p:nvSpPr>
-        <p:spPr>
-          <a:xfrm>
-            <a:off x="502920" y="1938528"/>
-            <a:ext cx="365760" cy="685800"/>
-          </a:xfrm>
-          <a:prstGeom prst="rect">
-            <a:avLst/>
-          </a:prstGeom>
-          <a:noFill/>
-          <a:ln/>
-        </p:spPr>
-        <p:txBody>
-          <a:bodyPr wrap="square" lIns="508" tIns="508" rIns="508" bIns="508" rtlCol="0" anchor="ctr">
-            <a:normAutofit/>
-            <a:spAutoFit/>
-          </a:bodyPr>
-          <a:lstStyle/>
-          <a:p>
-            <a:pPr algn="l" indent="0" marL="0">
-              <a:buNone/>
-            </a:pPr>
-            <a:r>
-              <a:rPr lang="en-US" sz="1300" b="1" dirty="0">
-                <a:solidFill>
-                  <a:srgbClr val="1B2A4A"/>
-                </a:solidFill>
-                <a:latin typeface="Trebuchet MS" pitchFamily="34" charset="0"/>
-                <a:ea typeface="Trebuchet MS" pitchFamily="34" charset="-122"/>
-                <a:cs typeface="Trebuchet MS" pitchFamily="34" charset="-120"/>
-              </a:rPr>
-              <a:t>2</a:t>
-            </a:r>
-            <a:endParaRPr lang="en-US" sz="1300" dirty="0"/>
-          </a:p>
-        </p:txBody>
-      </p:sp>
-      <p:sp>
-        <p:nvSpPr>
-          <p:cNvPr id="18" name="Text 16"/>
-          <p:cNvSpPr txBox="1"/>
-          <p:nvPr/>
-        </p:nvSpPr>
-        <p:spPr>
-          <a:xfrm>
-            <a:off x="868680" y="1975104"/>
-            <a:ext cx="7863840" cy="308610"/>
-          </a:xfrm>
-          <a:prstGeom prst="rect">
-            <a:avLst/>
-          </a:prstGeom>
-          <a:noFill/>
-          <a:ln/>
-        </p:spPr>
-        <p:txBody>
-          <a:bodyPr wrap="square" lIns="508" tIns="508" rIns="508" bIns="508" rtlCol="0" anchor="ctr">
-            <a:normAutofit/>
-            <a:spAutoFit/>
-          </a:bodyPr>
-          <a:lstStyle/>
-          <a:p>
-            <a:pPr algn="l" indent="0" marL="0">
-              <a:buNone/>
-            </a:pPr>
-            <a:r>
-              <a:rPr lang="en-US" sz="1200" b="1" dirty="0">
-                <a:solidFill>
-                  <a:srgbClr val="1B2A4A"/>
-                </a:solidFill>
-                <a:latin typeface="Trebuchet MS" pitchFamily="34" charset="0"/>
-                <a:ea typeface="Trebuchet MS" pitchFamily="34" charset="-122"/>
-                <a:cs typeface="Trebuchet MS" pitchFamily="34" charset="-120"/>
-              </a:rPr>
-              <a:t>Basis risk</a:t>
-            </a:r>
-            <a:endParaRPr lang="en-US" sz="1200" dirty="0"/>
-          </a:p>
-        </p:txBody>
-      </p:sp>
-      <p:sp>
-        <p:nvSpPr>
-          <p:cNvPr id="19" name="Text 17"/>
-          <p:cNvSpPr txBox="1"/>
-          <p:nvPr/>
-        </p:nvSpPr>
-        <p:spPr>
-          <a:xfrm>
-            <a:off x="868680" y="2247138"/>
-            <a:ext cx="7863840" cy="377190"/>
-          </a:xfrm>
-          <a:prstGeom prst="rect">
-            <a:avLst/>
-          </a:prstGeom>
-          <a:noFill/>
-          <a:ln/>
-        </p:spPr>
-        <p:txBody>
-          <a:bodyPr wrap="square" lIns="508" tIns="508" rIns="508" bIns="508" rtlCol="0" anchor="t">
-            <a:normAutofit/>
-            <a:spAutoFit/>
-          </a:bodyPr>
-          <a:lstStyle/>
-          <a:p>
-            <a:pPr algn="l" indent="0" marL="0">
-              <a:buNone/>
-            </a:pPr>
-            <a:r>
-              <a:rPr lang="en-US" sz="1200" dirty="0">
-                <a:solidFill>
-                  <a:srgbClr val="334155"/>
-                </a:solidFill>
-                <a:latin typeface="Calibri" pitchFamily="34" charset="0"/>
-                <a:ea typeface="Calibri" pitchFamily="34" charset="-122"/>
-                <a:cs typeface="Calibri" pitchFamily="34" charset="-120"/>
-              </a:rPr>
-              <a:t>The derivative's underlying does not perfectly match the hedged exposure (e.g. WTI future hedging Brent cargo). Residual P&amp;L = basis × notional.</a:t>
-            </a:r>
-            <a:endParaRPr lang="en-US" sz="1200" dirty="0"/>
-          </a:p>
-        </p:txBody>
-      </p:sp>
-      <p:sp>
-        <p:nvSpPr>
-          <p:cNvPr id="20" name="Shape 18"/>
-          <p:cNvSpPr/>
-          <p:nvPr/>
-        </p:nvSpPr>
-        <p:spPr>
-          <a:xfrm>
-            <a:off x="320040" y="2688336"/>
-            <a:ext cx="8503920" cy="685800"/>
-          </a:xfrm>
-          <a:prstGeom prst="rect">
-            <a:avLst/>
-          </a:prstGeom>
-          <a:solidFill>
-            <a:srgbClr val="FFFFFF"/>
-          </a:solidFill>
-          <a:ln/>
-        </p:spPr>
-      </p:sp>
-      <p:sp>
-        <p:nvSpPr>
-          <p:cNvPr id="21" name="Shape 19"/>
-          <p:cNvSpPr/>
-          <p:nvPr/>
-        </p:nvSpPr>
-        <p:spPr>
-          <a:xfrm>
-            <a:off x="320040" y="2688336"/>
-            <a:ext cx="91440" cy="685800"/>
-          </a:xfrm>
-          <a:prstGeom prst="rect">
-            <a:avLst/>
-          </a:prstGeom>
-          <a:solidFill>
-            <a:srgbClr val="E8600A"/>
-          </a:solidFill>
-          <a:ln/>
-        </p:spPr>
-      </p:sp>
-      <p:sp>
-        <p:nvSpPr>
-          <p:cNvPr id="22" name="Text 20"/>
-          <p:cNvSpPr txBox="1"/>
-          <p:nvPr/>
-        </p:nvSpPr>
-        <p:spPr>
-          <a:xfrm>
-            <a:off x="502920" y="2688336"/>
-            <a:ext cx="365760" cy="685800"/>
-          </a:xfrm>
-          <a:prstGeom prst="rect">
-            <a:avLst/>
-          </a:prstGeom>
-          <a:noFill/>
-          <a:ln/>
-        </p:spPr>
-        <p:txBody>
-          <a:bodyPr wrap="square" lIns="508" tIns="508" rIns="508" bIns="508" rtlCol="0" anchor="ctr">
-            <a:normAutofit/>
-            <a:spAutoFit/>
-          </a:bodyPr>
-          <a:lstStyle/>
-          <a:p>
-            <a:pPr algn="l" indent="0" marL="0">
-              <a:buNone/>
-            </a:pPr>
-            <a:r>
-              <a:rPr lang="en-US" sz="1300" b="1" dirty="0">
-                <a:solidFill>
-                  <a:srgbClr val="1B2A4A"/>
-                </a:solidFill>
-                <a:latin typeface="Trebuchet MS" pitchFamily="34" charset="0"/>
-                <a:ea typeface="Trebuchet MS" pitchFamily="34" charset="-122"/>
-                <a:cs typeface="Trebuchet MS" pitchFamily="34" charset="-120"/>
-              </a:rPr>
-              <a:t>3</a:t>
-            </a:r>
-            <a:endParaRPr lang="en-US" sz="1300" dirty="0"/>
-          </a:p>
-        </p:txBody>
-      </p:sp>
-      <p:sp>
-        <p:nvSpPr>
-          <p:cNvPr id="23" name="Text 21"/>
-          <p:cNvSpPr txBox="1"/>
-          <p:nvPr/>
-        </p:nvSpPr>
-        <p:spPr>
-          <a:xfrm>
-            <a:off x="868680" y="2724912"/>
-            <a:ext cx="7863840" cy="308610"/>
-          </a:xfrm>
-          <a:prstGeom prst="rect">
-            <a:avLst/>
-          </a:prstGeom>
-          <a:noFill/>
-          <a:ln/>
-        </p:spPr>
-        <p:txBody>
-          <a:bodyPr wrap="square" lIns="508" tIns="508" rIns="508" bIns="508" rtlCol="0" anchor="ctr">
-            <a:normAutofit/>
-            <a:spAutoFit/>
-          </a:bodyPr>
-          <a:lstStyle/>
-          <a:p>
-            <a:pPr algn="l" indent="0" marL="0">
-              <a:buNone/>
-            </a:pPr>
-            <a:r>
-              <a:rPr lang="en-US" sz="1200" b="1" dirty="0">
-                <a:solidFill>
-                  <a:srgbClr val="1B2A4A"/>
-                </a:solidFill>
-                <a:latin typeface="Trebuchet MS" pitchFamily="34" charset="0"/>
-                <a:ea typeface="Trebuchet MS" pitchFamily="34" charset="-122"/>
-                <a:cs typeface="Trebuchet MS" pitchFamily="34" charset="-120"/>
-              </a:rPr>
-              <a:t>Liquidity risk</a:t>
-            </a:r>
-            <a:endParaRPr lang="en-US" sz="1200" dirty="0"/>
-          </a:p>
-        </p:txBody>
-      </p:sp>
-      <p:sp>
-        <p:nvSpPr>
-          <p:cNvPr id="24" name="Text 22"/>
-          <p:cNvSpPr txBox="1"/>
-          <p:nvPr/>
-        </p:nvSpPr>
-        <p:spPr>
-          <a:xfrm>
-            <a:off x="868680" y="2996946"/>
-            <a:ext cx="7863840" cy="377190"/>
-          </a:xfrm>
-          <a:prstGeom prst="rect">
-            <a:avLst/>
-          </a:prstGeom>
-          <a:noFill/>
-          <a:ln/>
-        </p:spPr>
-        <p:txBody>
-          <a:bodyPr wrap="square" lIns="508" tIns="508" rIns="508" bIns="508" rtlCol="0" anchor="t">
-            <a:normAutofit/>
-            <a:spAutoFit/>
-          </a:bodyPr>
-          <a:lstStyle/>
-          <a:p>
-            <a:pPr algn="l" indent="0" marL="0">
-              <a:buNone/>
-            </a:pPr>
-            <a:r>
-              <a:rPr lang="en-US" sz="1200" dirty="0">
-                <a:solidFill>
-                  <a:srgbClr val="334155"/>
-                </a:solidFill>
-                <a:latin typeface="Calibri" pitchFamily="34" charset="0"/>
-                <a:ea typeface="Calibri" pitchFamily="34" charset="-122"/>
-                <a:cs typeface="Calibri" pitchFamily="34" charset="-120"/>
-              </a:rPr>
-              <a:t>Mismatch in cash-flow TIMING between hedge and hedged item: daily margin calls on a 5-year futures hedge vs annual coupon — can force early unwind.</a:t>
-            </a:r>
-            <a:endParaRPr lang="en-US" sz="1200" dirty="0"/>
-          </a:p>
-        </p:txBody>
-      </p:sp>
-      <p:sp>
-        <p:nvSpPr>
-          <p:cNvPr id="25" name="Shape 23"/>
-          <p:cNvSpPr/>
-          <p:nvPr/>
-        </p:nvSpPr>
-        <p:spPr>
-          <a:xfrm>
-            <a:off x="320040" y="3438144"/>
-            <a:ext cx="8503920" cy="685800"/>
-          </a:xfrm>
-          <a:prstGeom prst="rect">
-            <a:avLst/>
-          </a:prstGeom>
-          <a:solidFill>
-            <a:srgbClr val="F5F7FA"/>
-          </a:solidFill>
-          <a:ln/>
-        </p:spPr>
-      </p:sp>
-      <p:sp>
-        <p:nvSpPr>
-          <p:cNvPr id="26" name="Shape 24"/>
-          <p:cNvSpPr/>
-          <p:nvPr/>
-        </p:nvSpPr>
-        <p:spPr>
-          <a:xfrm>
-            <a:off x="320040" y="3438144"/>
-            <a:ext cx="91440" cy="685800"/>
-          </a:xfrm>
-          <a:prstGeom prst="rect">
-            <a:avLst/>
-          </a:prstGeom>
-          <a:solidFill>
-            <a:srgbClr val="E8600A"/>
-          </a:solidFill>
-          <a:ln/>
-        </p:spPr>
-      </p:sp>
-      <p:sp>
-        <p:nvSpPr>
-          <p:cNvPr id="27" name="Text 25"/>
-          <p:cNvSpPr txBox="1"/>
-          <p:nvPr/>
-        </p:nvSpPr>
-        <p:spPr>
-          <a:xfrm>
-            <a:off x="502920" y="3438144"/>
-            <a:ext cx="365760" cy="685800"/>
-          </a:xfrm>
-          <a:prstGeom prst="rect">
-            <a:avLst/>
-          </a:prstGeom>
-          <a:noFill/>
-          <a:ln/>
-        </p:spPr>
-        <p:txBody>
-          <a:bodyPr wrap="square" lIns="508" tIns="508" rIns="508" bIns="508" rtlCol="0" anchor="ctr">
-            <a:normAutofit/>
-            <a:spAutoFit/>
-          </a:bodyPr>
-          <a:lstStyle/>
-          <a:p>
-            <a:pPr algn="l" indent="0" marL="0">
-              <a:buNone/>
-            </a:pPr>
-            <a:r>
-              <a:rPr lang="en-US" sz="1300" b="1" dirty="0">
-                <a:solidFill>
-                  <a:srgbClr val="1B2A4A"/>
-                </a:solidFill>
-                <a:latin typeface="Trebuchet MS" pitchFamily="34" charset="0"/>
-                <a:ea typeface="Trebuchet MS" pitchFamily="34" charset="-122"/>
-                <a:cs typeface="Trebuchet MS" pitchFamily="34" charset="-120"/>
-              </a:rPr>
-              <a:t>4</a:t>
-            </a:r>
-            <a:endParaRPr lang="en-US" sz="1300" dirty="0"/>
-          </a:p>
-        </p:txBody>
-      </p:sp>
-      <p:sp>
-        <p:nvSpPr>
-          <p:cNvPr id="28" name="Text 26"/>
-          <p:cNvSpPr txBox="1"/>
-          <p:nvPr/>
-        </p:nvSpPr>
-        <p:spPr>
-          <a:xfrm>
-            <a:off x="868680" y="3474720"/>
-            <a:ext cx="7863840" cy="308610"/>
-          </a:xfrm>
-          <a:prstGeom prst="rect">
-            <a:avLst/>
-          </a:prstGeom>
-          <a:noFill/>
-          <a:ln/>
-        </p:spPr>
-        <p:txBody>
-          <a:bodyPr wrap="square" lIns="508" tIns="508" rIns="508" bIns="508" rtlCol="0" anchor="ctr">
-            <a:normAutofit/>
-            <a:spAutoFit/>
-          </a:bodyPr>
-          <a:lstStyle/>
-          <a:p>
-            <a:pPr algn="l" indent="0" marL="0">
-              <a:buNone/>
-            </a:pPr>
-            <a:r>
-              <a:rPr lang="en-US" sz="1200" b="1" dirty="0">
-                <a:solidFill>
-                  <a:srgbClr val="1B2A4A"/>
-                </a:solidFill>
-                <a:latin typeface="Trebuchet MS" pitchFamily="34" charset="0"/>
-                <a:ea typeface="Trebuchet MS" pitchFamily="34" charset="-122"/>
-                <a:cs typeface="Trebuchet MS" pitchFamily="34" charset="-120"/>
-              </a:rPr>
-              <a:t>Counterparty credit risk</a:t>
-            </a:r>
-            <a:endParaRPr lang="en-US" sz="1200" dirty="0"/>
-          </a:p>
-        </p:txBody>
-      </p:sp>
-      <p:sp>
-        <p:nvSpPr>
-          <p:cNvPr id="29" name="Text 27"/>
-          <p:cNvSpPr txBox="1"/>
-          <p:nvPr/>
-        </p:nvSpPr>
-        <p:spPr>
-          <a:xfrm>
-            <a:off x="868680" y="3746754"/>
-            <a:ext cx="7863840" cy="377190"/>
-          </a:xfrm>
-          <a:prstGeom prst="rect">
-            <a:avLst/>
-          </a:prstGeom>
-          <a:noFill/>
-          <a:ln/>
-        </p:spPr>
-        <p:txBody>
-          <a:bodyPr wrap="square" lIns="508" tIns="508" rIns="508" bIns="508" rtlCol="0" anchor="t">
-            <a:normAutofit/>
-            <a:spAutoFit/>
-          </a:bodyPr>
-          <a:lstStyle/>
-          <a:p>
-            <a:pPr algn="l" indent="0" marL="0">
-              <a:buNone/>
-            </a:pPr>
-            <a:r>
-              <a:rPr lang="en-US" sz="1200" dirty="0">
-                <a:solidFill>
-                  <a:srgbClr val="334155"/>
-                </a:solidFill>
-                <a:latin typeface="Calibri" pitchFamily="34" charset="0"/>
-                <a:ea typeface="Calibri" pitchFamily="34" charset="-122"/>
-                <a:cs typeface="Calibri" pitchFamily="34" charset="-120"/>
-              </a:rPr>
-              <a:t>Risk the dealer fails to honor an OTC contract. Mitigated by CCP clearing, ISDA master + CSA collateral, netting.</a:t>
+              <a:t>Basis risk is a mismatch of VALUE: the derivative's underlying is similar to but not identical to the exposure (a WTI future against a Brent cargo, one MRR against another). Liquidity risk is a mismatch of TIMING: daily variation margin on a multi-year hedge against an annual coupon. One leaves residual P&amp;L; the other can force you out of a hedge that was working.</a:t>
             </a:r>
             <a:endParaRPr lang="en-US" sz="1200" dirty="0"/>
           </a:p>
@@ -6627,7 +7504,7 @@
                 <a:ea typeface="Calibri" pitchFamily="34" charset="-122"/>
                 <a:cs typeface="Calibri" pitchFamily="34" charset="-120"/>
               </a:rPr>
-              <a:t>Source: CFA Institute, Curriculum Vol 7, Learning Module 3, "Issuer/Investor Use of Derivatives", pp. 67–72.</a:t>
+              <a:t>Source: CFA Institute, Curriculum Vol 7, Learning Module 3, "Issuer Use" / "Investor Use of Derivatives", pp. 67–72 (printed).</a:t>
             </a:r>
             <a:endParaRPr lang="en-US" sz="750" dirty="0"/>
           </a:p>
@@ -6669,7 +7546,7 @@
                 <a:ea typeface="Calibri" pitchFamily="34" charset="-122"/>
                 <a:cs typeface="Calibri" pitchFamily="34" charset="-120"/>
               </a:rPr>
-              <a:t>Issuers typically seek HEDGE ACCOUNTING (fair-value, cash-flow, or net-investment hedge) to minimize P&amp;L volatility from the derivative itself.</a:t>
+              <a:t>Issuers chase HEDGE ACCOUNTING — cash-flow, fair-value or net-investment — so the derivative's MTM lands in earnings alongside the item it hedges, not before it.</a:t>
             </a:r>
             <a:endParaRPr lang="en-US" sz="1300" dirty="0"/>
           </a:p>
@@ -6793,7 +7670,7 @@
                 <a:ea typeface="Calibri" pitchFamily="34" charset="-122"/>
                 <a:cs typeface="Calibri" pitchFamily="34" charset="-120"/>
               </a:rPr>
-              <a:t>•  FX export hedge (Montau KRW/EUR forward to lock revenue in EUR)</a:t>
+              <a:t>•  FX export hedge — Montau's KRW/EUR forward locks EUR revenue → CASH-FLOW hedge</a:t>
             </a:r>
             <a:endParaRPr lang="en-US" sz="1150" dirty="0"/>
           </a:p>
@@ -6816,7 +7693,7 @@
                 <a:ea typeface="Calibri" pitchFamily="34" charset="-122"/>
                 <a:cs typeface="Calibri" pitchFamily="34" charset="-120"/>
               </a:rPr>
-              <a:t>•  Commodity input hedge (airline buying jet-fuel swaps)</a:t>
+              <a:t>•  Commodity input hedge (airline buying jet-fuel swaps) → cash-flow hedge</a:t>
             </a:r>
             <a:endParaRPr lang="en-US" sz="1150" dirty="0"/>
           </a:p>
@@ -6839,7 +7716,7 @@
                 <a:ea typeface="Calibri" pitchFamily="34" charset="-122"/>
                 <a:cs typeface="Calibri" pitchFamily="34" charset="-120"/>
               </a:rPr>
-              <a:t>•  Convert floating-rate debt to fixed via pay-fixed IRS → cash-flow hedge accounting</a:t>
+              <a:t>•  Floating debt → fixed via pay-fixed IRS → CASH-FLOW hedge</a:t>
             </a:r>
             <a:endParaRPr lang="en-US" sz="1150" dirty="0"/>
           </a:p>
@@ -6862,7 +7739,7 @@
                 <a:ea typeface="Calibri" pitchFamily="34" charset="-122"/>
                 <a:cs typeface="Calibri" pitchFamily="34" charset="-120"/>
               </a:rPr>
-              <a:t>•  Convert fixed-rate debt to floating via receive-fixed IRS → fair-value hedge accounting</a:t>
+              <a:t>•  Fixed debt → floating via receive-fixed IRS → FAIR-VALUE hedge</a:t>
             </a:r>
             <a:endParaRPr lang="en-US" sz="1150" dirty="0"/>
           </a:p>
@@ -6885,7 +7762,7 @@
                 <a:ea typeface="Calibri" pitchFamily="34" charset="-122"/>
                 <a:cs typeface="Calibri" pitchFamily="34" charset="-120"/>
               </a:rPr>
-              <a:t>•  Pre-issuance rate lock via forward-starting swap</a:t>
+              <a:t>•  FX forward or swap against a foreign subsidiary's equity → NET-INVESTMENT hedge</a:t>
             </a:r>
             <a:endParaRPr lang="en-US" sz="1150" dirty="0"/>
           </a:p>
@@ -7009,7 +7886,7 @@
                 <a:ea typeface="Calibri" pitchFamily="34" charset="-122"/>
                 <a:cs typeface="Calibri" pitchFamily="34" charset="-120"/>
               </a:rPr>
-              <a:t>•  Modify portfolio duration via receive-fixed IRS (longer) or pay-fixed IRS (shorter) — no bond trading</a:t>
+              <a:t>•  Modify portfolio duration: receive-fixed IRS lengthens, pay-fixed shortens — no bond trading</a:t>
             </a:r>
             <a:endParaRPr lang="en-US" sz="1150" dirty="0"/>
           </a:p>
@@ -7078,7 +7955,7 @@
                 <a:ea typeface="Calibri" pitchFamily="34" charset="-122"/>
                 <a:cs typeface="Calibri" pitchFamily="34" charset="-120"/>
               </a:rPr>
-              <a:t>•  Hedge FX exposure on foreign equities / bonds</a:t>
+              <a:t>•  Hedge FX exposure on foreign equities and bonds</a:t>
             </a:r>
             <a:endParaRPr lang="en-US" sz="1150" dirty="0"/>
           </a:p>
@@ -7101,51 +7978,11 @@
                 <a:ea typeface="Calibri" pitchFamily="34" charset="-122"/>
                 <a:cs typeface="Calibri" pitchFamily="34" charset="-120"/>
               </a:rPr>
-              <a:t>•  Express credit view via CDS without holding the bond</a:t>
+              <a:t>•  Express a credit view via CDS without owning the bond</a:t>
             </a:r>
             <a:endParaRPr lang="en-US" sz="1150" dirty="0"/>
           </a:p>
         </p:txBody>
-      </p:sp>
-      <p:sp>
-        <p:nvSpPr>
-          <p:cNvPr id="17" name="Shape 15"/>
-          <p:cNvSpPr/>
-          <p:nvPr/>
-        </p:nvSpPr>
-        <p:spPr>
-          <a:xfrm>
-            <a:off x="320040" y="4389120"/>
-            <a:ext cx="8503920" cy="0"/>
-          </a:xfrm>
-          <a:prstGeom prst="rect">
-            <a:avLst/>
-          </a:prstGeom>
-          <a:solidFill>
-            <a:srgbClr val="FEF0E7"/>
-          </a:solidFill>
-          <a:ln/>
-        </p:spPr>
-      </p:sp>
-      <p:sp>
-        <p:nvSpPr>
-          <p:cNvPr id="18" name="Shape 16"/>
-          <p:cNvSpPr/>
-          <p:nvPr/>
-        </p:nvSpPr>
-        <p:spPr>
-          <a:xfrm>
-            <a:off x="320040" y="4389120"/>
-            <a:ext cx="73152" cy="0"/>
-          </a:xfrm>
-          <a:prstGeom prst="rect">
-            <a:avLst/>
-          </a:prstGeom>
-          <a:solidFill>
-            <a:srgbClr val="E8600A"/>
-          </a:solidFill>
-          <a:ln/>
-        </p:spPr>
       </p:sp>
     </p:spTree>
   </p:cSld>
@@ -7580,7 +8417,7 @@
                 <a:ea typeface="Calibri" pitchFamily="34" charset="-122"/>
                 <a:cs typeface="Calibri" pitchFamily="34" charset="-120"/>
               </a:rPr>
-              <a:t>Source: CFA Institute, Curriculum Vol 7, Learning Module 4, "Arbitrage and Replication", pp. 80–87.</a:t>
+              <a:t>Source: CFA Institute, Curriculum Vol 7, Learning Module 4, "Arbitrage" / "Replication", pp. 80–87 (printed).</a:t>
             </a:r>
             <a:endParaRPr lang="en-US" sz="750" dirty="0"/>
           </a:p>
@@ -7684,7 +8521,7 @@
                 <a:ea typeface="Consolas" pitchFamily="34" charset="-122"/>
                 <a:cs typeface="Consolas" pitchFamily="34" charset="-120"/>
               </a:rPr>
-              <a:t>Law of one price:   S_0  =  F_0(T) / (1 + r)^T        ⇔        F_0(T)  =  S_0 (1 + r)^T</a:t>
+              <a:t>S_0 = F_0(T) / (1 + r)^T      ⇔      F_0(T) = S_0 (1 + r)^T</a:t>
             </a:r>
             <a:endParaRPr lang="en-US" sz="1800" dirty="0"/>
           </a:p>
@@ -7740,8 +8577,8 @@
         </p:nvSpPr>
         <p:spPr>
           <a:xfrm>
-            <a:off x="320040" y="1920240"/>
-            <a:ext cx="2743200" cy="2331720"/>
+            <a:off x="320040" y="2148840"/>
+            <a:ext cx="2743200" cy="1737360"/>
           </a:xfrm>
           <a:prstGeom prst="rect">
             <a:avLst/>
@@ -7760,8 +8597,8 @@
         </p:nvSpPr>
         <p:spPr>
           <a:xfrm>
-            <a:off x="320040" y="1920240"/>
-            <a:ext cx="73152" cy="2331720"/>
+            <a:off x="320040" y="2148840"/>
+            <a:ext cx="73152" cy="1737360"/>
           </a:xfrm>
           <a:prstGeom prst="rect">
             <a:avLst/>
@@ -7780,7 +8617,7 @@
         </p:nvSpPr>
         <p:spPr>
           <a:xfrm>
-            <a:off x="457200" y="1965960"/>
+            <a:off x="457200" y="2194560"/>
             <a:ext cx="2514600" cy="256032"/>
           </a:xfrm>
           <a:prstGeom prst="rect">
@@ -7822,8 +8659,8 @@
         </p:nvSpPr>
         <p:spPr>
           <a:xfrm>
-            <a:off x="457200" y="2240280"/>
-            <a:ext cx="2514600" cy="1965960"/>
+            <a:off x="457200" y="2468880"/>
+            <a:ext cx="2514600" cy="1371600"/>
           </a:xfrm>
           <a:prstGeom prst="rect">
             <a:avLst/>
@@ -7850,7 +8687,7 @@
                 <a:ea typeface="Calibri" pitchFamily="34" charset="-122"/>
                 <a:cs typeface="Calibri" pitchFamily="34" charset="-120"/>
               </a:rPr>
-              <a:t>A trade that makes a RISKLESS positive profit with ZERO net investment. Requires simultaneous positions. In efficient markets, arbitrage is fleeting — but enforces the no-arb condition.</a:t>
+              <a:t>A trade that makes a RISKLESS positive profit with ZERO net investment. Requires simultaneous positions. In efficient markets arbitrage is fleeting — but it is what enforces the no-arbitrage condition.</a:t>
             </a:r>
             <a:endParaRPr lang="en-US" sz="1200" dirty="0"/>
           </a:p>
@@ -7864,8 +8701,8 @@
         </p:nvSpPr>
         <p:spPr>
           <a:xfrm>
-            <a:off x="3200400" y="1920240"/>
-            <a:ext cx="2743200" cy="2331720"/>
+            <a:off x="3200400" y="2148840"/>
+            <a:ext cx="2743200" cy="1737360"/>
           </a:xfrm>
           <a:prstGeom prst="rect">
             <a:avLst/>
@@ -7884,8 +8721,8 @@
         </p:nvSpPr>
         <p:spPr>
           <a:xfrm>
-            <a:off x="3200400" y="1920240"/>
-            <a:ext cx="73152" cy="2331720"/>
+            <a:off x="3200400" y="2148840"/>
+            <a:ext cx="73152" cy="1737360"/>
           </a:xfrm>
           <a:prstGeom prst="rect">
             <a:avLst/>
@@ -7904,7 +8741,7 @@
         </p:nvSpPr>
         <p:spPr>
           <a:xfrm>
-            <a:off x="3337560" y="1965960"/>
+            <a:off x="3337560" y="2194560"/>
             <a:ext cx="2514600" cy="256032"/>
           </a:xfrm>
           <a:prstGeom prst="rect">
@@ -7946,8 +8783,8 @@
         </p:nvSpPr>
         <p:spPr>
           <a:xfrm>
-            <a:off x="3337560" y="2240280"/>
-            <a:ext cx="2514600" cy="1965960"/>
+            <a:off x="3337560" y="2468880"/>
+            <a:ext cx="2514600" cy="1371600"/>
           </a:xfrm>
           <a:prstGeom prst="rect">
             <a:avLst/>
@@ -7974,7 +8811,7 @@
                 <a:ea typeface="Calibri" pitchFamily="34" charset="-122"/>
                 <a:cs typeface="Calibri" pitchFamily="34" charset="-120"/>
               </a:rPr>
-              <a:t>Reproduce a derivative's cash flows with a spot position + risk-free borrowing/lending. Long forward ≡ buy spot + borrow PV(F). If replication and derivative prices differ, arbitrage opens.</a:t>
+              <a:t>Reproduce a derivative's cash flows with a spot position plus risk-free borrowing or lending. Long forward ≡ buy spot + borrow S₀. If replication and derivative prices differ, arbitrage opens.</a:t>
             </a:r>
             <a:endParaRPr lang="en-US" sz="1200" dirty="0"/>
           </a:p>
@@ -7988,8 +8825,8 @@
         </p:nvSpPr>
         <p:spPr>
           <a:xfrm>
-            <a:off x="6080760" y="1920240"/>
-            <a:ext cx="2743200" cy="2331720"/>
+            <a:off x="6080760" y="2148840"/>
+            <a:ext cx="2743200" cy="1737360"/>
           </a:xfrm>
           <a:prstGeom prst="rect">
             <a:avLst/>
@@ -8008,8 +8845,8 @@
         </p:nvSpPr>
         <p:spPr>
           <a:xfrm>
-            <a:off x="6080760" y="1920240"/>
-            <a:ext cx="73152" cy="2331720"/>
+            <a:off x="6080760" y="2148840"/>
+            <a:ext cx="73152" cy="1737360"/>
           </a:xfrm>
           <a:prstGeom prst="rect">
             <a:avLst/>
@@ -8028,7 +8865,7 @@
         </p:nvSpPr>
         <p:spPr>
           <a:xfrm>
-            <a:off x="6217920" y="1965960"/>
+            <a:off x="6217920" y="2194560"/>
             <a:ext cx="2514600" cy="256032"/>
           </a:xfrm>
           <a:prstGeom prst="rect">
@@ -8070,8 +8907,8 @@
         </p:nvSpPr>
         <p:spPr>
           <a:xfrm>
-            <a:off x="6217920" y="2240280"/>
-            <a:ext cx="2514600" cy="1965960"/>
+            <a:off x="6217920" y="2468880"/>
+            <a:ext cx="2514600" cy="1371600"/>
           </a:xfrm>
           <a:prstGeom prst="rect">
             <a:avLst/>
@@ -8098,7 +8935,7 @@
                 <a:ea typeface="Calibri" pitchFamily="34" charset="-122"/>
                 <a:cs typeface="Calibri" pitchFamily="34" charset="-120"/>
               </a:rPr>
-              <a:t>Net cost of holding the underlying from 0 to T: opportunity cost r, plus C (storage), minus I (income earned). The forward price must cover this carry to prevent arbitrage.</a:t>
+              <a:t>Net cost of holding the underlying from 0 to T: opportunity cost r, PLUS costs C (storage, insurance), MINUS income I (dividends, coupons, convenience yield). F must cover the carry.</a:t>
             </a:r>
             <a:endParaRPr lang="en-US" sz="1200" dirty="0"/>
           </a:p>
@@ -8205,7 +9042,7 @@
                 <a:ea typeface="Trebuchet MS" pitchFamily="34" charset="-122"/>
                 <a:cs typeface="Trebuchet MS" pitchFamily="34" charset="-120"/>
               </a:rPr>
-              <a:t>If a forward is mispriced relative to the no-arbitrage spot-plus-carry, a cash-and-carry trade locks in a riskless profit — the worked example that pins F₀(T)</a:t>
+              <a:t>If a forward is mispriced relative to spot plus carry, a cash-and-carry trade locks in a riskless profit — the arbitrage that pins F₀(T)</a:t>
             </a:r>
             <a:endParaRPr lang="en-US" sz="1600" dirty="0"/>
           </a:p>
@@ -8309,7 +9146,7 @@
                 <a:ea typeface="Calibri" pitchFamily="34" charset="-122"/>
                 <a:cs typeface="Calibri" pitchFamily="34" charset="-120"/>
               </a:rPr>
-              <a:t>Source: CFA Institute, Curriculum Vol 7, Learning Module 4, Practice Problem 4, pp. 87.</a:t>
+              <a:t>Source: CFA Institute, Curriculum Vol 7, Learning Module 4, Question Set "Arbitrage and Replication", Q4, p. 87 (printed).</a:t>
             </a:r>
             <a:endParaRPr lang="en-US" sz="750" dirty="0"/>
           </a:p>
@@ -8351,7 +9188,7 @@
                 <a:ea typeface="Calibri" pitchFamily="34" charset="-122"/>
                 <a:cs typeface="Calibri" pitchFamily="34" charset="-120"/>
               </a:rPr>
-              <a:t>Sell the rich leg, buy the cheap leg, carry to maturity — the textbook arbitrage mechanic that every pricing formula in this section enforces.</a:t>
+              <a:t>Sell the rich leg, buy the cheap leg, carry to maturity. Every pricing formula in this deck is enforced by exactly this trade.</a:t>
             </a:r>
             <a:endParaRPr lang="en-US" sz="1300" dirty="0"/>
           </a:p>
@@ -8413,7 +9250,24 @@
                 <a:ea typeface="Consolas" pitchFamily="34" charset="-122"/>
                 <a:cs typeface="Consolas" pitchFamily="34" charset="-120"/>
               </a:rPr>
-              <a:t>No-arb:  F_0(T) = S_0 (1+r)^T     Observed F &gt; No-arb ⇒ SELL forward  +  BUY spot  +  BORROW S_0</a:t>
+              <a:t>No-arb:  F_0(T)  =  S_0 (1+r)^T</a:t>
+            </a:r>
+            <a:endParaRPr lang="en-US" sz="1800" dirty="0"/>
+          </a:p>
+          <a:p>
+            <a:pPr algn="ctr" indent="0" marL="0">
+              <a:buNone/>
+            </a:pPr>
+            <a:r>
+              <a:rPr lang="en-US" sz="1800" b="1" dirty="0">
+                <a:solidFill>
+                  <a:srgbClr val="FFFFFF"/>
+                </a:solidFill>
+                <a:latin typeface="Consolas" pitchFamily="34" charset="0"/>
+                <a:ea typeface="Consolas" pitchFamily="34" charset="-122"/>
+                <a:cs typeface="Consolas" pitchFamily="34" charset="-120"/>
+              </a:rPr>
+              <a:t>Observed F &gt; No-arb  ⇒  SELL forward + BUY spot + BORROW S_0</a:t>
             </a:r>
             <a:endParaRPr lang="en-US" sz="1800" dirty="0"/>
           </a:p>
@@ -8480,7 +9334,7 @@
                 <a:ea typeface="Trebuchet MS" pitchFamily="34" charset="-122"/>
                 <a:cs typeface="Trebuchet MS" pitchFamily="34" charset="-120"/>
               </a:rPr>
-              <a:t>CFA LM 4 PP#4 — CASH-AND-CARRY ARBITRAGE</a:t>
+              <a:t>CFA LM 4 — QUESTION SET Q4, PRINTED p. 87</a:t>
             </a:r>
             <a:endParaRPr lang="en-US" sz="1100" dirty="0"/>
           </a:p>
@@ -8522,7 +9376,7 @@
                 <a:ea typeface="Calibri" pitchFamily="34" charset="-122"/>
                 <a:cs typeface="Calibri" pitchFamily="34" charset="-120"/>
               </a:rPr>
-              <a:t>S₀ = USD 100; observed 3-month forward F₀ = USD 102; risk-free rate r = 5% p.a.; T = 0.25y. Underlying has no dividend or storage.</a:t>
+              <a:t>S₀ = 100; observed 3-month forward F₀ = 102; risk-free rate r = 5% p.a.; T = 0.25y. No dividend, no storage.</a:t>
             </a:r>
             <a:endParaRPr lang="en-US" sz="1200" dirty="0"/>
           </a:p>
@@ -8584,7 +9438,7 @@
                 <a:ea typeface="Calibri" pitchFamily="34" charset="-122"/>
                 <a:cs typeface="Calibri" pitchFamily="34" charset="-120"/>
               </a:rPr>
-              <a:t>Compute the no-arbitrage forward: F*_0(T) = 100 × (1.05)^0.25 = USD 101.23.
+              <a:t>No-arbitrage forward: F*₀(T) = 100 × (1.05)^0.25 = 101.23.
 </a:t>
             </a:r>
             <a:pPr indent="0" marL="0">
@@ -8619,7 +9473,7 @@
                 <a:ea typeface="Calibri" pitchFamily="34" charset="-122"/>
                 <a:cs typeface="Calibri" pitchFamily="34" charset="-120"/>
               </a:rPr>
-              <a:t>Observed 102 &gt; 101.23 ⇒ forward is RICH. Sell forward at 102, buy spot at 100, finance purchase by borrowing 100 at 5%.
+              <a:t>Observed 102 &gt; 101.23 ⇒ the forward is RICH. Sell the forward, buy the spot, borrow 100 at 5% to fund it.
 </a:t>
             </a:r>
             <a:pPr indent="0" marL="0">
@@ -8654,7 +9508,7 @@
                 <a:ea typeface="Calibri" pitchFamily="34" charset="-122"/>
                 <a:cs typeface="Calibri" pitchFamily="34" charset="-120"/>
               </a:rPr>
-              <a:t>At t = T: deliver the spot asset (held) and receive USD 102 under the forward.
+              <a:t>At t = T: deliver the asset you already hold and collect 102 under the forward.
 </a:t>
             </a:r>
             <a:pPr indent="0" marL="0">
@@ -8689,7 +9543,7 @@
                 <a:ea typeface="Calibri" pitchFamily="34" charset="-122"/>
                 <a:cs typeface="Calibri" pitchFamily="34" charset="-120"/>
               </a:rPr>
-              <a:t>Repay the loan: 100 × (1.05)^0.25 = USD 101.23. Keep the difference.
+              <a:t>Repay the loan: 100 × (1.05)^0.25 = 101.23.
 </a:t>
             </a:r>
             <a:pPr indent="0" marL="0">
@@ -8724,7 +9578,7 @@
                 <a:ea typeface="Calibri" pitchFamily="34" charset="-122"/>
                 <a:cs typeface="Calibri" pitchFamily="34" charset="-120"/>
               </a:rPr>
-              <a:t>Arbitrage profit = 102 − 101.23 = USD 0.77 per contract, riskless, zero net investment at t = 0.</a:t>
+              <a:t>Profit = 102 − 101.23 = 0.77, riskless, with zero net investment at t = 0.</a:t>
             </a:r>
             <a:endParaRPr lang="en-US" sz="1150" dirty="0"/>
           </a:p>
@@ -8786,7 +9640,7 @@
                 <a:ea typeface="Consolas" pitchFamily="34" charset="-122"/>
                 <a:cs typeface="Consolas" pitchFamily="34" charset="-120"/>
               </a:rPr>
-              <a:t>Riskless profit USD 0.77 pins the forward at 101.23 — this arbitrage is the proof of F₀(T) = S₀(1+r)^T.</a:t>
+              <a:t>Profit 0.77 pins the forward at 101.23. This trade IS the proof of F₀(T) = S₀(1+r)^T.</a:t>
             </a:r>
             <a:endParaRPr lang="en-US" sz="1150" dirty="0"/>
           </a:p>
@@ -8893,7 +9747,7 @@
                 <a:ea typeface="Trebuchet MS" pitchFamily="34" charset="-122"/>
                 <a:cs typeface="Trebuchet MS" pitchFamily="34" charset="-120"/>
               </a:rPr>
-              <a:t>A long forward commitment can be replicated by borrowing at r to buy the underlying at spot — the replication identity that gives F₀(T) = S₀(1+r)ᵀ</a:t>
+              <a:t>A long forward can be replicated by borrowing at r to buy the underlying at spot — the replication identity that gives F₀(T) = S₀(1+r)ᵀ</a:t>
             </a:r>
             <a:endParaRPr lang="en-US" sz="1600" dirty="0"/>
           </a:p>
@@ -8997,7 +9851,7 @@
                 <a:ea typeface="Calibri" pitchFamily="34" charset="-122"/>
                 <a:cs typeface="Calibri" pitchFamily="34" charset="-120"/>
               </a:rPr>
-              <a:t>Source: CFA Institute, Curriculum Vol 7, Learning Module 4, "Replication", pp. 83–87.</a:t>
+              <a:t>Source: CFA Institute, Curriculum Vol 7, Learning Module 4, "Replication" + Question Set Q3 and Q5, pp. 83–88 (printed).</a:t>
             </a:r>
             <a:endParaRPr lang="en-US" sz="750" dirty="0"/>
           </a:p>
@@ -9039,7 +9893,7 @@
                 <a:ea typeface="Calibri" pitchFamily="34" charset="-122"/>
                 <a:cs typeface="Calibri" pitchFamily="34" charset="-120"/>
               </a:rPr>
-              <a:t>Long forward ≡ LONG asset (financed) ; short forward ≡ SHORT asset (lend proceeds). This identity is why a forward has V₀ = 0.</a:t>
+              <a:t>Long forward ≡ LONG asset, financed. Short forward ≡ SHORT asset, proceeds lent. This identity is why a forward has V₀ = 0.</a:t>
             </a:r>
             <a:endParaRPr lang="en-US" sz="1300" dirty="0"/>
           </a:p>
@@ -9068,10 +9922,10 @@
             <a:tbl>
               <a:tblPr/>
               <a:tblGrid>
-                <a:gridCol w="2194560"/>
-                <a:gridCol w="2560320"/>
-                <a:gridCol w="2560320"/>
-                <a:gridCol w="1188720"/>
+                <a:gridCol w="2103120"/>
+                <a:gridCol w="2423160"/>
+                <a:gridCol w="2423160"/>
+                <a:gridCol w="1554480"/>
               </a:tblGrid>
               <a:tr h="274320">
                 <a:tc>
@@ -9495,7 +10349,7 @@
                           <a:ea typeface="Calibri" pitchFamily="34" charset="-122"/>
                           <a:cs typeface="Calibri" pitchFamily="34" charset="-120"/>
                         </a:rPr>
-                        <a:t>Replicate long: buy spot + borrow</a:t>
+                        <a:t>Replicate: buy spot + borrow</a:t>
                       </a:r>
                       <a:endParaRPr lang="en-US" sz="1100" dirty="0">
                         <a:latin typeface="Calibri" charset="0"/>
@@ -9595,7 +10449,7 @@
                           <a:ea typeface="Consolas" pitchFamily="34" charset="-122"/>
                           <a:cs typeface="Consolas" pitchFamily="34" charset="-120"/>
                         </a:rPr>
-                        <a:t>Own asset worth S_T; repay S₀(1+r)ᵀ</a:t>
+                        <a:t>Asset = S_T; repay S₀(1+r)ᵀ</a:t>
                       </a:r>
                       <a:endParaRPr lang="en-US" sz="1100" dirty="0">
                         <a:latin typeface="Consolas" charset="0"/>
@@ -9797,7 +10651,7 @@
                           <a:ea typeface="Consolas" pitchFamily="34" charset="-122"/>
                           <a:cs typeface="Consolas" pitchFamily="34" charset="-120"/>
                         </a:rPr>
-                        <a:t>Deliver asset, receive F₀(T)</a:t>
+                        <a:t>Deliver asset, get F₀(T)</a:t>
                       </a:r>
                       <a:endParaRPr lang="en-US" sz="1100" dirty="0">
                         <a:latin typeface="Consolas" charset="0"/>
@@ -9899,7 +10753,7 @@
                           <a:ea typeface="Calibri" pitchFamily="34" charset="-122"/>
                           <a:cs typeface="Calibri" pitchFamily="34" charset="-120"/>
                         </a:rPr>
-                        <a:t>Replicate short: short spot + lend</a:t>
+                        <a:t>Replicate: short spot + lend</a:t>
                       </a:r>
                       <a:endParaRPr lang="en-US" sz="1100" dirty="0">
                         <a:latin typeface="Calibri" charset="0"/>
@@ -9949,7 +10803,7 @@
                           <a:ea typeface="Consolas" pitchFamily="34" charset="-122"/>
                           <a:cs typeface="Consolas" pitchFamily="34" charset="-120"/>
                         </a:rPr>
-                        <a:t>Short-sell S at S₀; lend S₀ at r</a:t>
+                        <a:t>Short S at S₀; lend S₀ at r</a:t>
                       </a:r>
                       <a:endParaRPr lang="en-US" sz="1100" dirty="0">
                         <a:latin typeface="Consolas" charset="0"/>
@@ -9999,7 +10853,7 @@
                           <a:ea typeface="Consolas" pitchFamily="34" charset="-122"/>
                           <a:cs typeface="Consolas" pitchFamily="34" charset="-120"/>
                         </a:rPr>
-                        <a:t>Cover short at S_T; receive S₀(1+r)ᵀ</a:t>
+                        <a:t>Cover at S_T; get S₀(1+r)ᵀ</a:t>
                       </a:r>
                       <a:endParaRPr lang="en-US" sz="1100" dirty="0">
                         <a:latin typeface="Consolas" charset="0"/>
@@ -10095,8 +10949,8 @@
         </p:nvSpPr>
         <p:spPr>
           <a:xfrm>
-            <a:off x="320040" y="3383280"/>
-            <a:ext cx="8503920" cy="960120"/>
+            <a:off x="320040" y="2743200"/>
+            <a:ext cx="8503920" cy="1234440"/>
           </a:xfrm>
           <a:prstGeom prst="rect">
             <a:avLst/>
@@ -10115,8 +10969,8 @@
         </p:nvSpPr>
         <p:spPr>
           <a:xfrm>
-            <a:off x="320040" y="3383280"/>
-            <a:ext cx="73152" cy="960120"/>
+            <a:off x="320040" y="2743200"/>
+            <a:ext cx="73152" cy="1234440"/>
           </a:xfrm>
           <a:prstGeom prst="rect">
             <a:avLst/>
@@ -10135,7 +10989,7 @@
         </p:nvSpPr>
         <p:spPr>
           <a:xfrm>
-            <a:off x="457200" y="3429000"/>
+            <a:off x="457200" y="2788920"/>
             <a:ext cx="8275320" cy="256032"/>
           </a:xfrm>
           <a:prstGeom prst="rect">
@@ -10177,8 +11031,8 @@
         </p:nvSpPr>
         <p:spPr>
           <a:xfrm>
-            <a:off x="457200" y="3703320"/>
-            <a:ext cx="8275320" cy="594360"/>
+            <a:off x="457200" y="3063240"/>
+            <a:ext cx="8275320" cy="868680"/>
           </a:xfrm>
           <a:prstGeom prst="rect">
             <a:avLst/>
@@ -10205,7 +11059,7 @@
                 <a:ea typeface="Calibri" pitchFamily="34" charset="-122"/>
                 <a:cs typeface="Calibri" pitchFamily="34" charset="-120"/>
               </a:rPr>
-              <a:t>For the two long columns to be indifferent, S_T − F₀(T) must equal S_T − S₀(1+r)ᵀ, which forces F₀(T) = S₀(1+r)ᵀ. Negative r flips the sign: F₀ &lt; S₀. The replication identity extends to any asset once cost of carry is added.</a:t>
+              <a:t>For the two long rows to be indifferent, S_T − F₀(T) must equal S_T − S₀(1+r)ᵀ, which forces F₀(T) = S₀(1+r)ᵀ. Note what falls out: S_T cancels, so the identity holds for ANY future spot price — that is what makes it riskless. A negative r flips the sign and puts F₀ below S₀. Add carry and the same identity prices every asset class in this deck.</a:t>
             </a:r>
             <a:endParaRPr lang="en-US" sz="1200" dirty="0"/>
           </a:p>
@@ -10312,7 +11166,7 @@
                 <a:ea typeface="Trebuchet MS" pitchFamily="34" charset="-122"/>
                 <a:cs typeface="Trebuchet MS" pitchFamily="34" charset="-120"/>
               </a:rPr>
-              <a:t>Cost of carry adjusts the replication formula for income earned (I) and costs incurred (C) while holding the underlying — dividends lower F, storage costs raise F</a:t>
+              <a:t>Cost of carry adjusts the replication formula: costs of ownership are ADDED and income benefits are SUBTRACTED before compounding at r</a:t>
             </a:r>
             <a:endParaRPr lang="en-US" sz="1600" dirty="0"/>
           </a:p>
@@ -10388,6 +11242,46 @@
         </p:nvSpPr>
         <p:spPr>
           <a:xfrm>
+            <a:off x="320040" y="4471416"/>
+            <a:ext cx="8503920" cy="192024"/>
+          </a:xfrm>
+          <a:prstGeom prst="rect">
+            <a:avLst/>
+          </a:prstGeom>
+          <a:noFill/>
+          <a:ln/>
+        </p:spPr>
+        <p:txBody>
+          <a:bodyPr wrap="square" lIns="254" tIns="254" rIns="254" bIns="254" rtlCol="0" anchor="t"/>
+          <a:lstStyle/>
+          <a:p>
+            <a:pPr indent="0" marL="0">
+              <a:buNone/>
+            </a:pPr>
+            <a:r>
+              <a:rPr lang="en-US" sz="1000" dirty="0">
+                <a:solidFill>
+                  <a:srgbClr val="6B7A8D"/>
+                </a:solidFill>
+                <a:latin typeface="Calibri" pitchFamily="34" charset="0"/>
+                <a:ea typeface="Calibri" pitchFamily="34" charset="-122"/>
+                <a:cs typeface="Calibri" pitchFamily="34" charset="-120"/>
+              </a:rPr>
+              <a:t>¹ Contango (F &gt; S) / backwardation (F &lt; S) are market terms not used in Vol 7. A forward far below the no-arb price signals a convenience yield (p. 94).
+</a:t>
+            </a:r>
+            <a:endParaRPr lang="en-US" sz="1000" dirty="0"/>
+          </a:p>
+        </p:txBody>
+      </p:sp>
+      <p:sp>
+        <p:nvSpPr>
+          <p:cNvPr id="8" name="Text 6"/>
+          <p:cNvSpPr txBox="1"/>
+          <p:nvPr/>
+        </p:nvSpPr>
+        <p:spPr>
+          <a:xfrm>
             <a:off x="320040" y="4663440"/>
             <a:ext cx="8503920" cy="201168"/>
           </a:xfrm>
@@ -10416,7 +11310,7 @@
                 <a:ea typeface="Calibri" pitchFamily="34" charset="-122"/>
                 <a:cs typeface="Calibri" pitchFamily="34" charset="-120"/>
               </a:rPr>
-              <a:t>Source: CFA Institute, Curriculum Vol 7, Learning Module 4, "Costs and Benefits of Ownership", pp. 88–97.</a:t>
+              <a:t>Source: CFA Institute, Curriculum Vol 7, Learning Module 4, "Costs and Benefits of Owning the Underlying", Exhibits 8 and 10, pp. 88–96 (printed).</a:t>
             </a:r>
             <a:endParaRPr lang="en-US" sz="750" dirty="0"/>
           </a:p>
@@ -10424,7 +11318,7 @@
       </p:sp>
       <p:sp>
         <p:nvSpPr>
-          <p:cNvPr id="8" name="Text 6"/>
+          <p:cNvPr id="9" name="Text 7"/>
           <p:cNvSpPr txBox="1"/>
           <p:nvPr/>
         </p:nvSpPr>
@@ -10458,7 +11352,7 @@
                 <a:ea typeface="Calibri" pitchFamily="34" charset="-122"/>
                 <a:cs typeface="Calibri" pitchFamily="34" charset="-120"/>
               </a:rPr>
-              <a:t>Dividends, coupons, and convenience yields are BENEFITS the spot holder gets that the forward holder does not; storage, insurance, spoilage are added COSTS.</a:t>
+              <a:t>Dividends, coupons and convenience yields are BENEFITS the spot holder gets and the forward buyer does not. Storage, insurance and spoilage are added COSTS.</a:t>
             </a:r>
             <a:endParaRPr lang="en-US" sz="1300" dirty="0"/>
           </a:p>
@@ -10466,14 +11360,14 @@
       </p:sp>
       <p:sp>
         <p:nvSpPr>
-          <p:cNvPr id="9" name="Shape 7"/>
+          <p:cNvPr id="10" name="Shape 8"/>
           <p:cNvSpPr/>
           <p:nvPr/>
         </p:nvSpPr>
         <p:spPr>
           <a:xfrm>
             <a:off x="320040" y="1188720"/>
-            <a:ext cx="8503920" cy="749808"/>
+            <a:ext cx="8503920" cy="658368"/>
           </a:xfrm>
           <a:prstGeom prst="rect">
             <a:avLst/>
@@ -10486,14 +11380,14 @@
       </p:sp>
       <p:sp>
         <p:nvSpPr>
-          <p:cNvPr id="10" name="Text 8"/>
+          <p:cNvPr id="11" name="Text 9"/>
           <p:cNvSpPr txBox="1"/>
           <p:nvPr/>
         </p:nvSpPr>
         <p:spPr>
           <a:xfrm>
             <a:off x="411480" y="1188720"/>
-            <a:ext cx="8321040" cy="749808"/>
+            <a:ext cx="8321040" cy="658368"/>
           </a:xfrm>
           <a:prstGeom prst="rect">
             <a:avLst/>
@@ -10520,21 +11414,38 @@
                 <a:ea typeface="Consolas" pitchFamily="34" charset="-122"/>
                 <a:cs typeface="Consolas" pitchFamily="34" charset="-120"/>
               </a:rPr>
-              <a:t>Discrete:  F_0(T) = [S_0 − PV(I) + PV(C)] (1 + r)^T      Continuous:  F_0(T) = S_0 · e^((r + c − i) T)</a:t>
+              <a:t>Discrete:    F_0(T) = [S_0 − PV(I) + PV(C)] (1 + r)^T</a:t>
             </a:r>
             <a:endParaRPr lang="en-US" sz="1800" dirty="0"/>
           </a:p>
-        </p:txBody>
-      </p:sp>
-      <p:sp>
-        <p:nvSpPr>
-          <p:cNvPr id="11" name="Text 9"/>
+          <a:p>
+            <a:pPr algn="ctr" indent="0" marL="0">
+              <a:buNone/>
+            </a:pPr>
+            <a:r>
+              <a:rPr lang="en-US" sz="1800" b="1" dirty="0">
+                <a:solidFill>
+                  <a:srgbClr val="FFFFFF"/>
+                </a:solidFill>
+                <a:latin typeface="Consolas" pitchFamily="34" charset="0"/>
+                <a:ea typeface="Consolas" pitchFamily="34" charset="-122"/>
+                <a:cs typeface="Consolas" pitchFamily="34" charset="-120"/>
+              </a:rPr>
+              <a:t>Continuous:  F_0(T) = S_0 · e^((r + c − i) T)</a:t>
+            </a:r>
+            <a:endParaRPr lang="en-US" sz="1800" dirty="0"/>
+          </a:p>
+        </p:txBody>
+      </p:sp>
+      <p:sp>
+        <p:nvSpPr>
+          <p:cNvPr id="12" name="Text 10"/>
           <p:cNvSpPr txBox="1"/>
           <p:nvPr/>
         </p:nvSpPr>
         <p:spPr>
           <a:xfrm>
-            <a:off x="320040" y="1965960"/>
+            <a:off x="320040" y="1874520"/>
             <a:ext cx="8503920" cy="256032"/>
           </a:xfrm>
           <a:prstGeom prst="rect">
@@ -10562,7 +11473,7 @@
                 <a:ea typeface="Calibri" pitchFamily="34" charset="-122"/>
                 <a:cs typeface="Calibri" pitchFamily="34" charset="-120"/>
               </a:rPr>
-              <a:t>where: I, C = income and cost as present values; i, c = income and cost expressed as continuous rates of return; r = risk-free rate.</a:t>
+              <a:t>where: I, C = income and cost in present-value terms; i, c = income and cost as continuous rates; r = risk-free rate. Costs carry a PLUS, income a MINUS.</a:t>
             </a:r>
             <a:endParaRPr lang="en-US" sz="1100" dirty="0"/>
           </a:p>
@@ -10583,7 +11494,7 @@
           </p:nvPr>
         </p:nvGraphicFramePr>
         <p:xfrm>
-          <a:off x="320040" y="2103120"/>
+          <a:off x="320040" y="2212848"/>
           <a:ext cx="8503920" cy="914400"/>
         </p:xfrm>
         <a:graphic>
@@ -10591,10 +11502,10 @@
             <a:tbl>
               <a:tblPr/>
               <a:tblGrid>
-                <a:gridCol w="1920240"/>
-                <a:gridCol w="2834640"/>
-                <a:gridCol w="1920240"/>
-                <a:gridCol w="1828800"/>
+                <a:gridCol w="1874520"/>
+                <a:gridCol w="2514600"/>
+                <a:gridCol w="2011680"/>
+                <a:gridCol w="2103120"/>
               </a:tblGrid>
               <a:tr h="274320">
                 <a:tc>
@@ -10664,7 +11575,7 @@
                           <a:ea typeface="Trebuchet MS" pitchFamily="34" charset="-122"/>
                           <a:cs typeface="Trebuchet MS" pitchFamily="34" charset="-120"/>
                         </a:rPr>
-                        <a:t>Income benefit</a:t>
+                        <a:t>Benefit  (I, i)</a:t>
                       </a:r>
                       <a:endParaRPr lang="en-US" sz="1100" dirty="0">
                         <a:latin typeface="Trebuchet MS" charset="0"/>
@@ -10714,7 +11625,7 @@
                           <a:ea typeface="Trebuchet MS" pitchFamily="34" charset="-122"/>
                           <a:cs typeface="Trebuchet MS" pitchFamily="34" charset="-120"/>
                         </a:rPr>
-                        <a:t>Cost</a:t>
+                        <a:t>Cost  (C, c)</a:t>
                       </a:r>
                       <a:endParaRPr lang="en-US" sz="1100" dirty="0">
                         <a:latin typeface="Trebuchet MS" charset="0"/>
@@ -10816,7 +11727,7 @@
                           <a:ea typeface="Calibri" pitchFamily="34" charset="-122"/>
                           <a:cs typeface="Calibri" pitchFamily="34" charset="-120"/>
                         </a:rPr>
-                        <a:t>Non-dividend equity / zero</a:t>
+                        <a:t>Non-dividend equity</a:t>
                       </a:r>
                       <a:endParaRPr lang="en-US" sz="1100" dirty="0">
                         <a:latin typeface="Calibri" charset="0"/>
@@ -10966,7 +11877,7 @@
                           <a:ea typeface="Consolas" pitchFamily="34" charset="-122"/>
                           <a:cs typeface="Consolas" pitchFamily="34" charset="-120"/>
                         </a:rPr>
-                        <a:t>F &gt; S  (carry = r)</a:t>
+                        <a:t>F &gt; S (carry = r only)</a:t>
                       </a:r>
                       <a:endParaRPr lang="en-US" sz="1100" dirty="0">
                         <a:latin typeface="Consolas" charset="0"/>
@@ -11018,7 +11929,7 @@
                           <a:ea typeface="Calibri" pitchFamily="34" charset="-122"/>
                           <a:cs typeface="Calibri" pitchFamily="34" charset="-120"/>
                         </a:rPr>
-                        <a:t>Dividend-paying stock / index</a:t>
+                        <a:t>Dividend stock / index</a:t>
                       </a:r>
                       <a:endParaRPr lang="en-US" sz="1100" dirty="0">
                         <a:latin typeface="Calibri" charset="0"/>
@@ -11168,7 +12079,7 @@
                           <a:ea typeface="Consolas" pitchFamily="34" charset="-122"/>
                           <a:cs typeface="Consolas" pitchFamily="34" charset="-120"/>
                         </a:rPr>
-                        <a:t>F depends on (r − i)</a:t>
+                        <a:t>F &gt; S iff r &gt; i</a:t>
                       </a:r>
                       <a:endParaRPr lang="en-US" sz="1100" dirty="0">
                         <a:latin typeface="Consolas" charset="0"/>
@@ -11220,7 +12131,7 @@
                           <a:ea typeface="Calibri" pitchFamily="34" charset="-122"/>
                           <a:cs typeface="Calibri" pitchFamily="34" charset="-120"/>
                         </a:rPr>
-                        <a:t>Coupon bond</a:t>
+                        <a:t>Coupon bond (at par)</a:t>
                       </a:r>
                       <a:endParaRPr lang="en-US" sz="1100" dirty="0">
                         <a:latin typeface="Calibri" charset="0"/>
@@ -11270,7 +12181,7 @@
                           <a:ea typeface="Consolas" pitchFamily="34" charset="-122"/>
                           <a:cs typeface="Consolas" pitchFamily="34" charset="-120"/>
                         </a:rPr>
-                        <a:t>Coupon I</a:t>
+                        <a:t>Coupon income I</a:t>
                       </a:r>
                       <a:endParaRPr lang="en-US" sz="1100" dirty="0">
                         <a:latin typeface="Consolas" charset="0"/>
@@ -11370,7 +12281,7 @@
                           <a:ea typeface="Consolas" pitchFamily="34" charset="-122"/>
                           <a:cs typeface="Consolas" pitchFamily="34" charset="-120"/>
                         </a:rPr>
-                        <a:t>F usually &gt; S, less coupons</a:t>
+                        <a:t>F &lt; S iff coupon &gt; r</a:t>
                       </a:r>
                       <a:endParaRPr lang="en-US" sz="1100" dirty="0">
                         <a:latin typeface="Consolas" charset="0"/>
@@ -11422,7 +12333,7 @@
                           <a:ea typeface="Calibri" pitchFamily="34" charset="-122"/>
                           <a:cs typeface="Calibri" pitchFamily="34" charset="-120"/>
                         </a:rPr>
-                        <a:t>FX (f/d pair)</a:t>
+                        <a:t>FX, quoted f/d</a:t>
                       </a:r>
                       <a:endParaRPr lang="en-US" sz="1100" dirty="0">
                         <a:latin typeface="Calibri" charset="0"/>
@@ -11472,7 +12383,7 @@
                           <a:ea typeface="Consolas" pitchFamily="34" charset="-122"/>
                           <a:cs typeface="Consolas" pitchFamily="34" charset="-120"/>
                         </a:rPr>
-                        <a:t>Foreign r-free rate earned</a:t>
+                        <a:t>Base-ccy rate r_d</a:t>
                       </a:r>
                       <a:endParaRPr lang="en-US" sz="1100" dirty="0">
                         <a:latin typeface="Consolas" charset="0"/>
@@ -11522,7 +12433,7 @@
                           <a:ea typeface="Consolas" pitchFamily="34" charset="-122"/>
                           <a:cs typeface="Consolas" pitchFamily="34" charset="-120"/>
                         </a:rPr>
-                        <a:t>Domestic r-free rate paid</a:t>
+                        <a:t>Price-ccy rate r_f</a:t>
                       </a:r>
                       <a:endParaRPr lang="en-US" sz="1100" dirty="0">
                         <a:latin typeface="Consolas" charset="0"/>
@@ -11572,7 +12483,7 @@
                           <a:ea typeface="Consolas" pitchFamily="34" charset="-122"/>
                           <a:cs typeface="Consolas" pitchFamily="34" charset="-120"/>
                         </a:rPr>
-                        <a:t>Sign of (rf − rd) decides</a:t>
+                        <a:t>F &gt; S iff r_f &gt; r_d</a:t>
                       </a:r>
                       <a:endParaRPr lang="en-US" sz="1100" dirty="0">
                         <a:latin typeface="Consolas" charset="0"/>
@@ -11674,7 +12585,7 @@
                           <a:ea typeface="Consolas" pitchFamily="34" charset="-122"/>
                           <a:cs typeface="Consolas" pitchFamily="34" charset="-120"/>
                         </a:rPr>
-                        <a:t>Convenience yield (if scarce)</a:t>
+                        <a:t>Convenience yield</a:t>
                       </a:r>
                       <a:endParaRPr lang="en-US" sz="1100" dirty="0">
                         <a:latin typeface="Consolas" charset="0"/>
@@ -11724,7 +12635,7 @@
                           <a:ea typeface="Consolas" pitchFamily="34" charset="-122"/>
                           <a:cs typeface="Consolas" pitchFamily="34" charset="-120"/>
                         </a:rPr>
-                        <a:t>Storage, insurance, spoilage</a:t>
+                        <a:t>Storage, insurance</a:t>
                       </a:r>
                       <a:endParaRPr lang="en-US" sz="1100" dirty="0">
                         <a:latin typeface="Consolas" charset="0"/>
@@ -11774,7 +12685,7 @@
                           <a:ea typeface="Consolas" pitchFamily="34" charset="-122"/>
                           <a:cs typeface="Consolas" pitchFamily="34" charset="-120"/>
                         </a:rPr>
-                        <a:t>Often F &gt; S (contango); F &lt; S backwardation</a:t>
+                        <a:t>F &gt; S unless yield wins</a:t>
                       </a:r>
                       <a:endParaRPr lang="en-US" sz="1100" dirty="0">
                         <a:latin typeface="Consolas" charset="0"/>
@@ -11812,6 +12723,88 @@
           </a:graphicData>
         </a:graphic>
       </p:graphicFrame>
+      <p:sp>
+        <p:nvSpPr>
+          <p:cNvPr id="14" name="Shape 11"/>
+          <p:cNvSpPr/>
+          <p:nvPr/>
+        </p:nvSpPr>
+        <p:spPr>
+          <a:xfrm>
+            <a:off x="320040" y="3931920"/>
+            <a:ext cx="8503920" cy="438912"/>
+          </a:xfrm>
+          <a:prstGeom prst="rect">
+            <a:avLst/>
+          </a:prstGeom>
+          <a:solidFill>
+            <a:srgbClr val="FEF0E7"/>
+          </a:solidFill>
+          <a:ln/>
+        </p:spPr>
+      </p:sp>
+      <p:sp>
+        <p:nvSpPr>
+          <p:cNvPr id="15" name="Shape 12"/>
+          <p:cNvSpPr/>
+          <p:nvPr/>
+        </p:nvSpPr>
+        <p:spPr>
+          <a:xfrm>
+            <a:off x="320040" y="3931920"/>
+            <a:ext cx="73152" cy="438912"/>
+          </a:xfrm>
+          <a:prstGeom prst="rect">
+            <a:avLst/>
+          </a:prstGeom>
+          <a:solidFill>
+            <a:srgbClr val="E8600A"/>
+          </a:solidFill>
+          <a:ln/>
+        </p:spPr>
+      </p:sp>
+      <p:sp>
+        <p:nvSpPr>
+          <p:cNvPr id="16" name="Text 13"/>
+          <p:cNvSpPr txBox="1"/>
+          <p:nvPr/>
+        </p:nvSpPr>
+        <p:spPr>
+          <a:xfrm>
+            <a:off x="457200" y="4005072"/>
+            <a:ext cx="8275320" cy="329184"/>
+          </a:xfrm>
+          <a:prstGeom prst="rect">
+            <a:avLst/>
+          </a:prstGeom>
+          <a:noFill/>
+          <a:ln/>
+        </p:spPr>
+        <p:txBody>
+          <a:bodyPr wrap="square" lIns="508" tIns="508" rIns="508" bIns="508" rtlCol="0" anchor="t">
+            <a:normAutofit/>
+            <a:spAutoFit/>
+          </a:bodyPr>
+          <a:lstStyle/>
+          <a:p>
+            <a:pPr algn="l" indent="0" marL="0">
+              <a:buNone/>
+            </a:pPr>
+            <a:r>
+              <a:rPr lang="en-US" sz="1200" dirty="0">
+                <a:solidFill>
+                  <a:srgbClr val="334155"/>
+                </a:solidFill>
+                <a:latin typeface="Calibri" pitchFamily="34" charset="0"/>
+                <a:ea typeface="Calibri" pitchFamily="34" charset="-122"/>
+                <a:cs typeface="Calibri" pitchFamily="34" charset="-120"/>
+              </a:rPr>
+              <a:t>Sign check: if F came out ABOVE spot on a high-dividend stock, you added the income instead of subtracting it.</a:t>
+            </a:r>
+            <a:endParaRPr lang="en-US" sz="1200" dirty="0"/>
+          </a:p>
+        </p:txBody>
+      </p:sp>
     </p:spTree>
   </p:cSld>
   <p:clrMapOvr>
@@ -12116,7 +13109,7 @@
               <a:buNone/>
             </a:pPr>
             <a:r>
-              <a:rPr lang="en-US" sz="1700" b="1" dirty="0">
+              <a:rPr lang="en-US" sz="1600" b="1" dirty="0">
                 <a:solidFill>
                   <a:srgbClr val="FFFFFF"/>
                 </a:solidFill>
@@ -12124,9 +13117,9 @@
                 <a:ea typeface="Trebuchet MS" pitchFamily="34" charset="-122"/>
                 <a:cs typeface="Trebuchet MS" pitchFamily="34" charset="-120"/>
               </a:rPr>
-              <a:t>At inception the forward price equates the discounted future value of spot plus carry — V₀(T) = 0 to both counterparties</a:t>
-            </a:r>
-            <a:endParaRPr lang="en-US" sz="1700" dirty="0"/>
+              <a:t>PRICE vs VALUE: F₀(T) is set at inception so that V₀(T) = 0 for both sides — the price never changes again, the value changes every day</a:t>
+            </a:r>
+            <a:endParaRPr lang="en-US" sz="1600" dirty="0"/>
           </a:p>
         </p:txBody>
       </p:sp>
@@ -12228,7 +13221,7 @@
                 <a:ea typeface="Calibri" pitchFamily="34" charset="-122"/>
                 <a:cs typeface="Calibri" pitchFamily="34" charset="-120"/>
               </a:rPr>
-              <a:t>Source: CFA Institute, Curriculum Vol 7, Learning Module 5, "Pricing vs Valuation", pp. 102–106.</a:t>
+              <a:t>Source: CFA Institute, Curriculum Vol 7, Learning Module 5, Examples 1–2 (VFO / Biomian), pp. 104–107 (printed).</a:t>
             </a:r>
             <a:endParaRPr lang="en-US" sz="750" dirty="0"/>
           </a:p>
@@ -12270,7 +13263,7 @@
                 <a:ea typeface="Calibri" pitchFamily="34" charset="-122"/>
                 <a:cs typeface="Calibri" pitchFamily="34" charset="-120"/>
               </a:rPr>
-              <a:t>No cash changes hands at t=0 because the contract price already embeds the carry. Valuation only becomes non-zero once S, r, or time move.</a:t>
+              <a:t>No cash changes hands at t = 0 because the contract price already embeds the carry. Value only becomes non-zero once S, r or time move.</a:t>
             </a:r>
             <a:endParaRPr lang="en-US" sz="1300" dirty="0"/>
           </a:p>
@@ -12332,7 +13325,24 @@
                 <a:ea typeface="Consolas" pitchFamily="34" charset="-122"/>
                 <a:cs typeface="Consolas" pitchFamily="34" charset="-120"/>
               </a:rPr>
-              <a:t>F_0(T)  =  S_0 (1 + r)^T           V_0(T)  =  0   (to both long and short)</a:t>
+              <a:t>F_0(T)  =  S_0 (1 + r)^T</a:t>
+            </a:r>
+            <a:endParaRPr lang="en-US" sz="1800" dirty="0"/>
+          </a:p>
+          <a:p>
+            <a:pPr algn="ctr" indent="0" marL="0">
+              <a:buNone/>
+            </a:pPr>
+            <a:r>
+              <a:rPr lang="en-US" sz="1800" b="1" dirty="0">
+                <a:solidFill>
+                  <a:srgbClr val="FFFFFF"/>
+                </a:solidFill>
+                <a:latin typeface="Consolas" pitchFamily="34" charset="0"/>
+                <a:ea typeface="Consolas" pitchFamily="34" charset="-122"/>
+                <a:cs typeface="Consolas" pitchFamily="34" charset="-120"/>
+              </a:rPr>
+              <a:t>V_0(T)  =  0   (to both long and short)</a:t>
             </a:r>
             <a:endParaRPr lang="en-US" sz="1800" dirty="0"/>
           </a:p>
@@ -12374,7 +13384,7 @@
                 <a:ea typeface="Calibri" pitchFamily="34" charset="-122"/>
                 <a:cs typeface="Calibri" pitchFamily="34" charset="-120"/>
               </a:rPr>
-              <a:t>where: F_0(T) = pre-agreed forward price; V_0(T) = MTM value at inception; r, T consistent units.</a:t>
+              <a:t>where: F₀(T) is the PRICE — fixed for the life of the contract. V_t(T) is the VALUE — marked to market continuously.</a:t>
             </a:r>
             <a:endParaRPr lang="en-US" sz="1100" dirty="0"/>
           </a:p>
@@ -12388,8 +13398,8 @@
         </p:nvSpPr>
         <p:spPr>
           <a:xfrm>
-            <a:off x="320040" y="2331720"/>
-            <a:ext cx="8503920" cy="1965960"/>
+            <a:off x="320040" y="2194560"/>
+            <a:ext cx="8503920" cy="2103120"/>
           </a:xfrm>
           <a:prstGeom prst="rect">
             <a:avLst/>
@@ -12413,7 +13423,7 @@
         </p:nvSpPr>
         <p:spPr>
           <a:xfrm>
-            <a:off x="457200" y="2377440"/>
+            <a:off x="457200" y="2240280"/>
             <a:ext cx="8229600" cy="256032"/>
           </a:xfrm>
           <a:prstGeom prst="rect">
@@ -12441,7 +13451,7 @@
                 <a:ea typeface="Trebuchet MS" pitchFamily="34" charset="-122"/>
                 <a:cs typeface="Trebuchet MS" pitchFamily="34" charset="-120"/>
               </a:rPr>
-              <a:t>CFA LM 5 EXAMPLE — VFO BIOMIAN FORWARD AT INCEPTION</a:t>
+              <a:t>CFA LM 5 — VFO SELLS BIOMIAN FORWARD (PRINTED pp. 104–107)</a:t>
             </a:r>
             <a:endParaRPr lang="en-US" sz="1100" dirty="0"/>
           </a:p>
@@ -12455,7 +13465,7 @@
         </p:nvSpPr>
         <p:spPr>
           <a:xfrm>
-            <a:off x="457200" y="2670048"/>
+            <a:off x="457200" y="2532888"/>
             <a:ext cx="8229600" cy="457200"/>
           </a:xfrm>
           <a:prstGeom prst="rect">
@@ -12483,7 +13493,7 @@
                 <a:ea typeface="Calibri" pitchFamily="34" charset="-122"/>
                 <a:cs typeface="Calibri" pitchFamily="34" charset="-120"/>
               </a:rPr>
-              <a:t>VFO sells 1,000 Biomian shares forward to an intermediary. Spot S₀ = INR 295; T = 0.5 year; no dividend; risk-free rate r = 4%.</a:t>
+              <a:t>VFO sells 1,000 Biomian shares forward to an intermediary. S₀ = INR 295; T = 0.5y; no dividend; r = 4%.</a:t>
             </a:r>
             <a:endParaRPr lang="en-US" sz="1200" dirty="0"/>
           </a:p>
@@ -12497,8 +13507,8 @@
         </p:nvSpPr>
         <p:spPr>
           <a:xfrm>
-            <a:off x="457200" y="3182112"/>
-            <a:ext cx="8229600" cy="603504"/>
+            <a:off x="457200" y="3044952"/>
+            <a:ext cx="8229600" cy="740664"/>
           </a:xfrm>
           <a:prstGeom prst="rect">
             <a:avLst/>
@@ -12520,7 +13530,7 @@
               <a:buNone/>
             </a:pPr>
             <a:r>
-              <a:rPr lang="en-US" sz="1050" b="1" dirty="0">
+              <a:rPr lang="en-US" sz="1100" b="1" dirty="0">
                 <a:solidFill>
                   <a:srgbClr val="1B2A4A"/>
                 </a:solidFill>
@@ -12537,7 +13547,7 @@
               <a:buNone/>
             </a:pPr>
             <a:r>
-              <a:rPr lang="en-US" sz="1050" dirty="0">
+              <a:rPr lang="en-US" sz="1100" dirty="0">
                 <a:solidFill>
                   <a:srgbClr val="334155"/>
                 </a:solidFill>
@@ -12545,7 +13555,7 @@
                 <a:ea typeface="Calibri" pitchFamily="34" charset="-122"/>
                 <a:cs typeface="Calibri" pitchFamily="34" charset="-120"/>
               </a:rPr>
-              <a:t>Compute forward: F₀(T) = 295 × (1.04)^0.5
+              <a:t>F₀(T) = 295 × (1.04)^0.5 ; (1.04)^0.5 = 1.01980
 </a:t>
             </a:r>
             <a:pPr indent="0" marL="0">
@@ -12555,7 +13565,7 @@
               <a:buNone/>
             </a:pPr>
             <a:r>
-              <a:rPr lang="en-US" sz="1050" b="1" dirty="0">
+              <a:rPr lang="en-US" sz="1100" b="1" dirty="0">
                 <a:solidFill>
                   <a:srgbClr val="1B2A4A"/>
                 </a:solidFill>
@@ -12572,7 +13582,7 @@
               <a:buNone/>
             </a:pPr>
             <a:r>
-              <a:rPr lang="en-US" sz="1050" dirty="0">
+              <a:rPr lang="en-US" sz="1100" dirty="0">
                 <a:solidFill>
                   <a:srgbClr val="334155"/>
                 </a:solidFill>
@@ -12580,7 +13590,7 @@
                 <a:ea typeface="Calibri" pitchFamily="34" charset="-122"/>
                 <a:cs typeface="Calibri" pitchFamily="34" charset="-120"/>
               </a:rPr>
-              <a:t>(1.04)^0.5 = 1.01980
+              <a:t>F₀(T) = 295 × 1.01980 = INR 300.84 per share
 </a:t>
             </a:r>
             <a:pPr indent="0" marL="0">
@@ -12590,7 +13600,7 @@
               <a:buNone/>
             </a:pPr>
             <a:r>
-              <a:rPr lang="en-US" sz="1050" b="1" dirty="0">
+              <a:rPr lang="en-US" sz="1100" b="1" dirty="0">
                 <a:solidFill>
                   <a:srgbClr val="1B2A4A"/>
                 </a:solidFill>
@@ -12607,7 +13617,7 @@
               <a:buNone/>
             </a:pPr>
             <a:r>
-              <a:rPr lang="en-US" sz="1050" dirty="0">
+              <a:rPr lang="en-US" sz="1100" dirty="0">
                 <a:solidFill>
                   <a:srgbClr val="334155"/>
                 </a:solidFill>
@@ -12615,7 +13625,7 @@
                 <a:ea typeface="Calibri" pitchFamily="34" charset="-122"/>
                 <a:cs typeface="Calibri" pitchFamily="34" charset="-120"/>
               </a:rPr>
-              <a:t>F₀(T) = 295 × 1.01980 = INR 300.84 per share
+              <a:t>V₀(T) = 0 for BOTH sides — the 4% is already inside the 300.84
 </a:t>
             </a:r>
             <a:pPr indent="0" marL="0">
@@ -12625,7 +13635,7 @@
               <a:buNone/>
             </a:pPr>
             <a:r>
-              <a:rPr lang="en-US" sz="1050" b="1" dirty="0">
+              <a:rPr lang="en-US" sz="1100" b="1" dirty="0">
                 <a:solidFill>
                   <a:srgbClr val="1B2A4A"/>
                 </a:solidFill>
@@ -12642,7 +13652,7 @@
               <a:buNone/>
             </a:pPr>
             <a:r>
-              <a:rPr lang="en-US" sz="1050" dirty="0">
+              <a:rPr lang="en-US" sz="1100" dirty="0">
                 <a:solidFill>
                   <a:srgbClr val="334155"/>
                 </a:solidFill>
@@ -12650,9 +13660,9 @@
                 <a:ea typeface="Calibri" pitchFamily="34" charset="-122"/>
                 <a:cs typeface="Calibri" pitchFamily="34" charset="-120"/>
               </a:rPr>
-              <a:t>V₀(T) = 0: VFO has not yet gained or lost — the 4% r is already baked in</a:t>
-            </a:r>
-            <a:endParaRPr lang="en-US" sz="1050" dirty="0"/>
+              <a:t>At maturity, S_T = 287 ⇒ VFO (short) gains 13.84; S_T = 312 ⇒ VFO loses 11.16</a:t>
+            </a:r>
+            <a:endParaRPr lang="en-US" sz="1100" dirty="0"/>
           </a:p>
         </p:txBody>
       </p:sp>
@@ -12712,7 +13722,7 @@
                 <a:ea typeface="Consolas" pitchFamily="34" charset="-122"/>
                 <a:cs typeface="Consolas" pitchFamily="34" charset="-120"/>
               </a:rPr>
-              <a:t>F₀(T) = INR 300.84  — contract size = 1,000 × 300.84 = INR 300,840.</a:t>
+              <a:t>F₀(T) = INR 300.84. Contract size 1,000 × 300.84 = INR 300,840.</a:t>
             </a:r>
             <a:endParaRPr lang="en-US" sz="1150" dirty="0"/>
           </a:p>
@@ -13255,7 +14265,7 @@
                 <a:ea typeface="Calibri" pitchFamily="34" charset="-122"/>
                 <a:cs typeface="Calibri" pitchFamily="34" charset="-120"/>
               </a:rPr>
-              <a:t>Risk transfer · price discovery · ops efficiency · leverage / basis / liquidity / credit risk · issuer vs investor</a:t>
+              <a:t>Risk transfer · price discovery · ops efficiency · six curriculum risks · issuer vs investor</a:t>
             </a:r>
             <a:endParaRPr lang="en-US" sz="1100" dirty="0"/>
           </a:p>
@@ -13860,7 +14870,7 @@
                 <a:ea typeface="Trebuchet MS" pitchFamily="34" charset="-122"/>
                 <a:cs typeface="Trebuchet MS" pitchFamily="34" charset="-120"/>
               </a:rPr>
-              <a:t>After inception, the MTM of a long forward is the current spot minus the PV of the original forward price — the position re-values as S and r move</a:t>
+              <a:t>After inception, the MTM of a long forward is current spot minus the PV of the original forward price — and a higher r shrinks the short's gain</a:t>
             </a:r>
             <a:endParaRPr lang="en-US" sz="1600" dirty="0"/>
           </a:p>
@@ -13964,7 +14974,7 @@
                 <a:ea typeface="Calibri" pitchFamily="34" charset="-122"/>
                 <a:cs typeface="Calibri" pitchFamily="34" charset="-120"/>
               </a:rPr>
-              <a:t>Source: CFA Institute, Curriculum Vol 7, Learning Module 5, "Pricing and Valuation over Life", pp. 106–110.</a:t>
+              <a:t>Source: CFA Institute, Curriculum Vol 7, Learning Module 5, Example 3 (VFO / Biomian MTM), pp. 106–108 (printed).</a:t>
             </a:r>
             <a:endParaRPr lang="en-US" sz="750" dirty="0"/>
           </a:p>
@@ -14006,7 +15016,7 @@
                 <a:ea typeface="Calibri" pitchFamily="34" charset="-122"/>
                 <a:cs typeface="Calibri" pitchFamily="34" charset="-120"/>
               </a:rPr>
-              <a:t>Intuition: a forward is a PROMISE to pay F₀ at T; that promise re-values when the PV of F₀ moves away from the current spot.</a:t>
+              <a:t>Intuition: a forward is a PROMISE to pay F₀ at T. That promise re-values whenever the PV of F₀ drifts away from the current spot.</a:t>
             </a:r>
             <a:endParaRPr lang="en-US" sz="1300" dirty="0"/>
           </a:p>
@@ -14068,7 +15078,24 @@
                 <a:ea typeface="Consolas" pitchFamily="34" charset="-122"/>
                 <a:cs typeface="Consolas" pitchFamily="34" charset="-120"/>
               </a:rPr>
-              <a:t>V_t(T) long  =  S_t  −  F_0(T) (1 + r)^−(T − t)        V_t(T) short  =  F_0(T) (1 + r)^−(T − t)  −  S_t</a:t>
+              <a:t>V_t(T) long   =  S_t − F_0(T)(1 + r)^−(T−t)</a:t>
+            </a:r>
+            <a:endParaRPr lang="en-US" sz="1800" dirty="0"/>
+          </a:p>
+          <a:p>
+            <a:pPr algn="ctr" indent="0" marL="0">
+              <a:buNone/>
+            </a:pPr>
+            <a:r>
+              <a:rPr lang="en-US" sz="1800" b="1" dirty="0">
+                <a:solidFill>
+                  <a:srgbClr val="FFFFFF"/>
+                </a:solidFill>
+                <a:latin typeface="Consolas" pitchFamily="34" charset="0"/>
+                <a:ea typeface="Consolas" pitchFamily="34" charset="-122"/>
+                <a:cs typeface="Consolas" pitchFamily="34" charset="-120"/>
+              </a:rPr>
+              <a:t>V_t(T) short  =  F_0(T)(1 + r)^−(T−t) − S_t</a:t>
             </a:r>
             <a:endParaRPr lang="en-US" sz="1800" dirty="0"/>
           </a:p>
@@ -14110,7 +15137,7 @@
                 <a:ea typeface="Calibri" pitchFamily="34" charset="-122"/>
                 <a:cs typeface="Calibri" pitchFamily="34" charset="-120"/>
               </a:rPr>
-              <a:t>where: S_t = spot price now; T − t = remaining life; r = current risk-free rate.</a:t>
+              <a:t>where: S_t = spot price now; T − t = remaining life; r = current risk-free rate. Note F₀(T) is unchanged — only its PV moves.</a:t>
             </a:r>
             <a:endParaRPr lang="en-US" sz="1100" dirty="0"/>
           </a:p>
@@ -14124,8 +15151,8 @@
         </p:nvSpPr>
         <p:spPr>
           <a:xfrm>
-            <a:off x="320040" y="2331720"/>
-            <a:ext cx="8503920" cy="1965960"/>
+            <a:off x="320040" y="2194560"/>
+            <a:ext cx="8503920" cy="2103120"/>
           </a:xfrm>
           <a:prstGeom prst="rect">
             <a:avLst/>
@@ -14149,7 +15176,7 @@
         </p:nvSpPr>
         <p:spPr>
           <a:xfrm>
-            <a:off x="457200" y="2377440"/>
+            <a:off x="457200" y="2240280"/>
             <a:ext cx="8229600" cy="256032"/>
           </a:xfrm>
           <a:prstGeom prst="rect">
@@ -14177,7 +15204,7 @@
                 <a:ea typeface="Trebuchet MS" pitchFamily="34" charset="-122"/>
                 <a:cs typeface="Trebuchet MS" pitchFamily="34" charset="-120"/>
               </a:rPr>
-              <a:t>CFA LM 5 EXAMPLE 3 — VFO MTM AT t = 0.25</a:t>
+              <a:t>CFA LM 5 EXAMPLE 3 — VFO MTM AT t = 0.25 (PRINTED p. 108)</a:t>
             </a:r>
             <a:endParaRPr lang="en-US" sz="1100" dirty="0"/>
           </a:p>
@@ -14191,7 +15218,7 @@
         </p:nvSpPr>
         <p:spPr>
           <a:xfrm>
-            <a:off x="457200" y="2670048"/>
+            <a:off x="457200" y="2532888"/>
             <a:ext cx="8229600" cy="457200"/>
           </a:xfrm>
           <a:prstGeom prst="rect">
@@ -14219,7 +15246,7 @@
                 <a:ea typeface="Calibri" pitchFamily="34" charset="-122"/>
                 <a:cs typeface="Calibri" pitchFamily="34" charset="-120"/>
               </a:rPr>
-              <a:t>Biomian short forward (seller): F₀ = INR 300.84, r = 4%, T = 0.5y. At t = 0.25, spot has fallen to S_t = INR 285. Compute VFO's MTM.</a:t>
+              <a:t>VFO is SHORT: F₀ = INR 300.84, r = 4%, T = 0.5y. At t = 0.25 spot has fallen to S_t = INR 285.</a:t>
             </a:r>
             <a:endParaRPr lang="en-US" sz="1200" dirty="0"/>
           </a:p>
@@ -14233,8 +15260,8 @@
         </p:nvSpPr>
         <p:spPr>
           <a:xfrm>
-            <a:off x="457200" y="3182112"/>
-            <a:ext cx="8229600" cy="603504"/>
+            <a:off x="457200" y="3044952"/>
+            <a:ext cx="8229600" cy="740664"/>
           </a:xfrm>
           <a:prstGeom prst="rect">
             <a:avLst/>
@@ -14256,7 +15283,7 @@
               <a:buNone/>
             </a:pPr>
             <a:r>
-              <a:rPr lang="en-US" sz="1050" b="1" dirty="0">
+              <a:rPr lang="en-US" sz="1100" b="1" dirty="0">
                 <a:solidFill>
                   <a:srgbClr val="1B2A4A"/>
                 </a:solidFill>
@@ -14273,7 +15300,7 @@
               <a:buNone/>
             </a:pPr>
             <a:r>
-              <a:rPr lang="en-US" sz="1050" dirty="0">
+              <a:rPr lang="en-US" sz="1100" dirty="0">
                 <a:solidFill>
                   <a:srgbClr val="334155"/>
                 </a:solidFill>
@@ -14291,7 +15318,7 @@
               <a:buNone/>
             </a:pPr>
             <a:r>
-              <a:rPr lang="en-US" sz="1050" b="1" dirty="0">
+              <a:rPr lang="en-US" sz="1100" b="1" dirty="0">
                 <a:solidFill>
                   <a:srgbClr val="1B2A4A"/>
                 </a:solidFill>
@@ -14308,7 +15335,7 @@
               <a:buNone/>
             </a:pPr>
             <a:r>
-              <a:rPr lang="en-US" sz="1050" dirty="0">
+              <a:rPr lang="en-US" sz="1100" dirty="0">
                 <a:solidFill>
                   <a:srgbClr val="334155"/>
                 </a:solidFill>
@@ -14316,7 +15343,7 @@
                 <a:ea typeface="Calibri" pitchFamily="34" charset="-122"/>
                 <a:cs typeface="Calibri" pitchFamily="34" charset="-120"/>
               </a:rPr>
-              <a:t>VFO short MTM: V_t = F₀(1+r)^−(T−t) − S_t = 297.90 − 285
+              <a:t>Short MTM: V_t = F₀(1+r)^−(T−t) − S_t = 297.90 − 285 = INR 12.90 per share
 </a:t>
             </a:r>
             <a:pPr indent="0" marL="0">
@@ -14326,7 +15353,7 @@
               <a:buNone/>
             </a:pPr>
             <a:r>
-              <a:rPr lang="en-US" sz="1050" b="1" dirty="0">
+              <a:rPr lang="en-US" sz="1100" b="1" dirty="0">
                 <a:solidFill>
                   <a:srgbClr val="1B2A4A"/>
                 </a:solidFill>
@@ -14343,7 +15370,7 @@
               <a:buNone/>
             </a:pPr>
             <a:r>
-              <a:rPr lang="en-US" sz="1050" dirty="0">
+              <a:rPr lang="en-US" sz="1100" dirty="0">
                 <a:solidFill>
                   <a:srgbClr val="334155"/>
                 </a:solidFill>
@@ -14351,7 +15378,7 @@
                 <a:ea typeface="Calibri" pitchFamily="34" charset="-122"/>
                 <a:cs typeface="Calibri" pitchFamily="34" charset="-120"/>
               </a:rPr>
-              <a:t>V_t = INR 12.90 per share  →  total 1,000 × 12.90 = INR 12,900 gain
+              <a:t>Total: 1,000 × 12.90 = INR 12,900 gain to VFO
 </a:t>
             </a:r>
             <a:pPr indent="0" marL="0">
@@ -14361,7 +15388,7 @@
               <a:buNone/>
             </a:pPr>
             <a:r>
-              <a:rPr lang="en-US" sz="1050" b="1" dirty="0">
+              <a:rPr lang="en-US" sz="1100" b="1" dirty="0">
                 <a:solidFill>
                   <a:srgbClr val="1B2A4A"/>
                 </a:solidFill>
@@ -14378,7 +15405,7 @@
               <a:buNone/>
             </a:pPr>
             <a:r>
-              <a:rPr lang="en-US" sz="1050" dirty="0">
+              <a:rPr lang="en-US" sz="1100" dirty="0">
                 <a:solidFill>
                   <a:srgbClr val="334155"/>
                 </a:solidFill>
@@ -14386,9 +15413,9 @@
                 <a:ea typeface="Calibri" pitchFamily="34" charset="-122"/>
                 <a:cs typeface="Calibri" pitchFamily="34" charset="-120"/>
               </a:rPr>
-              <a:t>If r had risen to 8%: PV(F₀) = 300.84 × (1.08)^−0.25 = 295.11 → MTM only 10.11 (higher r shrinks short's gain)</a:t>
-            </a:r>
-            <a:endParaRPr lang="en-US" sz="1050" dirty="0"/>
+              <a:t>Now double r to 8%: PV(F₀) = 300.84 × (1.08)^−0.25 = 295.11 → MTM 10.11, a fall of 2.79</a:t>
+            </a:r>
+            <a:endParaRPr lang="en-US" sz="1100" dirty="0"/>
           </a:p>
         </p:txBody>
       </p:sp>
@@ -14448,7 +15475,7 @@
                 <a:ea typeface="Consolas" pitchFamily="34" charset="-122"/>
                 <a:cs typeface="Consolas" pitchFamily="34" charset="-120"/>
               </a:rPr>
-              <a:t>Short MTM gain = INR 12.90/share at r = 4%; falls to INR 10.11/share at r = 8%.</a:t>
+              <a:t>Short gains 12.90/share at r = 4%, only 10.11/share at r = 8%.</a:t>
             </a:r>
             <a:endParaRPr lang="en-US" sz="1150" dirty="0"/>
           </a:p>
@@ -14659,7 +15686,7 @@
                 <a:ea typeface="Calibri" pitchFamily="34" charset="-122"/>
                 <a:cs typeface="Calibri" pitchFamily="34" charset="-120"/>
               </a:rPr>
-              <a:t>Source: CFA Institute, Curriculum Vol 7, Learning Module 4, Example 4 (Hightest / Unilever), pp. 90–91.</a:t>
+              <a:t>Source: CFA Institute, Curriculum Vol 7, Learning Module 4, Example 4 (Hightest / Unilever), p. 90 (printed).</a:t>
             </a:r>
             <a:endParaRPr lang="en-US" sz="750" dirty="0"/>
           </a:p>
@@ -14701,7 +15728,7 @@
                 <a:ea typeface="Calibri" pitchFamily="34" charset="-122"/>
                 <a:cs typeface="Calibri" pitchFamily="34" charset="-120"/>
               </a:rPr>
-              <a:t>Rule: subtract the PV of every dividend paid BEFORE maturity from S₀ before capitalizing at r. Dividends paid AFTER T are irrelevant.</a:t>
+              <a:t>Rule: subtract the PV of every dividend paid BEFORE maturity from S₀ before compounding at r. Dividends paid AFTER T are irrelevant.</a:t>
             </a:r>
             <a:endParaRPr lang="en-US" sz="1300" dirty="0"/>
           </a:p>
@@ -14805,7 +15832,7 @@
                 <a:ea typeface="Calibri" pitchFamily="34" charset="-122"/>
                 <a:cs typeface="Calibri" pitchFamily="34" charset="-120"/>
               </a:rPr>
-              <a:t>where: PV_0(I) = present value at t = 0 of every income (dividend/coupon) received over [0, T].</a:t>
+              <a:t>where: PV₀(I) = present value at t = 0 of every income payment (dividend, coupon) received over the interval [0, T].</a:t>
             </a:r>
             <a:endParaRPr lang="en-US" sz="1100" dirty="0"/>
           </a:p>
@@ -14819,8 +15846,8 @@
         </p:nvSpPr>
         <p:spPr>
           <a:xfrm>
-            <a:off x="320040" y="2331720"/>
-            <a:ext cx="8503920" cy="1965960"/>
+            <a:off x="320040" y="2194560"/>
+            <a:ext cx="8503920" cy="2103120"/>
           </a:xfrm>
           <a:prstGeom prst="rect">
             <a:avLst/>
@@ -14844,7 +15871,7 @@
         </p:nvSpPr>
         <p:spPr>
           <a:xfrm>
-            <a:off x="457200" y="2377440"/>
+            <a:off x="457200" y="2240280"/>
             <a:ext cx="8229600" cy="256032"/>
           </a:xfrm>
           <a:prstGeom prst="rect">
@@ -14872,7 +15899,7 @@
                 <a:ea typeface="Trebuchet MS" pitchFamily="34" charset="-122"/>
                 <a:cs typeface="Trebuchet MS" pitchFamily="34" charset="-120"/>
               </a:rPr>
-              <a:t>HIGHTEST / UNILEVER EQUITY FORWARD — T = 0.5y</a:t>
+              <a:t>CFA LM 4 EXAMPLE 4 — HIGHTEST / UNILEVER, T = 0.5y (PRINTED p. 90)</a:t>
             </a:r>
             <a:endParaRPr lang="en-US" sz="1100" dirty="0"/>
           </a:p>
@@ -14886,7 +15913,7 @@
         </p:nvSpPr>
         <p:spPr>
           <a:xfrm>
-            <a:off x="457200" y="2670048"/>
+            <a:off x="457200" y="2532888"/>
             <a:ext cx="8229600" cy="457200"/>
           </a:xfrm>
           <a:prstGeom prst="rect">
@@ -14914,7 +15941,7 @@
                 <a:ea typeface="Calibri" pitchFamily="34" charset="-122"/>
                 <a:cs typeface="Calibri" pitchFamily="34" charset="-120"/>
               </a:rPr>
-              <a:t>Hightest delivers 1,000 UL shares in 6 months. S₀ = EUR 50. UL pays quarterly dividend 0.30 at t = 0.25 and t = 0.5. r = 5%.</a:t>
+              <a:t>Hightest delivers 1,000 UL shares in six months. S₀ = EUR 50. UL pays a EUR 0.30 dividend at t = 0.25 and again at t = 0.5. r = 5%.</a:t>
             </a:r>
             <a:endParaRPr lang="en-US" sz="1200" dirty="0"/>
           </a:p>
@@ -14928,8 +15955,8 @@
         </p:nvSpPr>
         <p:spPr>
           <a:xfrm>
-            <a:off x="457200" y="3182112"/>
-            <a:ext cx="8229600" cy="603504"/>
+            <a:off x="457200" y="3044952"/>
+            <a:ext cx="8229600" cy="740664"/>
           </a:xfrm>
           <a:prstGeom prst="rect">
             <a:avLst/>
@@ -14951,7 +15978,7 @@
               <a:buNone/>
             </a:pPr>
             <a:r>
-              <a:rPr lang="en-US" sz="1050" b="1" dirty="0">
+              <a:rPr lang="en-US" sz="1100" b="1" dirty="0">
                 <a:solidFill>
                   <a:srgbClr val="1B2A4A"/>
                 </a:solidFill>
@@ -14968,7 +15995,7 @@
               <a:buNone/>
             </a:pPr>
             <a:r>
-              <a:rPr lang="en-US" sz="1050" dirty="0">
+              <a:rPr lang="en-US" sz="1100" dirty="0">
                 <a:solidFill>
                   <a:srgbClr val="334155"/>
                 </a:solidFill>
@@ -14976,7 +16003,7 @@
                 <a:ea typeface="Calibri" pitchFamily="34" charset="-122"/>
                 <a:cs typeface="Calibri" pitchFamily="34" charset="-120"/>
               </a:rPr>
-              <a:t>PV(I) = 0.30 × (1.05)^−0.25 + 0.30 × (1.05)^−0.5
+              <a:t>PV(I) = 0.30 × (1.05)^−0.25 + 0.30 × (1.05)^−0.5 = 0.2964 + 0.2928 = EUR 0.5892
 </a:t>
             </a:r>
             <a:pPr indent="0" marL="0">
@@ -14986,7 +16013,7 @@
               <a:buNone/>
             </a:pPr>
             <a:r>
-              <a:rPr lang="en-US" sz="1050" b="1" dirty="0">
+              <a:rPr lang="en-US" sz="1100" b="1" dirty="0">
                 <a:solidFill>
                   <a:srgbClr val="1B2A4A"/>
                 </a:solidFill>
@@ -15003,7 +16030,7 @@
               <a:buNone/>
             </a:pPr>
             <a:r>
-              <a:rPr lang="en-US" sz="1050" dirty="0">
+              <a:rPr lang="en-US" sz="1100" dirty="0">
                 <a:solidFill>
                   <a:srgbClr val="334155"/>
                 </a:solidFill>
@@ -15011,7 +16038,7 @@
                 <a:ea typeface="Calibri" pitchFamily="34" charset="-122"/>
                 <a:cs typeface="Calibri" pitchFamily="34" charset="-120"/>
               </a:rPr>
-              <a:t>= 0.2964 + 0.2928 = EUR 0.5892
+              <a:t>F₀(T) = (50 − 0.5892) × (1.05)^0.5 = 49.4108 × 1.02470 = EUR 50.6310
 </a:t>
             </a:r>
             <a:pPr indent="0" marL="0">
@@ -15021,7 +16048,7 @@
               <a:buNone/>
             </a:pPr>
             <a:r>
-              <a:rPr lang="en-US" sz="1050" b="1" dirty="0">
+              <a:rPr lang="en-US" sz="1100" b="1" dirty="0">
                 <a:solidFill>
                   <a:srgbClr val="1B2A4A"/>
                 </a:solidFill>
@@ -15038,7 +16065,7 @@
               <a:buNone/>
             </a:pPr>
             <a:r>
-              <a:rPr lang="en-US" sz="1050" dirty="0">
+              <a:rPr lang="en-US" sz="1100" dirty="0">
                 <a:solidFill>
                   <a:srgbClr val="334155"/>
                 </a:solidFill>
@@ -15046,7 +16073,7 @@
                 <a:ea typeface="Calibri" pitchFamily="34" charset="-122"/>
                 <a:cs typeface="Calibri" pitchFamily="34" charset="-120"/>
               </a:rPr>
-              <a:t>F₀(T) = (50 − 0.5892) × (1.05)^0.5
+              <a:t>Contract value = 1,000 × 50.6310 = EUR 50,631.00
 </a:t>
             </a:r>
             <a:pPr indent="0" marL="0">
@@ -15056,7 +16083,7 @@
               <a:buNone/>
             </a:pPr>
             <a:r>
-              <a:rPr lang="en-US" sz="1050" b="1" dirty="0">
+              <a:rPr lang="en-US" sz="1100" b="1" dirty="0">
                 <a:solidFill>
                   <a:srgbClr val="1B2A4A"/>
                 </a:solidFill>
@@ -15073,7 +16100,7 @@
               <a:buNone/>
             </a:pPr>
             <a:r>
-              <a:rPr lang="en-US" sz="1050" dirty="0">
+              <a:rPr lang="en-US" sz="1100" dirty="0">
                 <a:solidFill>
                   <a:srgbClr val="334155"/>
                 </a:solidFill>
@@ -15081,44 +16108,9 @@
                 <a:ea typeface="Calibri" pitchFamily="34" charset="-122"/>
                 <a:cs typeface="Calibri" pitchFamily="34" charset="-120"/>
               </a:rPr>
-              <a:t>= 49.4108 × 1.02470 = EUR 50.6310 per share
-</a:t>
-            </a:r>
-            <a:pPr indent="0" marL="0">
-              <a:spcAft>
-                <a:spcPts val="200"/>
-              </a:spcAft>
-              <a:buNone/>
-            </a:pPr>
-            <a:r>
-              <a:rPr lang="en-US" sz="1050" b="1" dirty="0">
-                <a:solidFill>
-                  <a:srgbClr val="1B2A4A"/>
-                </a:solidFill>
-                <a:latin typeface="Calibri" pitchFamily="34" charset="0"/>
-                <a:ea typeface="Calibri" pitchFamily="34" charset="-122"/>
-                <a:cs typeface="Calibri" pitchFamily="34" charset="-120"/>
-              </a:rPr>
-              <a:t>5. </a:t>
-            </a:r>
-            <a:pPr indent="0" marL="0">
-              <a:spcAft>
-                <a:spcPts val="200"/>
-              </a:spcAft>
-              <a:buNone/>
-            </a:pPr>
-            <a:r>
-              <a:rPr lang="en-US" sz="1050" dirty="0">
-                <a:solidFill>
-                  <a:srgbClr val="334155"/>
-                </a:solidFill>
-                <a:latin typeface="Calibri" pitchFamily="34" charset="0"/>
-                <a:ea typeface="Calibri" pitchFamily="34" charset="-122"/>
-                <a:cs typeface="Calibri" pitchFamily="34" charset="-120"/>
-              </a:rPr>
-              <a:t>Contract value = 1,000 × 50.6310 = EUR 50,631.00</a:t>
-            </a:r>
-            <a:endParaRPr lang="en-US" sz="1050" dirty="0"/>
+              <a:t>Without dividends: 50 × (1.05)^0.5 = 51.23. Carry over spot falls from 1.23 to 0.63.</a:t>
+            </a:r>
+            <a:endParaRPr lang="en-US" sz="1100" dirty="0"/>
           </a:p>
         </p:txBody>
       </p:sp>
@@ -15178,7 +16170,7 @@
                 <a:ea typeface="Consolas" pitchFamily="34" charset="-122"/>
                 <a:cs typeface="Consolas" pitchFamily="34" charset="-120"/>
               </a:rPr>
-              <a:t>F₀ = EUR 50.6310. Without dividends F₀ would be 50 × (1.05)^0.5 = 51.23 → 0.60 lower because of PV(dividends).</a:t>
+              <a:t>F₀ = EUR 50.6310 — dividends cut the forward premium from EUR 1.23 to EUR 0.63.</a:t>
             </a:r>
             <a:endParaRPr lang="en-US" sz="1150" dirty="0"/>
           </a:p>
@@ -15277,7 +16269,7 @@
               <a:buNone/>
             </a:pPr>
             <a:r>
-              <a:rPr lang="en-US" sz="1700" b="1" dirty="0">
+              <a:rPr lang="en-US" sz="1600" b="1" dirty="0">
                 <a:solidFill>
                   <a:srgbClr val="FFFFFF"/>
                 </a:solidFill>
@@ -15285,9 +16277,9 @@
                 <a:ea typeface="Trebuchet MS" pitchFamily="34" charset="-122"/>
                 <a:cs typeface="Trebuchet MS" pitchFamily="34" charset="-120"/>
               </a:rPr>
-              <a:t>An equity index forward with continuous dividend yield uses F₀(T) = S₀ · e^((r − i) T) — the standard for index futures pricing</a:t>
-            </a:r>
-            <a:endParaRPr lang="en-US" sz="1700" dirty="0"/>
+              <a:t>For an equity index, dividends are modelled as a continuous yield — the forward compounds spot at the NET carry, r minus i, not at r alone</a:t>
+            </a:r>
+            <a:endParaRPr lang="en-US" sz="1600" dirty="0"/>
           </a:p>
         </p:txBody>
       </p:sp>
@@ -15389,7 +16381,7 @@
                 <a:ea typeface="Calibri" pitchFamily="34" charset="-122"/>
                 <a:cs typeface="Calibri" pitchFamily="34" charset="-120"/>
               </a:rPr>
-              <a:t>Source: CFA Institute, Curriculum Vol 7, Learning Module 4, Example 5 (VFO / NIFTY 50), pp. 91.</a:t>
+              <a:t>Source: CFA Institute, Curriculum Vol 7, Learning Module 4, Example 5 (VFO / NIFTY 50), p. 91 (printed).</a:t>
             </a:r>
             <a:endParaRPr lang="en-US" sz="750" dirty="0"/>
           </a:p>
@@ -15431,7 +16423,7 @@
                 <a:ea typeface="Calibri" pitchFamily="34" charset="-122"/>
                 <a:cs typeface="Calibri" pitchFamily="34" charset="-120"/>
               </a:rPr>
-              <a:t>For indexes, dividends are treated as a CONTINUOUS yield i because the many constituents smear payment dates. r − i is the net carry.</a:t>
+              <a:t>For indexes, dividends are modelled as a CONTINUOUS yield i because the constituents smear payment dates across the whole year.</a:t>
             </a:r>
             <a:endParaRPr lang="en-US" sz="1300" dirty="0"/>
           </a:p>
@@ -15493,7 +16485,24 @@
                 <a:ea typeface="Consolas" pitchFamily="34" charset="-122"/>
                 <a:cs typeface="Consolas" pitchFamily="34" charset="-120"/>
               </a:rPr>
-              <a:t>F_0(T)  =  S_0 · e^( ( r + c − i ) T )          (for indexes c = 0  ⇒  F_0 = S_0 · e^((r − i)T))</a:t>
+              <a:t>F_0(T)  =  S_0 · e^( ( r + c − i ) T )</a:t>
+            </a:r>
+            <a:endParaRPr lang="en-US" sz="1800" dirty="0"/>
+          </a:p>
+          <a:p>
+            <a:pPr algn="ctr" indent="0" marL="0">
+              <a:buNone/>
+            </a:pPr>
+            <a:r>
+              <a:rPr lang="en-US" sz="1800" b="1" dirty="0">
+                <a:solidFill>
+                  <a:srgbClr val="FFFFFF"/>
+                </a:solidFill>
+                <a:latin typeface="Consolas" pitchFamily="34" charset="0"/>
+                <a:ea typeface="Consolas" pitchFamily="34" charset="-122"/>
+                <a:cs typeface="Consolas" pitchFamily="34" charset="-120"/>
+              </a:rPr>
+              <a:t>for an index c = 0   ⇒   F_0  =  S_0 · e^( ( r − i ) T )</a:t>
             </a:r>
             <a:endParaRPr lang="en-US" sz="1800" dirty="0"/>
           </a:p>
@@ -15549,8 +16558,8 @@
         </p:nvSpPr>
         <p:spPr>
           <a:xfrm>
-            <a:off x="320040" y="2331720"/>
-            <a:ext cx="8503920" cy="1965960"/>
+            <a:off x="320040" y="2194560"/>
+            <a:ext cx="8503920" cy="2103120"/>
           </a:xfrm>
           <a:prstGeom prst="rect">
             <a:avLst/>
@@ -15574,7 +16583,7 @@
         </p:nvSpPr>
         <p:spPr>
           <a:xfrm>
-            <a:off x="457200" y="2377440"/>
+            <a:off x="457200" y="2240280"/>
             <a:ext cx="8229600" cy="256032"/>
           </a:xfrm>
           <a:prstGeom prst="rect">
@@ -15602,7 +16611,7 @@
                 <a:ea typeface="Trebuchet MS" pitchFamily="34" charset="-122"/>
                 <a:cs typeface="Trebuchet MS" pitchFamily="34" charset="-120"/>
               </a:rPr>
-              <a:t>VFO NIFTY 50 THREE-MONTH INDEX FORWARD</a:t>
+              <a:t>CFA LM 4 EXAMPLE 5 — VFO NIFTY 50, 3 MONTHS (PRINTED p. 91)</a:t>
             </a:r>
             <a:endParaRPr lang="en-US" sz="1100" dirty="0"/>
           </a:p>
@@ -15616,7 +16625,7 @@
         </p:nvSpPr>
         <p:spPr>
           <a:xfrm>
-            <a:off x="457200" y="2670048"/>
+            <a:off x="457200" y="2532888"/>
             <a:ext cx="8229600" cy="457200"/>
           </a:xfrm>
           <a:prstGeom prst="rect">
@@ -15644,7 +16653,7 @@
                 <a:ea typeface="Calibri" pitchFamily="34" charset="-122"/>
                 <a:cs typeface="Calibri" pitchFamily="34" charset="-120"/>
               </a:rPr>
-              <a:t>Spot NIFTY 50 = INR 15,200. Dividend yield i = 2.2%. INR risk-free r = 4.0%. T = 0.25y. Compute F₀.</a:t>
+              <a:t>Spot NIFTY 50 = INR 15,200. Index dividend yield i = 2.2%. INR risk-free r = 4.0%. T = 0.25y.</a:t>
             </a:r>
             <a:endParaRPr lang="en-US" sz="1200" dirty="0"/>
           </a:p>
@@ -15658,8 +16667,8 @@
         </p:nvSpPr>
         <p:spPr>
           <a:xfrm>
-            <a:off x="457200" y="3182112"/>
-            <a:ext cx="8229600" cy="603504"/>
+            <a:off x="457200" y="3044952"/>
+            <a:ext cx="8229600" cy="740664"/>
           </a:xfrm>
           <a:prstGeom prst="rect">
             <a:avLst/>
@@ -15681,7 +16690,7 @@
               <a:buNone/>
             </a:pPr>
             <a:r>
-              <a:rPr lang="en-US" sz="1050" b="1" dirty="0">
+              <a:rPr lang="en-US" sz="1100" b="1" dirty="0">
                 <a:solidFill>
                   <a:srgbClr val="1B2A4A"/>
                 </a:solidFill>
@@ -15698,7 +16707,7 @@
               <a:buNone/>
             </a:pPr>
             <a:r>
-              <a:rPr lang="en-US" sz="1050" dirty="0">
+              <a:rPr lang="en-US" sz="1100" dirty="0">
                 <a:solidFill>
                   <a:srgbClr val="334155"/>
                 </a:solidFill>
@@ -15716,7 +16725,7 @@
               <a:buNone/>
             </a:pPr>
             <a:r>
-              <a:rPr lang="en-US" sz="1050" b="1" dirty="0">
+              <a:rPr lang="en-US" sz="1100" b="1" dirty="0">
                 <a:solidFill>
                   <a:srgbClr val="1B2A4A"/>
                 </a:solidFill>
@@ -15733,7 +16742,7 @@
               <a:buNone/>
             </a:pPr>
             <a:r>
-              <a:rPr lang="en-US" sz="1050" dirty="0">
+              <a:rPr lang="en-US" sz="1100" dirty="0">
                 <a:solidFill>
                   <a:srgbClr val="334155"/>
                 </a:solidFill>
@@ -15751,7 +16760,7 @@
               <a:buNone/>
             </a:pPr>
             <a:r>
-              <a:rPr lang="en-US" sz="1050" b="1" dirty="0">
+              <a:rPr lang="en-US" sz="1100" b="1" dirty="0">
                 <a:solidFill>
                   <a:srgbClr val="1B2A4A"/>
                 </a:solidFill>
@@ -15768,7 +16777,7 @@
               <a:buNone/>
             </a:pPr>
             <a:r>
-              <a:rPr lang="en-US" sz="1050" dirty="0">
+              <a:rPr lang="en-US" sz="1100" dirty="0">
                 <a:solidFill>
                   <a:srgbClr val="334155"/>
                 </a:solidFill>
@@ -15776,7 +16785,7 @@
                 <a:ea typeface="Calibri" pitchFamily="34" charset="-122"/>
                 <a:cs typeface="Calibri" pitchFamily="34" charset="-120"/>
               </a:rPr>
-              <a:t>e^0.0045 ≈ 1.004510
+              <a:t>e^0.0045 = 1.004510
 </a:t>
             </a:r>
             <a:pPr indent="0" marL="0">
@@ -15786,7 +16795,7 @@
               <a:buNone/>
             </a:pPr>
             <a:r>
-              <a:rPr lang="en-US" sz="1050" b="1" dirty="0">
+              <a:rPr lang="en-US" sz="1100" b="1" dirty="0">
                 <a:solidFill>
                   <a:srgbClr val="1B2A4A"/>
                 </a:solidFill>
@@ -15803,7 +16812,7 @@
               <a:buNone/>
             </a:pPr>
             <a:r>
-              <a:rPr lang="en-US" sz="1050" dirty="0">
+              <a:rPr lang="en-US" sz="1100" dirty="0">
                 <a:solidFill>
                   <a:srgbClr val="334155"/>
                 </a:solidFill>
@@ -15813,7 +16822,7 @@
               </a:rPr>
               <a:t>F₀ = 15,200 × 1.004510 = INR 15,268.55</a:t>
             </a:r>
-            <a:endParaRPr lang="en-US" sz="1050" dirty="0"/>
+            <a:endParaRPr lang="en-US" sz="1100" dirty="0"/>
           </a:p>
         </p:txBody>
       </p:sp>
@@ -15873,7 +16882,7 @@
                 <a:ea typeface="Consolas" pitchFamily="34" charset="-122"/>
                 <a:cs typeface="Consolas" pitchFamily="34" charset="-120"/>
               </a:rPr>
-              <a:t>F₀ = INR 15,268.55. If i &gt; r, the forward would be BELOW spot — dividends outweigh opportunity cost.</a:t>
+              <a:t>F₀ = INR 15,268.55. If i exceeded r the forward would sit BELOW spot.</a:t>
             </a:r>
             <a:endParaRPr lang="en-US" sz="1150" dirty="0"/>
           </a:p>
@@ -15980,7 +16989,7 @@
                 <a:ea typeface="Trebuchet MS" pitchFamily="34" charset="-122"/>
                 <a:cs typeface="Trebuchet MS" pitchFamily="34" charset="-120"/>
               </a:rPr>
-              <a:t>FX forwards price off covered interest-rate parity — the forward exchange rate is the spot rate grown at the interest-rate differential, not the level</a:t>
+              <a:t>FX forwards price off covered interest-rate parity — the forward is spot grown at the interest-rate DIFFERENTIAL, never at the level of rates</a:t>
             </a:r>
             <a:endParaRPr lang="en-US" sz="1600" dirty="0"/>
           </a:p>
@@ -16084,7 +17093,7 @@
                 <a:ea typeface="Calibri" pitchFamily="34" charset="-122"/>
                 <a:cs typeface="Calibri" pitchFamily="34" charset="-120"/>
               </a:rPr>
-              <a:t>Source: CFA Institute, Curriculum Vol 7, Learning Module 4, Example 6 (AUD/USD replication), pp. 91–93.</a:t>
+              <a:t>Source: CFA Institute, Curriculum Vol 7, Learning Module 4, Example 6 (AUD/USD replication) and Exhibit 9, pp. 91–93 (printed).</a:t>
             </a:r>
             <a:endParaRPr lang="en-US" sz="750" dirty="0"/>
           </a:p>
@@ -16126,7 +17135,7 @@
                 <a:ea typeface="Calibri" pitchFamily="34" charset="-122"/>
                 <a:cs typeface="Calibri" pitchFamily="34" charset="-120"/>
               </a:rPr>
-              <a:t>Borrow in domestic, convert spot, lend in foreign, lock the FX at forward — two risk-free strategies must return the same, which forces F.</a:t>
+              <a:t>Borrow domestic, convert at spot, lend foreign, lock the rate forward. Two riskless strategies must return the same — that equality forces F.</a:t>
             </a:r>
             <a:endParaRPr lang="en-US" sz="1300" dirty="0"/>
           </a:p>
@@ -16230,7 +17239,7 @@
                 <a:ea typeface="Calibri" pitchFamily="34" charset="-122"/>
                 <a:cs typeface="Calibri" pitchFamily="34" charset="-120"/>
               </a:rPr>
-              <a:t>where: f = price (foreign) currency (numerator); d = base (domestic) currency (denominator). Forward quote in same convention as spot.</a:t>
+              <a:t>where: f = PRICE currency (numerator); d = BASE currency (denominator). S = units of f per one unit of d. Forward quoted the same way as spot.</a:t>
             </a:r>
             <a:endParaRPr lang="en-US" sz="1100" dirty="0"/>
           </a:p>
@@ -16244,8 +17253,8 @@
         </p:nvSpPr>
         <p:spPr>
           <a:xfrm>
-            <a:off x="320040" y="2331720"/>
-            <a:ext cx="8503920" cy="1965960"/>
+            <a:off x="320040" y="2194560"/>
+            <a:ext cx="8503920" cy="2103120"/>
           </a:xfrm>
           <a:prstGeom prst="rect">
             <a:avLst/>
@@ -16269,7 +17278,7 @@
         </p:nvSpPr>
         <p:spPr>
           <a:xfrm>
-            <a:off x="457200" y="2377440"/>
+            <a:off x="457200" y="2240280"/>
             <a:ext cx="8229600" cy="256032"/>
           </a:xfrm>
           <a:prstGeom prst="rect">
@@ -16297,7 +17306,7 @@
                 <a:ea typeface="Trebuchet MS" pitchFamily="34" charset="-122"/>
                 <a:cs typeface="Trebuchet MS" pitchFamily="34" charset="-120"/>
               </a:rPr>
-              <a:t>AUD/USD 6-MONTH FORWARD — IRP IN ACTION</a:t>
+              <a:t>CFA LM 4 EXAMPLE 6 — AUD/USD SIX-MONTH FORWARD (PRINTED pp. 91–92)</a:t>
             </a:r>
             <a:endParaRPr lang="en-US" sz="1100" dirty="0"/>
           </a:p>
@@ -16311,7 +17320,7 @@
         </p:nvSpPr>
         <p:spPr>
           <a:xfrm>
-            <a:off x="457200" y="2670048"/>
+            <a:off x="457200" y="2532888"/>
             <a:ext cx="8229600" cy="457200"/>
           </a:xfrm>
           <a:prstGeom prst="rect">
@@ -16339,7 +17348,7 @@
                 <a:ea typeface="Calibri" pitchFamily="34" charset="-122"/>
                 <a:cs typeface="Calibri" pitchFamily="34" charset="-120"/>
               </a:rPr>
-              <a:t>Spot S₀ = 1.3335 AUD/USD (f = AUD, d = USD). 6m AUD r_f = 0.05%; 6m USD r_d = 0.20%. T = 0.5y.</a:t>
+              <a:t>Spot S₀ = 1.3335 AUD/USD (AUD is the price currency f, USD the base currency d). 6m AUD r_f = 0.05%; 6m USD r_d = 0.20%. T = 0.5y.</a:t>
             </a:r>
             <a:endParaRPr lang="en-US" sz="1200" dirty="0"/>
           </a:p>
@@ -16353,8 +17362,8 @@
         </p:nvSpPr>
         <p:spPr>
           <a:xfrm>
-            <a:off x="457200" y="3182112"/>
-            <a:ext cx="8229600" cy="603504"/>
+            <a:off x="457200" y="3044952"/>
+            <a:ext cx="8229600" cy="740664"/>
           </a:xfrm>
           <a:prstGeom prst="rect">
             <a:avLst/>
@@ -16376,7 +17385,7 @@
               <a:buNone/>
             </a:pPr>
             <a:r>
-              <a:rPr lang="en-US" sz="1050" b="1" dirty="0">
+              <a:rPr lang="en-US" sz="1100" b="1" dirty="0">
                 <a:solidFill>
                   <a:srgbClr val="1B2A4A"/>
                 </a:solidFill>
@@ -16393,7 +17402,7 @@
               <a:buNone/>
             </a:pPr>
             <a:r>
-              <a:rPr lang="en-US" sz="1050" dirty="0">
+              <a:rPr lang="en-US" sz="1100" dirty="0">
                 <a:solidFill>
                   <a:srgbClr val="334155"/>
                 </a:solidFill>
@@ -16401,7 +17410,7 @@
                 <a:ea typeface="Calibri" pitchFamily="34" charset="-122"/>
                 <a:cs typeface="Calibri" pitchFamily="34" charset="-120"/>
               </a:rPr>
-              <a:t>Interest-rate differential (r_f − r_d) = 0.0005 − 0.0020 = −0.0015 p.a.
+              <a:t>Differential (r_f − r_d) = 0.0005 − 0.0020 = −0.0015 p.a.
 </a:t>
             </a:r>
             <a:pPr indent="0" marL="0">
@@ -16411,7 +17420,7 @@
               <a:buNone/>
             </a:pPr>
             <a:r>
-              <a:rPr lang="en-US" sz="1050" b="1" dirty="0">
+              <a:rPr lang="en-US" sz="1100" b="1" dirty="0">
                 <a:solidFill>
                   <a:srgbClr val="1B2A4A"/>
                 </a:solidFill>
@@ -16428,7 +17437,7 @@
               <a:buNone/>
             </a:pPr>
             <a:r>
-              <a:rPr lang="en-US" sz="1050" dirty="0">
+              <a:rPr lang="en-US" sz="1100" dirty="0">
                 <a:solidFill>
                   <a:srgbClr val="334155"/>
                 </a:solidFill>
@@ -16436,7 +17445,7 @@
                 <a:ea typeface="Calibri" pitchFamily="34" charset="-122"/>
                 <a:cs typeface="Calibri" pitchFamily="34" charset="-120"/>
               </a:rPr>
-              <a:t>Exponent = −0.0015 × 0.5 = −0.00075
+              <a:t>Exponent = −0.0015 × 0.5 = −0.00075 ; e^−0.00075 = 0.999250
 </a:t>
             </a:r>
             <a:pPr indent="0" marL="0">
@@ -16446,7 +17455,7 @@
               <a:buNone/>
             </a:pPr>
             <a:r>
-              <a:rPr lang="en-US" sz="1050" b="1" dirty="0">
+              <a:rPr lang="en-US" sz="1100" b="1" dirty="0">
                 <a:solidFill>
                   <a:srgbClr val="1B2A4A"/>
                 </a:solidFill>
@@ -16463,7 +17472,7 @@
               <a:buNone/>
             </a:pPr>
             <a:r>
-              <a:rPr lang="en-US" sz="1050" dirty="0">
+              <a:rPr lang="en-US" sz="1100" dirty="0">
                 <a:solidFill>
                   <a:srgbClr val="334155"/>
                 </a:solidFill>
@@ -16471,7 +17480,7 @@
                 <a:ea typeface="Calibri" pitchFamily="34" charset="-122"/>
                 <a:cs typeface="Calibri" pitchFamily="34" charset="-120"/>
               </a:rPr>
-              <a:t>e^−0.00075 ≈ 0.999250
+              <a:t>F₀ = 1.3335 × 0.999250 = 1.3325 AUD/USD
 </a:t>
             </a:r>
             <a:pPr indent="0" marL="0">
@@ -16481,7 +17490,7 @@
               <a:buNone/>
             </a:pPr>
             <a:r>
-              <a:rPr lang="en-US" sz="1050" b="1" dirty="0">
+              <a:rPr lang="en-US" sz="1100" b="1" dirty="0">
                 <a:solidFill>
                   <a:srgbClr val="1B2A4A"/>
                 </a:solidFill>
@@ -16498,7 +17507,7 @@
               <a:buNone/>
             </a:pPr>
             <a:r>
-              <a:rPr lang="en-US" sz="1050" dirty="0">
+              <a:rPr lang="en-US" sz="1100" dirty="0">
                 <a:solidFill>
                   <a:srgbClr val="334155"/>
                 </a:solidFill>
@@ -16506,9 +17515,9 @@
                 <a:ea typeface="Calibri" pitchFamily="34" charset="-122"/>
                 <a:cs typeface="Calibri" pitchFamily="34" charset="-120"/>
               </a:rPr>
-              <a:t>F₀ = 1.3335 × 0.999250 = 1.3325 AUD/USD</a:t>
-            </a:r>
-            <a:endParaRPr lang="en-US" sz="1050" dirty="0"/>
+              <a:t>Check by replication: borrow USD 1,000 → AUD 1,333.50 → lend → AUD 1,333.83 vs USD 1,001 repaid ⇒ 1.3325</a:t>
+            </a:r>
+            <a:endParaRPr lang="en-US" sz="1100" dirty="0"/>
           </a:p>
         </p:txBody>
       </p:sp>
@@ -16568,7 +17577,7 @@
                 <a:ea typeface="Consolas" pitchFamily="34" charset="-122"/>
                 <a:cs typeface="Consolas" pitchFamily="34" charset="-120"/>
               </a:rPr>
-              <a:t>F₀ = 1.3325. Fewer AUD are needed to buy USD in the future → AUD at a forward PREMIUM (the currency with the LOWER rate).</a:t>
+              <a:t>F₀ = 1.3325. Fewer AUD buy a USD later ⇒ AUD at a forward PREMIUM — the LOWER-rate currency.</a:t>
             </a:r>
             <a:endParaRPr lang="en-US" sz="1150" dirty="0"/>
           </a:p>
@@ -16675,7 +17684,7 @@
                 <a:ea typeface="Trebuchet MS" pitchFamily="34" charset="-122"/>
                 <a:cs typeface="Trebuchet MS" pitchFamily="34" charset="-120"/>
               </a:rPr>
-              <a:t>Interest-rate parity means the currency with the LOWER risk-free rate trades at a forward PREMIUM — arbitrage would eat any deviation in seconds</a:t>
+              <a:t>Montau: the higher-yielding KRW trades at a forward DISCOUNT — and a three-legged money-market trade proves the forward rate to the last won</a:t>
             </a:r>
             <a:endParaRPr lang="en-US" sz="1600" dirty="0"/>
           </a:p>
@@ -16779,7 +17788,7 @@
                 <a:ea typeface="Calibri" pitchFamily="34" charset="-122"/>
                 <a:cs typeface="Calibri" pitchFamily="34" charset="-120"/>
               </a:rPr>
-              <a:t>Source: CFA Institute, Curriculum Vol 7, Learning Module 4, Example 7 (Montau KRW/EUR), pp. 93–94.</a:t>
+              <a:t>Source: CFA Institute, Curriculum Vol 7, Learning Module 4, Example 7 (Montau AG KRW/EUR), pp. 93–94 (printed).</a:t>
             </a:r>
             <a:endParaRPr lang="en-US" sz="750" dirty="0"/>
           </a:p>
@@ -16821,7 +17830,7 @@
                 <a:ea typeface="Calibri" pitchFamily="34" charset="-122"/>
                 <a:cs typeface="Calibri" pitchFamily="34" charset="-120"/>
               </a:rPr>
-              <a:t>If F deviates from spot × e^((rf − rd)T), a three-legged trade (spot + two money-market legs) locks in riskless profit.</a:t>
+              <a:t>If F deviates from S · e^((r_f − r_d)T), a three-legged trade — spot plus two money-market legs — locks in riskless profit. So it does not deviate.</a:t>
             </a:r>
             <a:endParaRPr lang="en-US" sz="1300" dirty="0"/>
           </a:p>
@@ -16950,7 +17959,7 @@
                 <a:ea typeface="Trebuchet MS" pitchFamily="34" charset="-122"/>
                 <a:cs typeface="Trebuchet MS" pitchFamily="34" charset="-120"/>
               </a:rPr>
-              <a:t>MONTAU AG — KRW 650m EXPORT CONTRACT IN 75 DAYS</a:t>
+              <a:t>CFA LM 4 EXAMPLE 7 — MONTAU AG, KRW 650m RECEIVABLE IN 75 DAYS</a:t>
             </a:r>
             <a:endParaRPr lang="en-US" sz="1100" dirty="0"/>
           </a:p>
@@ -16992,7 +18001,7 @@
                 <a:ea typeface="Calibri" pitchFamily="34" charset="-122"/>
                 <a:cs typeface="Calibri" pitchFamily="34" charset="-120"/>
               </a:rPr>
-              <a:t>Spot S₀ = 1,300 KRW/EUR. r_KRW = 0.75%. r_EUR = −0.25%. T = 75/365 year.</a:t>
+              <a:t>Spot S₀ = 1,300 KRW/EUR. r_KRW = 0.75% (price currency). r_EUR = −0.25% (base currency). T = 75/365 year.</a:t>
             </a:r>
             <a:endParaRPr lang="en-US" sz="1200" dirty="0"/>
           </a:p>
@@ -17029,7 +18038,7 @@
               <a:buNone/>
             </a:pPr>
             <a:r>
-              <a:rPr lang="en-US" sz="1100" b="1" dirty="0">
+              <a:rPr lang="en-US" sz="1150" b="1" dirty="0">
                 <a:solidFill>
                   <a:srgbClr val="1B2A4A"/>
                 </a:solidFill>
@@ -17046,7 +18055,7 @@
               <a:buNone/>
             </a:pPr>
             <a:r>
-              <a:rPr lang="en-US" sz="1100" dirty="0">
+              <a:rPr lang="en-US" sz="1150" dirty="0">
                 <a:solidFill>
                   <a:srgbClr val="334155"/>
                 </a:solidFill>
@@ -17054,7 +18063,7 @@
                 <a:ea typeface="Calibri" pitchFamily="34" charset="-122"/>
                 <a:cs typeface="Calibri" pitchFamily="34" charset="-120"/>
               </a:rPr>
-              <a:t>Rate differential (r_KRW − r_EUR) = 0.0075 − (−0.0025) = 0.0100
+              <a:t>Differential (r_KRW − r_EUR) = 0.0075 − (−0.0025) = 0.0100
 </a:t>
             </a:r>
             <a:pPr indent="0" marL="0">
@@ -17064,7 +18073,7 @@
               <a:buNone/>
             </a:pPr>
             <a:r>
-              <a:rPr lang="en-US" sz="1100" b="1" dirty="0">
+              <a:rPr lang="en-US" sz="1150" b="1" dirty="0">
                 <a:solidFill>
                   <a:srgbClr val="1B2A4A"/>
                 </a:solidFill>
@@ -17081,7 +18090,7 @@
               <a:buNone/>
             </a:pPr>
             <a:r>
-              <a:rPr lang="en-US" sz="1100" dirty="0">
+              <a:rPr lang="en-US" sz="1150" dirty="0">
                 <a:solidFill>
                   <a:srgbClr val="334155"/>
                 </a:solidFill>
@@ -17089,7 +18098,7 @@
                 <a:ea typeface="Calibri" pitchFamily="34" charset="-122"/>
                 <a:cs typeface="Calibri" pitchFamily="34" charset="-120"/>
               </a:rPr>
-              <a:t>Exponent: 0.0100 × (75/365) = 0.002055
+              <a:t>Exponent 0.0100 × (75/365) = 0.002055 ⇒ F₀ = 1,300 × e^0.002055 = 1,302.67 KRW/EUR
 </a:t>
             </a:r>
             <a:pPr indent="0" marL="0">
@@ -17099,7 +18108,7 @@
               <a:buNone/>
             </a:pPr>
             <a:r>
-              <a:rPr lang="en-US" sz="1100" b="1" dirty="0">
+              <a:rPr lang="en-US" sz="1150" b="1" dirty="0">
                 <a:solidFill>
                   <a:srgbClr val="1B2A4A"/>
                 </a:solidFill>
@@ -17116,7 +18125,7 @@
               <a:buNone/>
             </a:pPr>
             <a:r>
-              <a:rPr lang="en-US" sz="1100" dirty="0">
+              <a:rPr lang="en-US" sz="1150" dirty="0">
                 <a:solidFill>
                   <a:srgbClr val="334155"/>
                 </a:solidFill>
@@ -17124,7 +18133,7 @@
                 <a:ea typeface="Calibri" pitchFamily="34" charset="-122"/>
                 <a:cs typeface="Calibri" pitchFamily="34" charset="-120"/>
               </a:rPr>
-              <a:t>F₀ = 1,300 × e^0.002055 = 1,300 × 1.002057 = 1,302.67 KRW/EUR
+              <a:t>Proof, EUR leg: KRW 650m ÷ 1,300 = EUR 500,000 grown at −0.25% → EUR 499,743.22
 </a:t>
             </a:r>
             <a:pPr indent="0" marL="0">
@@ -17134,7 +18143,7 @@
               <a:buNone/>
             </a:pPr>
             <a:r>
-              <a:rPr lang="en-US" sz="1100" b="1" dirty="0">
+              <a:rPr lang="en-US" sz="1150" b="1" dirty="0">
                 <a:solidFill>
                   <a:srgbClr val="1B2A4A"/>
                 </a:solidFill>
@@ -17151,7 +18160,7 @@
               <a:buNone/>
             </a:pPr>
             <a:r>
-              <a:rPr lang="en-US" sz="1100" dirty="0">
+              <a:rPr lang="en-US" sz="1150" dirty="0">
                 <a:solidFill>
                   <a:srgbClr val="334155"/>
                 </a:solidFill>
@@ -17159,7 +18168,7 @@
                 <a:ea typeface="Calibri" pitchFamily="34" charset="-122"/>
                 <a:cs typeface="Calibri" pitchFamily="34" charset="-120"/>
               </a:rPr>
-              <a:t>Verify via arbitrage: convert KRW 650m at spot → EUR 500,000; grow at −0.25% for 75 days → EUR 499,743.22
+              <a:t>Proof, KRW leg: KRW 650m grown at 0.75% → KRW 651,002,484.59
 </a:t>
             </a:r>
             <a:pPr indent="0" marL="0">
@@ -17169,7 +18178,7 @@
               <a:buNone/>
             </a:pPr>
             <a:r>
-              <a:rPr lang="en-US" sz="1100" b="1" dirty="0">
+              <a:rPr lang="en-US" sz="1150" b="1" dirty="0">
                 <a:solidFill>
                   <a:srgbClr val="1B2A4A"/>
                 </a:solidFill>
@@ -17186,7 +18195,7 @@
               <a:buNone/>
             </a:pPr>
             <a:r>
-              <a:rPr lang="en-US" sz="1100" dirty="0">
+              <a:rPr lang="en-US" sz="1150" dirty="0">
                 <a:solidFill>
                   <a:srgbClr val="334155"/>
                 </a:solidFill>
@@ -17194,44 +18203,9 @@
                 <a:ea typeface="Calibri" pitchFamily="34" charset="-122"/>
                 <a:cs typeface="Calibri" pitchFamily="34" charset="-120"/>
               </a:rPr>
-              <a:t>OR grow KRW 650m at 0.75% for 75 days → KRW 651,002,484.59
-</a:t>
-            </a:r>
-            <a:pPr indent="0" marL="0">
-              <a:spcAft>
-                <a:spcPts val="200"/>
-              </a:spcAft>
-              <a:buNone/>
-            </a:pPr>
-            <a:r>
-              <a:rPr lang="en-US" sz="1100" b="1" dirty="0">
-                <a:solidFill>
-                  <a:srgbClr val="1B2A4A"/>
-                </a:solidFill>
-                <a:latin typeface="Calibri" pitchFamily="34" charset="0"/>
-                <a:ea typeface="Calibri" pitchFamily="34" charset="-122"/>
-                <a:cs typeface="Calibri" pitchFamily="34" charset="-120"/>
-              </a:rPr>
-              <a:t>6. </a:t>
-            </a:r>
-            <a:pPr indent="0" marL="0">
-              <a:spcAft>
-                <a:spcPts val="200"/>
-              </a:spcAft>
-              <a:buNone/>
-            </a:pPr>
-            <a:r>
-              <a:rPr lang="en-US" sz="1100" dirty="0">
-                <a:solidFill>
-                  <a:srgbClr val="334155"/>
-                </a:solidFill>
-                <a:latin typeface="Calibri" pitchFamily="34" charset="0"/>
-                <a:ea typeface="Calibri" pitchFamily="34" charset="-122"/>
-                <a:cs typeface="Calibri" pitchFamily="34" charset="-120"/>
-              </a:rPr>
               <a:t>Implied forward = 651,002,484.59 / 499,743.22 = 1,302.67 ✓</a:t>
             </a:r>
-            <a:endParaRPr lang="en-US" sz="1100" dirty="0"/>
+            <a:endParaRPr lang="en-US" sz="1150" dirty="0"/>
           </a:p>
         </p:txBody>
       </p:sp>
@@ -17291,7 +18265,7 @@
                 <a:ea typeface="Consolas" pitchFamily="34" charset="-122"/>
                 <a:cs typeface="Consolas" pitchFamily="34" charset="-120"/>
               </a:rPr>
-              <a:t>F₀ = 1,302.67 KRW/EUR. KRW trades at forward DISCOUNT (higher rate). Arbitrage pins it.</a:t>
+              <a:t>F₀ = 1,302.67 KRW/EUR. More KRW per EUR later ⇒ KRW at a forward DISCOUNT (higher rate).</a:t>
             </a:r>
             <a:endParaRPr lang="en-US" sz="1150" dirty="0"/>
           </a:p>
@@ -17398,7 +18372,7 @@
                 <a:ea typeface="Trebuchet MS" pitchFamily="34" charset="-122"/>
                 <a:cs typeface="Trebuchet MS" pitchFamily="34" charset="-120"/>
               </a:rPr>
-              <a:t>Futures are forwards with daily mark-to-market and margining — the cumulative P&amp;L matches a forward's, but the cash-flow profile is radically different</a:t>
+              <a:t>Futures are forwards with daily mark-to-market — cumulative P&amp;L matches a forward's, but the cash-flow timing is completely different</a:t>
             </a:r>
             <a:endParaRPr lang="en-US" sz="1600" dirty="0"/>
           </a:p>
@@ -17502,7 +18476,7 @@
                 <a:ea typeface="Calibri" pitchFamily="34" charset="-122"/>
                 <a:cs typeface="Calibri" pitchFamily="34" charset="-120"/>
               </a:rPr>
-              <a:t>Source: CFA Institute, Curriculum Vol 7, Learning Module 6, "Pricing of Futures Contracts", pp. 132–140.</a:t>
+              <a:t>Source: CFA Institute, Curriculum Vol 7, Learning Module 6, Question Set "Valuation and Pricing of Futures Contracts", Q2, pp. 139–140 (printed).</a:t>
             </a:r>
             <a:endParaRPr lang="en-US" sz="750" dirty="0"/>
           </a:p>
@@ -17544,7 +18518,7 @@
                 <a:ea typeface="Calibri" pitchFamily="34" charset="-122"/>
                 <a:cs typeface="Calibri" pitchFamily="34" charset="-120"/>
               </a:rPr>
-              <a:t>Each day the futures MTM is settled to cash and the contract value RESETS to zero. Cumulative MTM through T ≈ final forward payoff.</a:t>
+              <a:t>Each evening the MTM is settled in cash and the contract value RESETS to zero. Cumulative MTM through T ≈ the forward's single payoff at T.</a:t>
             </a:r>
             <a:endParaRPr lang="en-US" sz="1300" dirty="0"/>
           </a:p>
@@ -17648,7 +18622,7 @@
                 <a:ea typeface="Calibri" pitchFamily="34" charset="-122"/>
                 <a:cs typeface="Calibri" pitchFamily="34" charset="-120"/>
               </a:rPr>
-              <a:t>where: f_t(T) = futures settlement price on day t; contract is re-struck to zero after settlement.</a:t>
+              <a:t>where: f_t(T) = futures settlement price on day t. After settlement the contract is re-struck at f_t(T) and its value is zero again.</a:t>
             </a:r>
             <a:endParaRPr lang="en-US" sz="1100" dirty="0"/>
           </a:p>
@@ -17662,8 +18636,8 @@
         </p:nvSpPr>
         <p:spPr>
           <a:xfrm>
-            <a:off x="320040" y="2331720"/>
-            <a:ext cx="8503920" cy="1965960"/>
+            <a:off x="320040" y="2194560"/>
+            <a:ext cx="8503920" cy="2103120"/>
           </a:xfrm>
           <a:prstGeom prst="rect">
             <a:avLst/>
@@ -17687,7 +18661,7 @@
         </p:nvSpPr>
         <p:spPr>
           <a:xfrm>
-            <a:off x="457200" y="2377440"/>
+            <a:off x="457200" y="2240280"/>
             <a:ext cx="8229600" cy="256032"/>
           </a:xfrm>
           <a:prstGeom prst="rect">
@@ -17715,7 +18689,7 @@
                 <a:ea typeface="Trebuchet MS" pitchFamily="34" charset="-122"/>
                 <a:cs typeface="Trebuchet MS" pitchFamily="34" charset="-120"/>
               </a:rPr>
-              <a:t>CFA LM 6 PP#2 — SHORT CRUDE OIL FUTURES, DAY T−5</a:t>
+              <a:t>CFA LM 6 QUESTION SET Q2 — SHORT CRUDE OIL, DAY T−5 (pp. 139–140)</a:t>
             </a:r>
             <a:endParaRPr lang="en-US" sz="1100" dirty="0"/>
           </a:p>
@@ -17729,7 +18703,7 @@
         </p:nvSpPr>
         <p:spPr>
           <a:xfrm>
-            <a:off x="457200" y="2670048"/>
+            <a:off x="457200" y="2532888"/>
             <a:ext cx="8229600" cy="457200"/>
           </a:xfrm>
           <a:prstGeom prst="rect">
@@ -17757,7 +18731,7 @@
                 <a:ea typeface="Calibri" pitchFamily="34" charset="-122"/>
                 <a:cs typeface="Calibri" pitchFamily="34" charset="-120"/>
               </a:rPr>
-              <a:t>Investor is short 1,000 barrels of crude at initial futures price f₀ = USD 69.00. On day T−6 settlement was 66.02; on day T−5 it rose to 68.01.</a:t>
+              <a:t>Investor is SHORT 1,000 barrels of crude entered at f₀ = USD 69.00. Day T−6 settled at 66.02; day T−5 settled at 68.01.</a:t>
             </a:r>
             <a:endParaRPr lang="en-US" sz="1200" dirty="0"/>
           </a:p>
@@ -17771,8 +18745,8 @@
         </p:nvSpPr>
         <p:spPr>
           <a:xfrm>
-            <a:off x="457200" y="3182112"/>
-            <a:ext cx="8229600" cy="603504"/>
+            <a:off x="457200" y="3044952"/>
+            <a:ext cx="8229600" cy="740664"/>
           </a:xfrm>
           <a:prstGeom prst="rect">
             <a:avLst/>
@@ -17794,7 +18768,7 @@
               <a:buNone/>
             </a:pPr>
             <a:r>
-              <a:rPr lang="en-US" sz="1050" b="1" dirty="0">
+              <a:rPr lang="en-US" sz="1100" b="1" dirty="0">
                 <a:solidFill>
                   <a:srgbClr val="1B2A4A"/>
                 </a:solidFill>
@@ -17811,7 +18785,7 @@
               <a:buNone/>
             </a:pPr>
             <a:r>
-              <a:rPr lang="en-US" sz="1050" dirty="0">
+              <a:rPr lang="en-US" sz="1100" dirty="0">
                 <a:solidFill>
                   <a:srgbClr val="334155"/>
                 </a:solidFill>
@@ -17819,7 +18793,7 @@
                 <a:ea typeface="Calibri" pitchFamily="34" charset="-122"/>
                 <a:cs typeface="Calibri" pitchFamily="34" charset="-120"/>
               </a:rPr>
-              <a:t>Daily futures price change: f_{T−5} − f_{T−6} = 68.01 − 66.02 = +1.99/bbl
+              <a:t>Daily futures price change: 68.01 − 66.02 = +1.99 per barrel
 </a:t>
             </a:r>
             <a:pPr indent="0" marL="0">
@@ -17829,7 +18803,7 @@
               <a:buNone/>
             </a:pPr>
             <a:r>
-              <a:rPr lang="en-US" sz="1050" b="1" dirty="0">
+              <a:rPr lang="en-US" sz="1100" b="1" dirty="0">
                 <a:solidFill>
                   <a:srgbClr val="1B2A4A"/>
                 </a:solidFill>
@@ -17846,7 +18820,7 @@
               <a:buNone/>
             </a:pPr>
             <a:r>
-              <a:rPr lang="en-US" sz="1050" dirty="0">
+              <a:rPr lang="en-US" sz="1100" dirty="0">
                 <a:solidFill>
                   <a:srgbClr val="334155"/>
                 </a:solidFill>
@@ -17854,7 +18828,7 @@
                 <a:ea typeface="Calibri" pitchFamily="34" charset="-122"/>
                 <a:cs typeface="Calibri" pitchFamily="34" charset="-120"/>
               </a:rPr>
-              <a:t>MTM to LONG = +1.99 × 1,000 = +USD 1,990
+              <a:t>MTM to the LONG  = +1.99 × 1,000 = +USD 1,990
 </a:t>
             </a:r>
             <a:pPr indent="0" marL="0">
@@ -17864,7 +18838,7 @@
               <a:buNone/>
             </a:pPr>
             <a:r>
-              <a:rPr lang="en-US" sz="1050" b="1" dirty="0">
+              <a:rPr lang="en-US" sz="1100" b="1" dirty="0">
                 <a:solidFill>
                   <a:srgbClr val="1B2A4A"/>
                 </a:solidFill>
@@ -17881,7 +18855,7 @@
               <a:buNone/>
             </a:pPr>
             <a:r>
-              <a:rPr lang="en-US" sz="1050" dirty="0">
+              <a:rPr lang="en-US" sz="1100" dirty="0">
                 <a:solidFill>
                   <a:srgbClr val="334155"/>
                 </a:solidFill>
@@ -17889,7 +18863,7 @@
                 <a:ea typeface="Calibri" pitchFamily="34" charset="-122"/>
                 <a:cs typeface="Calibri" pitchFamily="34" charset="-120"/>
               </a:rPr>
-              <a:t>MTM to SHORT = −1.99 × 1,000 = −USD 1,990 (paid out via margin)
+              <a:t>MTM to the SHORT = −1.99 × 1,000 = −USD 1,990, debited from margin that evening
 </a:t>
             </a:r>
             <a:pPr indent="0" marL="0">
@@ -17899,7 +18873,7 @@
               <a:buNone/>
             </a:pPr>
             <a:r>
-              <a:rPr lang="en-US" sz="1050" b="1" dirty="0">
+              <a:rPr lang="en-US" sz="1100" b="1" dirty="0">
                 <a:solidFill>
                   <a:srgbClr val="1B2A4A"/>
                 </a:solidFill>
@@ -17916,7 +18890,7 @@
               <a:buNone/>
             </a:pPr>
             <a:r>
-              <a:rPr lang="en-US" sz="1050" dirty="0">
+              <a:rPr lang="en-US" sz="1100" dirty="0">
                 <a:solidFill>
                   <a:srgbClr val="334155"/>
                 </a:solidFill>
@@ -17924,9 +18898,9 @@
                 <a:ea typeface="Calibri" pitchFamily="34" charset="-122"/>
                 <a:cs typeface="Calibri" pitchFamily="34" charset="-120"/>
               </a:rPr>
-              <a:t>Short's margin account is debited USD 1,990 that day; may trigger a margin call below maintenance level.</a:t>
-            </a:r>
-            <a:endParaRPr lang="en-US" sz="1050" dirty="0"/>
+              <a:t>The price ROSE, so the short loses. Sign follows the position, not the direction of the market.</a:t>
+            </a:r>
+            <a:endParaRPr lang="en-US" sz="1100" dirty="0"/>
           </a:p>
         </p:txBody>
       </p:sp>
@@ -17986,7 +18960,7 @@
                 <a:ea typeface="Consolas" pitchFamily="34" charset="-122"/>
                 <a:cs typeface="Consolas" pitchFamily="34" charset="-120"/>
               </a:rPr>
-              <a:t>Short MTM loss on day T−5 = USD 1,990 — settled that evening, not at maturity.</a:t>
+              <a:t>Short loses USD 1,990 on day T−5 — realized that evening, not at maturity.</a:t>
             </a:r>
             <a:endParaRPr lang="en-US" sz="1150" dirty="0"/>
           </a:p>
@@ -18085,7 +19059,7 @@
               <a:buNone/>
             </a:pPr>
             <a:r>
-              <a:rPr lang="en-US" sz="1700" b="1" dirty="0">
+              <a:rPr lang="en-US" sz="1600" b="1" dirty="0">
                 <a:solidFill>
                   <a:srgbClr val="FFFFFF"/>
                 </a:solidFill>
@@ -18093,9 +19067,9 @@
                 <a:ea typeface="Trebuchet MS" pitchFamily="34" charset="-122"/>
                 <a:cs typeface="Trebuchet MS" pitchFamily="34" charset="-120"/>
               </a:rPr>
-              <a:t>At maturity the futures price converges to spot — basis = S − F grinds to zero and the hedger's payoff is anchored</a:t>
-            </a:r>
-            <a:endParaRPr lang="en-US" sz="1700" dirty="0"/>
+              <a:t>A margin call triggers when the balance falls below MAINTENANCE margin — but the top-up must restore the account to INITIAL margin, not to maintenance</a:t>
+            </a:r>
+            <a:endParaRPr lang="en-US" sz="1600" dirty="0"/>
           </a:p>
         </p:txBody>
       </p:sp>
@@ -18194,7 +19168,7 @@
                 <a:ea typeface="Calibri" pitchFamily="34" charset="-122"/>
                 <a:cs typeface="Calibri" pitchFamily="34" charset="-120"/>
               </a:rPr>
-              <a:t>¹ Basis risk = residual risk that the derivative underlying and the hedged exposure don't move in lockstep before maturity.
+              <a:t>¹ Basis (S − f) converges to zero at maturity: in the CFA crude-oil table, spot and futures both settle at USD 70.03 on day T (p. 139).
 </a:t>
             </a:r>
             <a:endParaRPr lang="en-US" sz="1000" dirty="0"/>
@@ -18237,7 +19211,7 @@
                 <a:ea typeface="Calibri" pitchFamily="34" charset="-122"/>
                 <a:cs typeface="Calibri" pitchFamily="34" charset="-120"/>
               </a:rPr>
-              <a:t>Source: CFA Institute, Curriculum Vol 7, Learning Module 6, Practice Problem 1 (CME copper), pp. 146–148.</a:t>
+              <a:t>Source: CFA Institute, Curriculum Vol 7, Learning Module 6, Practice Problem 1 (CME copper), pp. 146 and 148 (printed); margin rule at p. 135.</a:t>
             </a:r>
             <a:endParaRPr lang="en-US" sz="750" dirty="0"/>
           </a:p>
@@ -18279,7 +19253,7 @@
                 <a:ea typeface="Calibri" pitchFamily="34" charset="-122"/>
                 <a:cs typeface="Calibri" pitchFamily="34" charset="-120"/>
               </a:rPr>
-              <a:t>Basis = S − F converges to 0 at T by no-arbitrage (for a cash-settled contract). Before T, basis moves with r and carry.</a:t>
+              <a:t>Initial margin is the entry ticket. Maintenance margin is the trigger level. The gap between them is how far you can lose before the phone rings.</a:t>
             </a:r>
             <a:endParaRPr lang="en-US" sz="1300" dirty="0"/>
           </a:p>
@@ -18341,7 +19315,24 @@
                 <a:ea typeface="Consolas" pitchFamily="34" charset="-122"/>
                 <a:cs typeface="Consolas" pitchFamily="34" charset="-120"/>
               </a:rPr>
-              <a:t>f_0(T)  =  [ S_0  +  PV_0(C) ]  (1 + r)^T             Basis_t  =  S_t  −  f_t(T)   →   0   as t → T</a:t>
+              <a:t>f_0(T)  =  [ S_0  +  PV_0(C) ]  (1 + r)^T</a:t>
+            </a:r>
+            <a:endParaRPr lang="en-US" sz="1800" dirty="0"/>
+          </a:p>
+          <a:p>
+            <a:pPr algn="ctr" indent="0" marL="0">
+              <a:buNone/>
+            </a:pPr>
+            <a:r>
+              <a:rPr lang="en-US" sz="1800" b="1" dirty="0">
+                <a:solidFill>
+                  <a:srgbClr val="FFFFFF"/>
+                </a:solidFill>
+                <a:latin typeface="Consolas" pitchFamily="34" charset="0"/>
+                <a:ea typeface="Consolas" pitchFamily="34" charset="-122"/>
+                <a:cs typeface="Consolas" pitchFamily="34" charset="-120"/>
+              </a:rPr>
+              <a:t>Margin call when Balance &lt; Maintenance ⇒ restore to INITIAL</a:t>
             </a:r>
             <a:endParaRPr lang="en-US" sz="1800" dirty="0"/>
           </a:p>
@@ -18408,7 +19399,7 @@
                 <a:ea typeface="Trebuchet MS" pitchFamily="34" charset="-122"/>
                 <a:cs typeface="Trebuchet MS" pitchFamily="34" charset="-120"/>
               </a:rPr>
-              <a:t>CME COPPER FUTURES — MARGIN-CALL TRIGGER</a:t>
+              <a:t>CFA LM 6 PRACTICE PROBLEM 1 — CME COPPER, LONG POSITION</a:t>
             </a:r>
             <a:endParaRPr lang="en-US" sz="1100" dirty="0"/>
           </a:p>
@@ -18450,7 +19441,7 @@
                 <a:ea typeface="Calibri" pitchFamily="34" charset="-122"/>
                 <a:cs typeface="Calibri" pitchFamily="34" charset="-120"/>
               </a:rPr>
-              <a:t>Contract size 25,000 lb. S₀ = USD 4.25/lb. Storage cost USD 10/contract at T. r = 1.875%. T = 1/12. Initial margin USD 10,000; maintenance USD 6,000.</a:t>
+              <a:t>Contract 25,000 lb. S₀ = USD 4.25/lb. Storage USD 10/contract payable at T. r = 1.875%. T = 1/12. Initial margin 10,000; maintenance 6,000.</a:t>
             </a:r>
             <a:endParaRPr lang="en-US" sz="1200" dirty="0"/>
           </a:p>
@@ -18512,7 +19503,7 @@
                 <a:ea typeface="Calibri" pitchFamily="34" charset="-122"/>
                 <a:cs typeface="Calibri" pitchFamily="34" charset="-120"/>
               </a:rPr>
-              <a:t>PV(C) per contract: 10 × (1.01875)^−(1/12) = USD 9.98
+              <a:t>PV of storage: PV₀(C) = 10 × (1.01875)^−(1/12) = USD 9.98 per contract
 </a:t>
             </a:r>
             <a:pPr indent="0" marL="0">
@@ -18547,7 +19538,7 @@
                 <a:ea typeface="Calibri" pitchFamily="34" charset="-122"/>
                 <a:cs typeface="Calibri" pitchFamily="34" charset="-120"/>
               </a:rPr>
-              <a:t>Compute futures price: f₀ = [(4.25 × 25,000) + 9.98] × (1.01875)^(1/12)
+              <a:t>f₀ = [(4.25 × 25,000) + 9.98] × (1.01875)^(1/12) = USD 106,425 ≈ USD 4.257/lb
 </a:t>
             </a:r>
             <a:pPr indent="0" marL="0">
@@ -18582,7 +19573,7 @@
                 <a:ea typeface="Calibri" pitchFamily="34" charset="-122"/>
                 <a:cs typeface="Calibri" pitchFamily="34" charset="-120"/>
               </a:rPr>
-              <a:t>f₀ = (106,250 + 9.98) × 1.001549 = USD 106,425/contract  ≈  USD 4.257/lb
+              <a:t>Call triggers after a loss of 10,000 − 6,000 = USD 4,000
 </a:t>
             </a:r>
             <a:pPr indent="0" marL="0">
@@ -18617,7 +19608,7 @@
                 <a:ea typeface="Calibri" pitchFamily="34" charset="-122"/>
                 <a:cs typeface="Calibri" pitchFamily="34" charset="-120"/>
               </a:rPr>
-              <a:t>Margin-call triggered when loss = 10,000 − 6,000 = USD 4,000
+              <a:t>USD 4,000 / 25,000 lb = USD 0.16/lb ⇒ call at 4.257 − 0.16 = USD 4.10/lb (= 102,425/contract)
 </a:t>
             </a:r>
             <a:pPr indent="0" marL="0">
@@ -18652,7 +19643,7 @@
                 <a:ea typeface="Calibri" pitchFamily="34" charset="-122"/>
                 <a:cs typeface="Calibri" pitchFamily="34" charset="-120"/>
               </a:rPr>
-              <a:t>USD 4,000 / 25,000 lb = USD 0.16/lb  →  call at price 4.257 − 0.16 = USD 4.10/lb (≈ USD 102,425/contract)</a:t>
+              <a:t>The CTA must then deposit enough to return the account to USD 10,000 — the INITIAL margin.</a:t>
             </a:r>
             <a:endParaRPr lang="en-US" sz="1150" dirty="0"/>
           </a:p>
@@ -18714,7 +19705,7 @@
                 <a:ea typeface="Consolas" pitchFamily="34" charset="-122"/>
                 <a:cs typeface="Consolas" pitchFamily="34" charset="-120"/>
               </a:rPr>
-              <a:t>Margin call if price drops below USD 4.10/lb — basis and storage built into the 4.257 no-arb price.</a:t>
+              <a:t>Margin call below USD 4.10/lb; the top-up restores INITIAL margin, not maintenance.</a:t>
             </a:r>
             <a:endParaRPr lang="en-US" sz="1150" dirty="0"/>
           </a:p>
@@ -18821,7 +19812,7 @@
                 <a:ea typeface="Trebuchet MS" pitchFamily="34" charset="-122"/>
                 <a:cs typeface="Trebuchet MS" pitchFamily="34" charset="-120"/>
               </a:rPr>
-              <a:t>Forwards and futures prices match under constant or uncorrelated rates; they diverge via the convexity bias when rates and prices are correlated</a:t>
+              <a:t>Forward and futures prices are equal if rates are constant or uncorrelated with price — correlation and, separately, convexity are what pull them apart</a:t>
             </a:r>
             <a:endParaRPr lang="en-US" sz="1600" dirty="0"/>
           </a:p>
@@ -18925,7 +19916,7 @@
                 <a:ea typeface="Calibri" pitchFamily="34" charset="-122"/>
                 <a:cs typeface="Calibri" pitchFamily="34" charset="-120"/>
               </a:rPr>
-              <a:t>Source: CFA Institute, Curriculum Vol 7, Learning Module 6, "Forward and Futures Price Differences", pp. 140–144.</a:t>
+              <a:t>Source: CFA Institute, Curriculum Vol 7, Learning Module 6, "Forward and Futures Price Differences" and "Interest Rate Forward and Futures Price Differences", pp. 141–143 (printed).</a:t>
             </a:r>
             <a:endParaRPr lang="en-US" sz="750" dirty="0"/>
           </a:p>
@@ -18967,7 +19958,7 @@
                 <a:ea typeface="Calibri" pitchFamily="34" charset="-122"/>
                 <a:cs typeface="Calibri" pitchFamily="34" charset="-120"/>
               </a:rPr>
-              <a:t>Practically tiny for short-dated contracts; non-trivial for multi-year interest-rate contracts (Eurodollar / SOFR futures vs IRS).</a:t>
+              <a:t>Short-dated contracts: the gap is a rounding error. Multi-year rate contracts (SOFR futures vs IRS): it is a basis dealers quote and charge for.</a:t>
             </a:r>
             <a:endParaRPr lang="en-US" sz="1300" dirty="0"/>
           </a:p>
@@ -19049,7 +20040,7 @@
                 <a:ea typeface="Trebuchet MS" pitchFamily="34" charset="-122"/>
                 <a:cs typeface="Trebuchet MS" pitchFamily="34" charset="-120"/>
               </a:rPr>
-              <a:t>WHEN DO PRICES DIVERGE?</a:t>
+              <a:t>MECHANISM 1 — MTM CORRELATION</a:t>
             </a:r>
             <a:endParaRPr lang="en-US" sz="1100" dirty="0"/>
           </a:p>
@@ -19091,7 +20082,7 @@
                 <a:ea typeface="Calibri" pitchFamily="34" charset="-122"/>
                 <a:cs typeface="Calibri" pitchFamily="34" charset="-120"/>
               </a:rPr>
-              <a:t>•  EQUAL when r is constant OR r uncorrelated with f.</a:t>
+              <a:t>•  EQUAL if r is constant, OR if r is uncorrelated with the futures price.</a:t>
             </a:r>
             <a:endParaRPr lang="en-US" sz="1150" dirty="0"/>
           </a:p>
@@ -19114,7 +20105,7 @@
                 <a:ea typeface="Calibri" pitchFamily="34" charset="-122"/>
                 <a:cs typeface="Calibri" pitchFamily="34" charset="-120"/>
               </a:rPr>
-              <a:t>•  Futures &gt; forward when f POSITIVE-correlated with r — long futures re-invests MTM gains at the higher rate.</a:t>
+              <a:t>•  Futures &gt; forward when f is POSITIVELY correlated with r — daily gains get reinvested at higher rates, losses financed at lower ones.</a:t>
             </a:r>
             <a:endParaRPr lang="en-US" sz="1150" dirty="0"/>
           </a:p>
@@ -19137,7 +20128,7 @@
                 <a:ea typeface="Calibri" pitchFamily="34" charset="-122"/>
                 <a:cs typeface="Calibri" pitchFamily="34" charset="-120"/>
               </a:rPr>
-              <a:t>•  Futures &lt; forward when f NEGATIVE-correlated with r — e.g., bond futures (bond price falls when r rises).</a:t>
+              <a:t>•  Futures &lt; forward when f is NEGATIVELY correlated with r — e.g. bond futures, where price falls as rates rise.</a:t>
             </a:r>
             <a:endParaRPr lang="en-US" sz="1150" dirty="0"/>
           </a:p>
@@ -19160,7 +20151,7 @@
                 <a:ea typeface="Calibri" pitchFamily="34" charset="-122"/>
                 <a:cs typeface="Calibri" pitchFamily="34" charset="-120"/>
               </a:rPr>
-              <a:t>•  The more desirable contract tends to have the higher price.</a:t>
+              <a:t>•  Rule of thumb: the more desirable contract carries the higher price.</a:t>
             </a:r>
             <a:endParaRPr lang="en-US" sz="1150" dirty="0"/>
           </a:p>
@@ -19242,7 +20233,7 @@
                 <a:ea typeface="Trebuchet MS" pitchFamily="34" charset="-122"/>
                 <a:cs typeface="Trebuchet MS" pitchFamily="34" charset="-120"/>
               </a:rPr>
-              <a:t>CONVEXITY BIAS  +  CCP</a:t>
+              <a:t>MECHANISM 2 — CONVEXITY BIAS</a:t>
             </a:r>
             <a:endParaRPr lang="en-US" sz="1100" dirty="0"/>
           </a:p>
@@ -19284,7 +20275,7 @@
                 <a:ea typeface="Calibri" pitchFamily="34" charset="-122"/>
                 <a:cs typeface="Calibri" pitchFamily="34" charset="-120"/>
               </a:rPr>
-              <a:t>•  FRA payoff is DISCOUNTED at MRR (PV); futures payoff is LINEAR in the quoted rate.</a:t>
+              <a:t>•  Rate FUTURES settle linearly — a fixed BPV per basis point. An FRA settles on the PRESENT VALUE of the final cash flow.</a:t>
             </a:r>
             <a:endParaRPr lang="en-US" sz="1150" dirty="0"/>
           </a:p>
@@ -19307,7 +20298,7 @@
                 <a:ea typeface="Calibri" pitchFamily="34" charset="-122"/>
                 <a:cs typeface="Calibri" pitchFamily="34" charset="-120"/>
               </a:rPr>
-              <a:t>•  This convexity gap makes futures MORE attractive than FRAs for the long — futures prices above FRA-implied.</a:t>
+              <a:t>•  CFA Ex 5: ±20bp on USD 1m of 3m MRR gives futures ±500 but FRA +497.50 / −497.01. Not symmetric.</a:t>
             </a:r>
             <a:endParaRPr lang="en-US" sz="1150" dirty="0"/>
           </a:p>
@@ -19330,7 +20321,7 @@
                 <a:ea typeface="Calibri" pitchFamily="34" charset="-122"/>
                 <a:cs typeface="Calibri" pitchFamily="34" charset="-120"/>
               </a:rPr>
-              <a:t>•  Central-counterparty clearing for standardized OTC swaps imposes futures-like daily margin → shrinks the practical gap between OTC forward and futures pricing.</a:t>
+              <a:t>•  That asymmetry is positive convexity and it favours the FORWARD holder. So the futures-implied RATE prints ABOVE the FRA/swap rate — subtract a convexity adjustment to get the forward rate.</a:t>
             </a:r>
             <a:endParaRPr lang="en-US" sz="1150" dirty="0"/>
           </a:p>
@@ -19353,7 +20344,7 @@
                 <a:ea typeface="Calibri" pitchFamily="34" charset="-122"/>
                 <a:cs typeface="Calibri" pitchFamily="34" charset="-120"/>
               </a:rPr>
-              <a:t>•  Dealers pass margin requirements to end-users — financing and collateral costs matter.</a:t>
+              <a:t>•  The bias grows with tenor and rate volatility. Central clearing narrows the cash-flow gap, not this one.</a:t>
             </a:r>
             <a:endParaRPr lang="en-US" sz="1150" dirty="0"/>
           </a:p>
@@ -19671,7 +20662,7 @@
                 <a:ea typeface="Trebuchet MS" pitchFamily="34" charset="-122"/>
                 <a:cs typeface="Trebuchet MS" pitchFamily="34" charset="-120"/>
               </a:rPr>
-              <a:t>A swap is a series of firm commitments — equivalent to a strip of forwards, but with a CONSTANT fixed rate instead of period-specific forward rates</a:t>
+              <a:t>A swap is a series of firm commitments — economically a strip of forwards, but with ONE constant fixed rate instead of period-specific forward rates</a:t>
             </a:r>
             <a:endParaRPr lang="en-US" sz="1600" dirty="0"/>
           </a:p>
@@ -19775,7 +20766,7 @@
                 <a:ea typeface="Calibri" pitchFamily="34" charset="-122"/>
                 <a:cs typeface="Calibri" pitchFamily="34" charset="-120"/>
               </a:rPr>
-              <a:t>Source: CFA Institute, Curriculum Vol 7, Learning Module 7, "Swaps vs Forwards", pp. 152–155.</a:t>
+              <a:t>Source: CFA Institute, Curriculum Vol 7, Learning Module 7, "Swaps vs. Forwards", Exhibits 1–2, pp. 152–154 (printed).</a:t>
             </a:r>
             <a:endParaRPr lang="en-US" sz="750" dirty="0"/>
           </a:p>
@@ -19817,7 +20808,7 @@
                 <a:ea typeface="Calibri" pitchFamily="34" charset="-122"/>
                 <a:cs typeface="Calibri" pitchFamily="34" charset="-120"/>
               </a:rPr>
-              <a:t>One contract with ONE fixed rate replaces N FRAs with N different fixed rates — fewer tickets, same aggregate exposure.</a:t>
+              <a:t>One contract with one fixed rate replaces N FRAs with N different fixed rates — fewer tickets, one credit line, the same aggregate exposure.</a:t>
             </a:r>
             <a:endParaRPr lang="en-US" sz="1300" dirty="0"/>
           </a:p>
@@ -19879,7 +20870,7 @@
                 <a:ea typeface="Consolas" pitchFamily="34" charset="-122"/>
                 <a:cs typeface="Consolas" pitchFamily="34" charset="-120"/>
               </a:rPr>
-              <a:t>Periodic settlement (pay-fixed)  =  ( MRR_{t−1}  −  s_N )  ×  Notional  ×  Period</a:t>
+              <a:t>Settlement (pay-fixed)  =  ( MRR − s_N ) × Notional × Period</a:t>
             </a:r>
             <a:endParaRPr lang="en-US" sz="1800" dirty="0"/>
           </a:p>
@@ -19921,7 +20912,7 @@
                 <a:ea typeface="Calibri" pitchFamily="34" charset="-122"/>
                 <a:cs typeface="Calibri" pitchFamily="34" charset="-120"/>
               </a:rPr>
-              <a:t>where: s_N = fixed swap rate for N-period swap; MRR sets at start of period; paid at end.</a:t>
+              <a:t>where: s_N = the fixed swap rate for an N-period swap. MRR sets at the START of each period and is settled at the END of it.</a:t>
             </a:r>
             <a:endParaRPr lang="en-US" sz="1100" dirty="0"/>
           </a:p>
@@ -19936,7 +20927,7 @@
         <p:spPr>
           <a:xfrm>
             <a:off x="320040" y="2331720"/>
-            <a:ext cx="4160520" cy="1920240"/>
+            <a:ext cx="4160520" cy="1417320"/>
           </a:xfrm>
           <a:prstGeom prst="rect">
             <a:avLst/>
@@ -19956,7 +20947,7 @@
         <p:spPr>
           <a:xfrm>
             <a:off x="320040" y="2331720"/>
-            <a:ext cx="73152" cy="1920240"/>
+            <a:ext cx="73152" cy="1417320"/>
           </a:xfrm>
           <a:prstGeom prst="rect">
             <a:avLst/>
@@ -20018,7 +21009,7 @@
         <p:spPr>
           <a:xfrm>
             <a:off x="457200" y="2651760"/>
-            <a:ext cx="3931920" cy="1554480"/>
+            <a:ext cx="3931920" cy="1051560"/>
           </a:xfrm>
           <a:prstGeom prst="rect">
             <a:avLst/>
@@ -20045,7 +21036,7 @@
                 <a:ea typeface="Calibri" pitchFamily="34" charset="-122"/>
                 <a:cs typeface="Calibri" pitchFamily="34" charset="-120"/>
               </a:rPr>
-              <a:t>Each FRA has its OWN fixed rate equal to the implied forward rate for that period. Administrative burden: N contracts, N rates to monitor, N counterparty exposures.</a:t>
+              <a:t>Each FRA carries its OWN fixed rate — the implied forward rate for that period. N contracts, N rates, N credit exposures. And an FRA settles ONCE, at the START of its interest period, on a discounted basis.</a:t>
             </a:r>
             <a:endParaRPr lang="en-US" sz="1200" dirty="0"/>
           </a:p>
@@ -20060,7 +21051,7 @@
         <p:spPr>
           <a:xfrm>
             <a:off x="4663440" y="2331720"/>
-            <a:ext cx="4160520" cy="1920240"/>
+            <a:ext cx="4160520" cy="1417320"/>
           </a:xfrm>
           <a:prstGeom prst="rect">
             <a:avLst/>
@@ -20080,7 +21071,7 @@
         <p:spPr>
           <a:xfrm>
             <a:off x="4663440" y="2331720"/>
-            <a:ext cx="73152" cy="1920240"/>
+            <a:ext cx="73152" cy="1417320"/>
           </a:xfrm>
           <a:prstGeom prst="rect">
             <a:avLst/>
@@ -20142,7 +21133,7 @@
         <p:spPr>
           <a:xfrm>
             <a:off x="4800600" y="2651760"/>
-            <a:ext cx="3931920" cy="1554480"/>
+            <a:ext cx="3931920" cy="1051560"/>
           </a:xfrm>
           <a:prstGeom prst="rect">
             <a:avLst/>
@@ -20169,7 +21160,7 @@
                 <a:ea typeface="Calibri" pitchFamily="34" charset="-122"/>
                 <a:cs typeface="Calibri" pitchFamily="34" charset="-120"/>
               </a:rPr>
-              <a:t>ONE contract with ONE constant fixed rate (s_N) that equates aggregate PV of fixed and floating legs at t = 0. Same economic exposure, far simpler to transact and manage.</a:t>
+              <a:t>ONE contract and ONE constant fixed rate s_N, set so that PV(fixed) = PV(floating) at t = 0. Same aggregate exposure, one ticket — and each settlement falls at the END of its period, undiscounted.</a:t>
             </a:r>
             <a:endParaRPr lang="en-US" sz="1200" dirty="0"/>
           </a:p>
@@ -20491,7 +21482,7 @@
                 <a:ea typeface="Calibri" pitchFamily="34" charset="-122"/>
                 <a:cs typeface="Calibri" pitchFamily="34" charset="-120"/>
               </a:rPr>
-              <a:t>Evaluate the benefits (risk transfer, price discovery, operational efficiency) and risks (leverage, basis, liquidity, counterparty credit) of derivative use.
+              <a:t>Evaluate the benefits (risk transfer, information discovery, operational advantages, market efficiency) and the six curriculum risks of derivative use.
 </a:t>
             </a:r>
             <a:pPr indent="0" marL="0">
@@ -20686,7 +21677,7 @@
                 <a:ea typeface="Trebuchet MS" pitchFamily="34" charset="-122"/>
                 <a:cs typeface="Trebuchet MS" pitchFamily="34" charset="-120"/>
               </a:rPr>
-              <a:t>The par swap rate is the single fixed rate that makes PV of expected floating cash flows equal PV of fixed cash flows at t=0 — a breakeven IRR on the forward curve</a:t>
+              <a:t>The par swap rate is the ONE fixed rate that makes PV(expected floating) equal PV(fixed) at t = 0 — an internal rate of return on the forward curve</a:t>
             </a:r>
             <a:endParaRPr lang="en-US" sz="1600" dirty="0"/>
           </a:p>
@@ -20790,7 +21781,7 @@
                 <a:ea typeface="Calibri" pitchFamily="34" charset="-122"/>
                 <a:cs typeface="Calibri" pitchFamily="34" charset="-120"/>
               </a:rPr>
-              <a:t>Source: CFA Institute, Curriculum Vol 7, Learning Module 7, "Par Swap Rate", pp. 155–158.</a:t>
+              <a:t>Source: CFA Institute, Curriculum Vol 7, Learning Module 7, "Swaps vs. Forwards", Equation 3 and Exhibit 3, pp. 154–155 (printed).</a:t>
             </a:r>
             <a:endParaRPr lang="en-US" sz="750" dirty="0"/>
           </a:p>
@@ -20832,7 +21823,7 @@
                 <a:ea typeface="Calibri" pitchFamily="34" charset="-122"/>
                 <a:cs typeface="Calibri" pitchFamily="34" charset="-120"/>
               </a:rPr>
-              <a:t>s_N is the internal rate of return that equates the forward-rate-implied floating stream to a level fixed stream over N periods.</a:t>
+              <a:t>s_N is chosen precisely so the swap is worth nothing to either side on day one. That is what "priced at par" means.</a:t>
             </a:r>
             <a:endParaRPr lang="en-US" sz="1300" dirty="0"/>
           </a:p>
@@ -20847,7 +21838,7 @@
         <p:spPr>
           <a:xfrm>
             <a:off x="320040" y="1188720"/>
-            <a:ext cx="8503920" cy="841248"/>
+            <a:ext cx="8503920" cy="658368"/>
           </a:xfrm>
           <a:prstGeom prst="rect">
             <a:avLst/>
@@ -20867,7 +21858,7 @@
         <p:spPr>
           <a:xfrm>
             <a:off x="411480" y="1188720"/>
-            <a:ext cx="8321040" cy="841248"/>
+            <a:ext cx="8321040" cy="658368"/>
           </a:xfrm>
           <a:prstGeom prst="rect">
             <a:avLst/>
@@ -20894,7 +21885,7 @@
                 <a:ea typeface="Consolas" pitchFamily="34" charset="-122"/>
                 <a:cs typeface="Consolas" pitchFamily="34" charset="-120"/>
               </a:rPr>
-              <a:t>Σ_{i=1..N}  IFR_i / (1 + z_i)^i   =   s_N  ×  Σ_{i=1..N}  1 / (1 + z_i)^i</a:t>
+              <a:t>Σ IFR_i / (1+z_i)^i   =   s_N × Σ 1 / (1+z_i)^i     (i = 1…N)</a:t>
             </a:r>
             <a:endParaRPr lang="en-US" sz="1800" dirty="0"/>
           </a:p>
@@ -20908,7 +21899,7 @@
         </p:nvSpPr>
         <p:spPr>
           <a:xfrm>
-            <a:off x="320040" y="2057400"/>
+            <a:off x="320040" y="1874520"/>
             <a:ext cx="8503920" cy="256032"/>
           </a:xfrm>
           <a:prstGeom prst="rect">
@@ -20936,7 +21927,7 @@
                 <a:ea typeface="Calibri" pitchFamily="34" charset="-122"/>
                 <a:cs typeface="Calibri" pitchFamily="34" charset="-120"/>
               </a:rPr>
-              <a:t>where: IFR_i = implied forward rate for period i (from the zero curve); z_i = zero rate for maturity i; s_N = par swap rate.</a:t>
+              <a:t>where: IFR_i = implied forward rate for period i (derived from the zero curve); z_i = zero rate for maturity i; s_N = par swap rate.</a:t>
             </a:r>
             <a:endParaRPr lang="en-US" sz="1100" dirty="0"/>
           </a:p>
@@ -20950,8 +21941,8 @@
         </p:nvSpPr>
         <p:spPr>
           <a:xfrm>
-            <a:off x="320040" y="2240280"/>
-            <a:ext cx="8503920" cy="2057400"/>
+            <a:off x="320040" y="2286000"/>
+            <a:ext cx="8503920" cy="2011680"/>
           </a:xfrm>
           <a:prstGeom prst="rect">
             <a:avLst/>
@@ -20970,8 +21961,8 @@
         </p:nvSpPr>
         <p:spPr>
           <a:xfrm>
-            <a:off x="320040" y="2240280"/>
-            <a:ext cx="73152" cy="2057400"/>
+            <a:off x="320040" y="2286000"/>
+            <a:ext cx="73152" cy="2011680"/>
           </a:xfrm>
           <a:prstGeom prst="rect">
             <a:avLst/>
@@ -20990,7 +21981,7 @@
         </p:nvSpPr>
         <p:spPr>
           <a:xfrm>
-            <a:off x="457200" y="2286000"/>
+            <a:off x="457200" y="2331720"/>
             <a:ext cx="8275320" cy="256032"/>
           </a:xfrm>
           <a:prstGeom prst="rect">
@@ -21018,7 +22009,7 @@
                 <a:ea typeface="Trebuchet MS" pitchFamily="34" charset="-122"/>
                 <a:cs typeface="Trebuchet MS" pitchFamily="34" charset="-120"/>
               </a:rPr>
-              <a:t>THE INTUITION IN TWO LINES</a:t>
+              <a:t>THE INTUITION IN THREE LINES</a:t>
             </a:r>
             <a:endParaRPr lang="en-US" sz="1100" dirty="0"/>
           </a:p>
@@ -21032,8 +22023,8 @@
         </p:nvSpPr>
         <p:spPr>
           <a:xfrm>
-            <a:off x="457200" y="2560320"/>
-            <a:ext cx="8275320" cy="1691640"/>
+            <a:off x="457200" y="2606040"/>
+            <a:ext cx="8275320" cy="1645920"/>
           </a:xfrm>
           <a:prstGeom prst="rect">
             <a:avLst/>
@@ -21060,7 +22051,7 @@
                 <a:ea typeface="Calibri" pitchFamily="34" charset="-122"/>
                 <a:cs typeface="Calibri" pitchFamily="34" charset="-120"/>
               </a:rPr>
-              <a:t>LEFT side = PV(floating) — each IFR_i discounted back at the matching zero rate.  RIGHT side = PV(fixed) — the level swap rate s_N multiplied by the sum of discount factors.  Setting left = right and solving for s_N gives the par swap rate.</a:t>
+              <a:t>LEFT = PV(floating): each period's implied forward rate discounted at its matching zero rate.  RIGHT = PV(fixed): the level rate s_N multiplied by the sum of discount factors.  Set them equal, solve for s_N — and by construction V₀ = 0.</a:t>
             </a:r>
             <a:endParaRPr lang="en-US" sz="1200" dirty="0"/>
           </a:p>
@@ -21083,7 +22074,30 @@
                 <a:ea typeface="Calibri" pitchFamily="34" charset="-122"/>
                 <a:cs typeface="Calibri" pitchFamily="34" charset="-120"/>
               </a:rPr>
-              <a:t>Geometrically: s_N is a horizontal line drawn through the forward curve such that the PV-weighted area above equals the PV-weighted area below. Slope-up curves push s_N above the first IFR; slope-down curves pull it below.</a:t>
+              <a:t>Geometrically, s_N is a horizontal line drawn through the forward curve so that the PV-weighted area above equals the PV-weighted area below. An upward-sloping curve pushes s_N above the first forward rate; a downward-sloping curve pulls it below.</a:t>
+            </a:r>
+            <a:endParaRPr lang="en-US" sz="1200" dirty="0"/>
+          </a:p>
+          <a:p>
+            <a:pPr algn="l" indent="0" marL="0">
+              <a:buNone/>
+            </a:pPr>
+            <a:endParaRPr lang="en-US" sz="1200" dirty="0"/>
+          </a:p>
+          <a:p>
+            <a:pPr algn="l" indent="0" marL="0">
+              <a:buNone/>
+            </a:pPr>
+            <a:r>
+              <a:rPr lang="en-US" sz="1200" dirty="0">
+                <a:solidFill>
+                  <a:srgbClr val="334155"/>
+                </a:solidFill>
+                <a:latin typeface="Calibri" pitchFamily="34" charset="0"/>
+                <a:ea typeface="Calibri" pitchFamily="34" charset="-122"/>
+                <a:cs typeface="Calibri" pitchFamily="34" charset="-120"/>
+              </a:rPr>
+              <a:t>Crucially, individual exchanges are NOT worth zero. The early ones are negative to the fixed payer and the late ones positive. Only the SUM is zero.</a:t>
             </a:r>
             <a:endParaRPr lang="en-US" sz="1200" dirty="0"/>
           </a:p>
@@ -21190,7 +22204,7 @@
                 <a:ea typeface="Trebuchet MS" pitchFamily="34" charset="-122"/>
                 <a:cs typeface="Trebuchet MS" pitchFamily="34" charset="-120"/>
               </a:rPr>
-              <a:t>Worked: a 3-year IRS prices at s₃ = 3.9641% given the zero curve 2.396% / 3.4197% / 4.0005%</a:t>
+              <a:t>Worked: a 3-year IRS prices at s₃ = 3.9641% on a zero curve of 2.3960% / 3.4197% / 4.0005%</a:t>
             </a:r>
             <a:endParaRPr lang="en-US" sz="1800" dirty="0"/>
           </a:p>
@@ -21294,7 +22308,7 @@
                 <a:ea typeface="Calibri" pitchFamily="34" charset="-122"/>
                 <a:cs typeface="Calibri" pitchFamily="34" charset="-120"/>
               </a:rPr>
-              <a:t>Source: CFA Institute, Curriculum Vol 7, Learning Module 7, Example 1 (Swaps as Combination of Forwards), pp. 153–156.</a:t>
+              <a:t>Source: CFA Institute, Curriculum Vol 7, Learning Module 7, Example 1 (Swaps as a Combination of Forwards), pp. 153–155 (printed).</a:t>
             </a:r>
             <a:endParaRPr lang="en-US" sz="750" dirty="0"/>
           </a:p>
@@ -21336,7 +22350,7 @@
                 <a:ea typeface="Calibri" pitchFamily="34" charset="-122"/>
                 <a:cs typeface="Calibri" pitchFamily="34" charset="-120"/>
               </a:rPr>
-              <a:t>Step 1 derive IFRs from zero curve. Step 2 plug into par-swap equation. Step 3 solve for s_N — the output equals the flat-coupon par bond yield.</a:t>
+              <a:t>Step 1: bootstrap the implied forwards from the zero curve. Step 2: plug into the par-swap equation. Step 3: divide.</a:t>
             </a:r>
             <a:endParaRPr lang="en-US" sz="1300" dirty="0"/>
           </a:p>
@@ -22190,8 +23204,8 @@
         </p:nvSpPr>
         <p:spPr>
           <a:xfrm>
-            <a:off x="320040" y="2788920"/>
-            <a:ext cx="8503920" cy="1508760"/>
+            <a:off x="320040" y="2377440"/>
+            <a:ext cx="8503920" cy="1920240"/>
           </a:xfrm>
           <a:prstGeom prst="rect">
             <a:avLst/>
@@ -22215,7 +23229,7 @@
         </p:nvSpPr>
         <p:spPr>
           <a:xfrm>
-            <a:off x="457200" y="2834640"/>
+            <a:off x="457200" y="2423160"/>
             <a:ext cx="8229600" cy="256032"/>
           </a:xfrm>
           <a:prstGeom prst="rect">
@@ -22243,7 +23257,7 @@
                 <a:ea typeface="Trebuchet MS" pitchFamily="34" charset="-122"/>
                 <a:cs typeface="Trebuchet MS" pitchFamily="34" charset="-120"/>
               </a:rPr>
-              <a:t>SOLVE FOR s₃</a:t>
+              <a:t>SOLVE FOR s₃  (CFA PRINTED p. 155)</a:t>
             </a:r>
             <a:endParaRPr lang="en-US" sz="1100" dirty="0"/>
           </a:p>
@@ -22257,50 +23271,8 @@
         </p:nvSpPr>
         <p:spPr>
           <a:xfrm>
-            <a:off x="457200" y="3127248"/>
-            <a:ext cx="8229600" cy="457200"/>
-          </a:xfrm>
-          <a:prstGeom prst="rect">
-            <a:avLst/>
-          </a:prstGeom>
-          <a:noFill/>
-          <a:ln/>
-        </p:spPr>
-        <p:txBody>
-          <a:bodyPr wrap="square" lIns="508" tIns="508" rIns="508" bIns="508" rtlCol="0" anchor="t">
-            <a:normAutofit/>
-            <a:spAutoFit/>
-          </a:bodyPr>
-          <a:lstStyle/>
-          <a:p>
-            <a:pPr algn="l" indent="0" marL="0">
-              <a:buNone/>
-            </a:pPr>
-            <a:r>
-              <a:rPr lang="en-US" sz="1200" dirty="0">
-                <a:solidFill>
-                  <a:srgbClr val="334155"/>
-                </a:solidFill>
-                <a:latin typeface="Calibri" pitchFamily="34" charset="0"/>
-                <a:ea typeface="Calibri" pitchFamily="34" charset="-122"/>
-                <a:cs typeface="Calibri" pitchFamily="34" charset="-120"/>
-              </a:rPr>
-              <a:t>PV(float) = Σ IFR_i / (1+z_i)^i ;  PV(fixed) = s₃ × Σ 1/(1+z_i)^i. Set equal, solve.</a:t>
-            </a:r>
-            <a:endParaRPr lang="en-US" sz="1200" dirty="0"/>
-          </a:p>
-        </p:txBody>
-      </p:sp>
-      <p:sp>
-        <p:nvSpPr>
-          <p:cNvPr id="13" name="Text 10"/>
-          <p:cNvSpPr txBox="1"/>
-          <p:nvPr/>
-        </p:nvSpPr>
-        <p:spPr>
-          <a:xfrm>
-            <a:off x="457200" y="3639312"/>
-            <a:ext cx="8229600" cy="274320"/>
+            <a:off x="457200" y="2715768"/>
+            <a:ext cx="8229600" cy="1069848"/>
           </a:xfrm>
           <a:prstGeom prst="rect">
             <a:avLst/>
@@ -22322,7 +23294,7 @@
               <a:buNone/>
             </a:pPr>
             <a:r>
-              <a:rPr lang="en-US" sz="1050" b="1" dirty="0">
+              <a:rPr lang="en-US" sz="1200" b="1" dirty="0">
                 <a:solidFill>
                   <a:srgbClr val="1B2A4A"/>
                 </a:solidFill>
@@ -22339,7 +23311,7 @@
               <a:buNone/>
             </a:pPr>
             <a:r>
-              <a:rPr lang="en-US" sz="1050" dirty="0">
+              <a:rPr lang="en-US" sz="1200" dirty="0">
                 <a:solidFill>
                   <a:srgbClr val="334155"/>
                 </a:solidFill>
@@ -22347,7 +23319,7 @@
                 <a:ea typeface="Calibri" pitchFamily="34" charset="-122"/>
                 <a:cs typeface="Calibri" pitchFamily="34" charset="-120"/>
               </a:rPr>
-              <a:t>PV(float) = 2.3960/1.02396 + 4.4536/(1.034197)² + 5.1719/(1.040005)³ = 0.111017
+              <a:t>Set PV(float) = PV(fixed):  Σ IFR_i/(1+z_i)^i  =  s₃ × Σ 1/(1+z_i)^i
 </a:t>
             </a:r>
             <a:pPr indent="0" marL="0">
@@ -22357,7 +23329,7 @@
               <a:buNone/>
             </a:pPr>
             <a:r>
-              <a:rPr lang="en-US" sz="1050" b="1" dirty="0">
+              <a:rPr lang="en-US" sz="1200" b="1" dirty="0">
                 <a:solidFill>
                   <a:srgbClr val="1B2A4A"/>
                 </a:solidFill>
@@ -22374,7 +23346,7 @@
               <a:buNone/>
             </a:pPr>
             <a:r>
-              <a:rPr lang="en-US" sz="1050" dirty="0">
+              <a:rPr lang="en-US" sz="1200" dirty="0">
                 <a:solidFill>
                   <a:srgbClr val="334155"/>
                 </a:solidFill>
@@ -22382,7 +23354,7 @@
                 <a:ea typeface="Calibri" pitchFamily="34" charset="-122"/>
                 <a:cs typeface="Calibri" pitchFamily="34" charset="-120"/>
               </a:rPr>
-              <a:t>Sum of discount factors Σ 1/(1+z_i)^i = 2.800545
+              <a:t>PV(float) = 2.3960/1.02396 + 4.4536/(1.034197)² + 5.1719/(1.040005)³ = 0.111017
 </a:t>
             </a:r>
             <a:pPr indent="0" marL="0">
@@ -22392,7 +23364,7 @@
               <a:buNone/>
             </a:pPr>
             <a:r>
-              <a:rPr lang="en-US" sz="1050" b="1" dirty="0">
+              <a:rPr lang="en-US" sz="1200" b="1" dirty="0">
                 <a:solidFill>
                   <a:srgbClr val="1B2A4A"/>
                 </a:solidFill>
@@ -22409,7 +23381,7 @@
               <a:buNone/>
             </a:pPr>
             <a:r>
-              <a:rPr lang="en-US" sz="1050" dirty="0">
+              <a:rPr lang="en-US" sz="1200" dirty="0">
                 <a:solidFill>
                   <a:srgbClr val="334155"/>
                 </a:solidFill>
@@ -22417,15 +23389,50 @@
                 <a:ea typeface="Calibri" pitchFamily="34" charset="-122"/>
                 <a:cs typeface="Calibri" pitchFamily="34" charset="-120"/>
               </a:rPr>
+              <a:t>Discount factors: 0.976601 + 0.934962 + 0.888982 = 2.800545
+</a:t>
+            </a:r>
+            <a:pPr indent="0" marL="0">
+              <a:spcAft>
+                <a:spcPts val="200"/>
+              </a:spcAft>
+              <a:buNone/>
+            </a:pPr>
+            <a:r>
+              <a:rPr lang="en-US" sz="1200" b="1" dirty="0">
+                <a:solidFill>
+                  <a:srgbClr val="1B2A4A"/>
+                </a:solidFill>
+                <a:latin typeface="Calibri" pitchFamily="34" charset="0"/>
+                <a:ea typeface="Calibri" pitchFamily="34" charset="-122"/>
+                <a:cs typeface="Calibri" pitchFamily="34" charset="-120"/>
+              </a:rPr>
+              <a:t>4. </a:t>
+            </a:r>
+            <a:pPr indent="0" marL="0">
+              <a:spcAft>
+                <a:spcPts val="200"/>
+              </a:spcAft>
+              <a:buNone/>
+            </a:pPr>
+            <a:r>
+              <a:rPr lang="en-US" sz="1200" dirty="0">
+                <a:solidFill>
+                  <a:srgbClr val="334155"/>
+                </a:solidFill>
+                <a:latin typeface="Calibri" pitchFamily="34" charset="0"/>
+                <a:ea typeface="Calibri" pitchFamily="34" charset="-122"/>
+                <a:cs typeface="Calibri" pitchFamily="34" charset="-120"/>
+              </a:rPr>
               <a:t>s₃ = 0.111017 / 2.800545 = 3.9641%</a:t>
             </a:r>
-            <a:endParaRPr lang="en-US" sz="1050" dirty="0"/>
-          </a:p>
-        </p:txBody>
-      </p:sp>
-      <p:sp>
-        <p:nvSpPr>
-          <p:cNvPr id="14" name="Shape 11"/>
+            <a:endParaRPr lang="en-US" sz="1200" dirty="0"/>
+          </a:p>
+        </p:txBody>
+      </p:sp>
+      <p:sp>
+        <p:nvSpPr>
+          <p:cNvPr id="13" name="Shape 10"/>
           <p:cNvSpPr/>
           <p:nvPr/>
         </p:nvSpPr>
@@ -22445,7 +23452,7 @@
       </p:sp>
       <p:sp>
         <p:nvSpPr>
-          <p:cNvPr id="15" name="Text 12"/>
+          <p:cNvPr id="14" name="Text 11"/>
           <p:cNvSpPr txBox="1"/>
           <p:nvPr/>
         </p:nvSpPr>
@@ -22479,7 +23486,7 @@
                 <a:ea typeface="Consolas" pitchFamily="34" charset="-122"/>
                 <a:cs typeface="Consolas" pitchFamily="34" charset="-120"/>
               </a:rPr>
-              <a:t>s₃ = 3.9641%  —  note s₃ lies BETWEEN the 2.396% front IFR and the 5.172% back IFR, as expected on an upward curve.</a:t>
+              <a:t>s₃ = 3.9641% — between the 2.396% front IFR and the 5.172% back IFR, as an upward curve requires.</a:t>
             </a:r>
             <a:endParaRPr lang="en-US" sz="1150" dirty="0"/>
           </a:p>
@@ -22586,7 +23593,7 @@
                 <a:ea typeface="Trebuchet MS" pitchFamily="34" charset="-122"/>
                 <a:cs typeface="Trebuchet MS" pitchFamily="34" charset="-120"/>
               </a:rPr>
-              <a:t>At inception V₀(swap) = 0; on any settlement date the swap is worth the current settlement plus the PV of all remaining future exchanges</a:t>
+              <a:t>V₀(swap) = 0 by construction; on any settlement date the swap is worth the current settlement plus the PV of every remaining exchange</a:t>
             </a:r>
             <a:endParaRPr lang="en-US" sz="1600" dirty="0"/>
           </a:p>
@@ -22690,7 +23697,7 @@
                 <a:ea typeface="Calibri" pitchFamily="34" charset="-122"/>
                 <a:cs typeface="Calibri" pitchFamily="34" charset="-120"/>
               </a:rPr>
-              <a:t>Source: CFA Institute, Curriculum Vol 7, Learning Module 7, Example 3 (Esterr Swap Value), pp. 159–162.</a:t>
+              <a:t>Source: CFA Institute, Curriculum Vol 7, Learning Module 7, Example 3 (Esterr Inc. Swap Value and Price), pp. 160–162 (printed).</a:t>
             </a:r>
             <a:endParaRPr lang="en-US" sz="750" dirty="0"/>
           </a:p>
@@ -22732,7 +23739,7 @@
                 <a:ea typeface="Calibri" pitchFamily="34" charset="-122"/>
                 <a:cs typeface="Calibri" pitchFamily="34" charset="-120"/>
               </a:rPr>
-              <a:t>At t=0 PV(fixed) = PV(floating) by construction. As time and rates move, the two legs drift apart — that delta is the swap MTM.</a:t>
+              <a:t>At t = 0 PV(fixed) = PV(floating) by design. As time passes and rates move, the legs drift apart — and that gap IS the swap MTM.</a:t>
             </a:r>
             <a:endParaRPr lang="en-US" sz="1300" dirty="0"/>
           </a:p>
@@ -22747,7 +23754,7 @@
         <p:spPr>
           <a:xfrm>
             <a:off x="320040" y="1188720"/>
-            <a:ext cx="8503920" cy="658368"/>
+            <a:ext cx="8503920" cy="566928"/>
           </a:xfrm>
           <a:prstGeom prst="rect">
             <a:avLst/>
@@ -22767,7 +23774,7 @@
         <p:spPr>
           <a:xfrm>
             <a:off x="411480" y="1188720"/>
-            <a:ext cx="8321040" cy="658368"/>
+            <a:ext cx="8321040" cy="566928"/>
           </a:xfrm>
           <a:prstGeom prst="rect">
             <a:avLst/>
@@ -22794,7 +23801,24 @@
                 <a:ea typeface="Consolas" pitchFamily="34" charset="-122"/>
                 <a:cs typeface="Consolas" pitchFamily="34" charset="-120"/>
               </a:rPr>
-              <a:t>V_t (swap)  =  Current period settlement  +  PV_t(remaining fixed vs floating exchanges)</a:t>
+              <a:t>V_t (swap)  =  current period settlement</a:t>
+            </a:r>
+            <a:endParaRPr lang="en-US" sz="1800" dirty="0"/>
+          </a:p>
+          <a:p>
+            <a:pPr algn="ctr" indent="0" marL="0">
+              <a:buNone/>
+            </a:pPr>
+            <a:r>
+              <a:rPr lang="en-US" sz="1800" b="1" dirty="0">
+                <a:solidFill>
+                  <a:srgbClr val="FFFFFF"/>
+                </a:solidFill>
+                <a:latin typeface="Consolas" pitchFamily="34" charset="0"/>
+                <a:ea typeface="Consolas" pitchFamily="34" charset="-122"/>
+                <a:cs typeface="Consolas" pitchFamily="34" charset="-120"/>
+              </a:rPr>
+              <a:t>+  PV_t( all remaining fixed-vs-floating exchanges )</a:t>
             </a:r>
             <a:endParaRPr lang="en-US" sz="1800" dirty="0"/>
           </a:p>
@@ -22808,7 +23832,7 @@
         </p:nvSpPr>
         <p:spPr>
           <a:xfrm>
-            <a:off x="320040" y="1874520"/>
+            <a:off x="320040" y="1783080"/>
             <a:ext cx="8503920" cy="256032"/>
           </a:xfrm>
           <a:prstGeom prst="rect">
@@ -22836,7 +23860,7 @@
                 <a:ea typeface="Calibri" pitchFamily="34" charset="-122"/>
                 <a:cs typeface="Calibri" pitchFamily="34" charset="-120"/>
               </a:rPr>
-              <a:t>where: Settlement = (MRR − s_N) × Notional × Period  for pay-fixed; opposite sign for receive-fixed.</a:t>
+              <a:t>where: Settlement = (MRR − s_N) × Notional × Period for the fixed-rate PAYER; the sign reverses for the receiver.</a:t>
             </a:r>
             <a:endParaRPr lang="en-US" sz="1100" dirty="0"/>
           </a:p>
@@ -22850,8 +23874,8 @@
         </p:nvSpPr>
         <p:spPr>
           <a:xfrm>
-            <a:off x="320040" y="2331720"/>
-            <a:ext cx="8503920" cy="1965960"/>
+            <a:off x="320040" y="2103120"/>
+            <a:ext cx="8503920" cy="2194560"/>
           </a:xfrm>
           <a:prstGeom prst="rect">
             <a:avLst/>
@@ -22875,7 +23899,7 @@
         </p:nvSpPr>
         <p:spPr>
           <a:xfrm>
-            <a:off x="457200" y="2377440"/>
+            <a:off x="457200" y="2148840"/>
             <a:ext cx="8229600" cy="256032"/>
           </a:xfrm>
           <a:prstGeom prst="rect">
@@ -22903,7 +23927,7 @@
                 <a:ea typeface="Trebuchet MS" pitchFamily="34" charset="-122"/>
                 <a:cs typeface="Trebuchet MS" pitchFamily="34" charset="-120"/>
               </a:rPr>
-              <a:t>ESTERR INC. — CAD 250m PAY-FIXED IRS AT 2.05% Q</a:t>
+              <a:t>CFA LM 7 EXAMPLE 3 — ESTERR, CAD 250m PAY-FIXED AT 2.05%</a:t>
             </a:r>
             <a:endParaRPr lang="en-US" sz="1100" dirty="0"/>
           </a:p>
@@ -22917,7 +23941,7 @@
         </p:nvSpPr>
         <p:spPr>
           <a:xfrm>
-            <a:off x="457200" y="2670048"/>
+            <a:off x="457200" y="2441448"/>
             <a:ext cx="8229600" cy="457200"/>
           </a:xfrm>
           <a:prstGeom prst="rect">
@@ -22945,7 +23969,7 @@
                 <a:ea typeface="Calibri" pitchFamily="34" charset="-122"/>
                 <a:cs typeface="Calibri" pitchFamily="34" charset="-120"/>
               </a:rPr>
-              <a:t>Esterr pays s = 2.05% quarterly, receives 3m CAD MRR. First MRR = 0.50%. Notional 250m. Period = 0.25.</a:t>
+              <a:t>Esterr pays fixed 2.05% quarterly and receives 3m CAD MRR on CAD 250m. Period = 0.25. The IFR curve rises ~0.24% per quarter from 0.50%.</a:t>
             </a:r>
             <a:endParaRPr lang="en-US" sz="1200" dirty="0"/>
           </a:p>
@@ -22959,8 +23983,8 @@
         </p:nvSpPr>
         <p:spPr>
           <a:xfrm>
-            <a:off x="457200" y="3182112"/>
-            <a:ext cx="8229600" cy="603504"/>
+            <a:off x="457200" y="2953512"/>
+            <a:ext cx="8229600" cy="832104"/>
           </a:xfrm>
           <a:prstGeom prst="rect">
             <a:avLst/>
@@ -22982,7 +24006,7 @@
               <a:buNone/>
             </a:pPr>
             <a:r>
-              <a:rPr lang="en-US" sz="1050" b="1" dirty="0">
+              <a:rPr lang="en-US" sz="1150" b="1" dirty="0">
                 <a:solidFill>
                   <a:srgbClr val="1B2A4A"/>
                 </a:solidFill>
@@ -22999,7 +24023,7 @@
               <a:buNone/>
             </a:pPr>
             <a:r>
-              <a:rPr lang="en-US" sz="1050" dirty="0">
+              <a:rPr lang="en-US" sz="1150" dirty="0">
                 <a:solidFill>
                   <a:srgbClr val="334155"/>
                 </a:solidFill>
@@ -23007,7 +24031,7 @@
                 <a:ea typeface="Calibri" pitchFamily="34" charset="-122"/>
                 <a:cs typeface="Calibri" pitchFamily="34" charset="-120"/>
               </a:rPr>
-              <a:t>Period-1 settlement = (0.50% − 2.05%) × 250m × 0.25 = −CAD 968,750 (Esterr pays)
+              <a:t>Period 1: (0.50% − 2.05%) × 250m × 0.25 = −CAD 968,750 — Esterr pays.
 </a:t>
             </a:r>
             <a:pPr indent="0" marL="0">
@@ -23017,7 +24041,7 @@
               <a:buNone/>
             </a:pPr>
             <a:r>
-              <a:rPr lang="en-US" sz="1050" b="1" dirty="0">
+              <a:rPr lang="en-US" sz="1150" b="1" dirty="0">
                 <a:solidFill>
                   <a:srgbClr val="1B2A4A"/>
                 </a:solidFill>
@@ -23034,7 +24058,7 @@
               <a:buNone/>
             </a:pPr>
             <a:r>
-              <a:rPr lang="en-US" sz="1050" dirty="0">
+              <a:rPr lang="en-US" sz="1150" dirty="0">
                 <a:solidFill>
                   <a:srgbClr val="334155"/>
                 </a:solidFill>
@@ -23042,7 +24066,7 @@
                 <a:ea typeface="Calibri" pitchFamily="34" charset="-122"/>
                 <a:cs typeface="Calibri" pitchFamily="34" charset="-120"/>
               </a:rPr>
-              <a:t>Period-2 settlement (MRR = 0.74% expected) = (0.74% − 2.05%) × 250m × 0.25 = −CAD 818,750
+              <a:t>Period 2: (0.74% − 2.05%) × 250m × 0.25 = −CAD 818,750 — Esterr still pays.
 </a:t>
             </a:r>
             <a:pPr indent="0" marL="0">
@@ -23052,7 +24076,7 @@
               <a:buNone/>
             </a:pPr>
             <a:r>
-              <a:rPr lang="en-US" sz="1050" b="1" dirty="0">
+              <a:rPr lang="en-US" sz="1150" b="1" dirty="0">
                 <a:solidFill>
                   <a:srgbClr val="1B2A4A"/>
                 </a:solidFill>
@@ -23069,7 +24093,7 @@
               <a:buNone/>
             </a:pPr>
             <a:r>
-              <a:rPr lang="en-US" sz="1050" dirty="0">
+              <a:rPr lang="en-US" sz="1150" dirty="0">
                 <a:solidFill>
                   <a:srgbClr val="334155"/>
                 </a:solidFill>
@@ -23077,7 +24101,7 @@
                 <a:ea typeface="Calibri" pitchFamily="34" charset="-122"/>
                 <a:cs typeface="Calibri" pitchFamily="34" charset="-120"/>
               </a:rPr>
-              <a:t>Because the forward curve is upward sloping, future expected MRRs exceed 2.05% → future settlements swing positive for Esterr.
+              <a:t>Esterr keeps paying through period 7 (1.94% &lt; 2.05%) and starts RECEIVING in period 8 (2.18% &gt; 2.05%).
 </a:t>
             </a:r>
             <a:pPr indent="0" marL="0">
@@ -23087,7 +24111,7 @@
               <a:buNone/>
             </a:pPr>
             <a:r>
-              <a:rPr lang="en-US" sz="1050" b="1" dirty="0">
+              <a:rPr lang="en-US" sz="1150" b="1" dirty="0">
                 <a:solidFill>
                   <a:srgbClr val="1B2A4A"/>
                 </a:solidFill>
@@ -23104,7 +24128,7 @@
               <a:buNone/>
             </a:pPr>
             <a:r>
-              <a:rPr lang="en-US" sz="1050" dirty="0">
+              <a:rPr lang="en-US" sz="1150" dirty="0">
                 <a:solidFill>
                   <a:srgbClr val="334155"/>
                 </a:solidFill>
@@ -23112,9 +24136,9 @@
                 <a:ea typeface="Calibri" pitchFamily="34" charset="-122"/>
                 <a:cs typeface="Calibri" pitchFamily="34" charset="-120"/>
               </a:rPr>
-              <a:t>As time passes with unchanged forward curve, PV(floating received) &gt; PV(fixed paid) → Esterr MTM gain.</a:t>
-            </a:r>
-            <a:endParaRPr lang="en-US" sz="1050" dirty="0"/>
+              <a:t>Roll forward with the curve unchanged: the loss-making quarters fall away, so PV(floating received) &gt; PV(fixed paid) ⇒ MTM gain.</a:t>
+            </a:r>
+            <a:endParaRPr lang="en-US" sz="1150" dirty="0"/>
           </a:p>
         </p:txBody>
       </p:sp>
@@ -23174,7 +24198,7 @@
                 <a:ea typeface="Consolas" pitchFamily="34" charset="-122"/>
                 <a:cs typeface="Consolas" pitchFamily="34" charset="-120"/>
               </a:rPr>
-              <a:t>V₀ = 0 at inception; period-1 cash outflow CAD 968,750; but aggregate swap MTM turns positive as upward curve delivers rising MRRs.</a:t>
+              <a:t>V₀ = 0. Esterr pays through period 7, receives from period 8 — MTM gain as the payers roll off.</a:t>
             </a:r>
             <a:endParaRPr lang="en-US" sz="1150" dirty="0"/>
           </a:p>
@@ -23273,7 +24297,7 @@
               <a:buNone/>
             </a:pPr>
             <a:r>
-              <a:rPr lang="en-US" sz="1600" b="1" dirty="0">
+              <a:rPr lang="en-US" sz="1700" b="1" dirty="0">
                 <a:solidFill>
                   <a:srgbClr val="FFFFFF"/>
                 </a:solidFill>
@@ -23281,9 +24305,9 @@
                 <a:ea typeface="Trebuchet MS" pitchFamily="34" charset="-122"/>
                 <a:cs typeface="Trebuchet MS" pitchFamily="34" charset="-120"/>
               </a:rPr>
-              <a:t>An interest-rate swap is economically equivalent to a pair of bonds — pay-fixed ≡ long FRN + short fixed-rate bond; receive-fixed ≡ long fixed + short FRN</a:t>
-            </a:r>
-            <a:endParaRPr lang="en-US" sz="1600" dirty="0"/>
+              <a:t>An interest-rate swap is a pair of bonds — pay-fixed ≡ long FRN + short fixed bond; receive-fixed ≡ long fixed bond + short FRN</a:t>
+            </a:r>
+            <a:endParaRPr lang="en-US" sz="1700" dirty="0"/>
           </a:p>
         </p:txBody>
       </p:sp>
@@ -23385,7 +24409,7 @@
                 <a:ea typeface="Calibri" pitchFamily="34" charset="-122"/>
                 <a:cs typeface="Calibri" pitchFamily="34" charset="-120"/>
               </a:rPr>
-              <a:t>Source: CFA Institute, Curriculum Vol 7, Learning Module 7, "Using Swaps to Manage Fixed Income", pp. 157–158.</a:t>
+              <a:t>Source: CFA Institute, Curriculum Vol 7, Learning Module 7, Exhibit 4 "Using Swaps to Manage Fixed-Income Exposure", p. 157, and p. 162 (printed).</a:t>
             </a:r>
             <a:endParaRPr lang="en-US" sz="750" dirty="0"/>
           </a:p>
@@ -23427,7 +24451,7 @@
                 <a:ea typeface="Calibri" pitchFamily="34" charset="-122"/>
                 <a:cs typeface="Calibri" pitchFamily="34" charset="-120"/>
               </a:rPr>
-              <a:t>Principals cancel at inception and at maturity. Only the coupon legs remain — so a swap is simply two bond coupons swapped with a partner.</a:t>
+              <a:t>The principals cancel at inception and again at maturity. Only the coupon legs survive — so a swap is two bond coupons traded with a partner.</a:t>
             </a:r>
             <a:endParaRPr lang="en-US" sz="1300" dirty="0"/>
           </a:p>
@@ -23456,10 +24480,10 @@
             <a:tbl>
               <a:tblPr/>
               <a:tblGrid>
-                <a:gridCol w="2194560"/>
-                <a:gridCol w="4206240"/>
-                <a:gridCol w="1554480"/>
-                <a:gridCol w="1463040"/>
+                <a:gridCol w="2103120"/>
+                <a:gridCol w="2834640"/>
+                <a:gridCol w="1737360"/>
+                <a:gridCol w="1828800"/>
               </a:tblGrid>
               <a:tr h="274320">
                 <a:tc>
@@ -23629,7 +24653,7 @@
                           <a:ea typeface="Trebuchet MS" pitchFamily="34" charset="-122"/>
                           <a:cs typeface="Trebuchet MS" pitchFamily="34" charset="-120"/>
                         </a:rPr>
-                        <a:t>Higher rates</a:t>
+                        <a:t>When rates RISE</a:t>
                       </a:r>
                       <a:endParaRPr lang="en-US" sz="1100" dirty="0">
                         <a:latin typeface="Trebuchet MS" charset="0"/>
@@ -23731,7 +24755,7 @@
                           <a:ea typeface="Consolas" pitchFamily="34" charset="-122"/>
                           <a:cs typeface="Consolas" pitchFamily="34" charset="-120"/>
                         </a:rPr>
-                        <a:t>LONG FRN (priced at par at each reset) + SHORT fixed bond</a:t>
+                        <a:t>LONG FRN + SHORT fixed bond</a:t>
                       </a:r>
                       <a:endParaRPr lang="en-US" sz="1100" dirty="0">
                         <a:latin typeface="Consolas" charset="0"/>
@@ -23781,7 +24805,7 @@
                           <a:ea typeface="Consolas" pitchFamily="34" charset="-122"/>
                           <a:cs typeface="Consolas" pitchFamily="34" charset="-120"/>
                         </a:rPr>
-                        <a:t>Negative (~ short bond)</a:t>
+                        <a:t>Negative</a:t>
                       </a:r>
                       <a:endParaRPr lang="en-US" sz="1100" dirty="0">
                         <a:latin typeface="Consolas" charset="0"/>
@@ -23983,7 +25007,7 @@
                           <a:ea typeface="Consolas" pitchFamily="34" charset="-122"/>
                           <a:cs typeface="Consolas" pitchFamily="34" charset="-120"/>
                         </a:rPr>
-                        <a:t>Positive (~ long bond)</a:t>
+                        <a:t>Positive</a:t>
                       </a:r>
                       <a:endParaRPr lang="en-US" sz="1100" dirty="0">
                         <a:latin typeface="Consolas" charset="0"/>
@@ -24079,8 +25103,8 @@
         </p:nvSpPr>
         <p:spPr>
           <a:xfrm>
-            <a:off x="320040" y="2468880"/>
-            <a:ext cx="8503920" cy="1874520"/>
+            <a:off x="320040" y="2194560"/>
+            <a:ext cx="8503920" cy="1600200"/>
           </a:xfrm>
           <a:prstGeom prst="rect">
             <a:avLst/>
@@ -24099,8 +25123,8 @@
         </p:nvSpPr>
         <p:spPr>
           <a:xfrm>
-            <a:off x="320040" y="2468880"/>
-            <a:ext cx="73152" cy="1874520"/>
+            <a:off x="320040" y="2194560"/>
+            <a:ext cx="73152" cy="1600200"/>
           </a:xfrm>
           <a:prstGeom prst="rect">
             <a:avLst/>
@@ -24119,7 +25143,7 @@
         </p:nvSpPr>
         <p:spPr>
           <a:xfrm>
-            <a:off x="457200" y="2514600"/>
+            <a:off x="457200" y="2240280"/>
             <a:ext cx="8275320" cy="256032"/>
           </a:xfrm>
           <a:prstGeom prst="rect">
@@ -24161,8 +25185,8 @@
         </p:nvSpPr>
         <p:spPr>
           <a:xfrm>
-            <a:off x="457200" y="2788920"/>
-            <a:ext cx="8275320" cy="1508760"/>
+            <a:off x="457200" y="2514600"/>
+            <a:ext cx="8275320" cy="1234440"/>
           </a:xfrm>
           <a:prstGeom prst="rect">
             <a:avLst/>
@@ -24189,7 +25213,7 @@
                 <a:ea typeface="Calibri" pitchFamily="34" charset="-122"/>
                 <a:cs typeface="Calibri" pitchFamily="34" charset="-120"/>
               </a:rPr>
-              <a:t>At t = 0 a portfolio manager borrows notional N at MRR (short FRN = +N cash) AND lends N at the fixed swap rate (long fixed bond = −N cash). Net cash flow at t = 0 = 0.  Ditto at maturity: repay N at MRR (−N) and receive N at fixed (+N), net = 0. What remains between these dates is just the coupon leg exchange — identical to a pay-fixed swap. This is the bedrock intuition used across fixed-income trading: view an IRS as the rate differential between two bonds, and the duration / DV01 of the swap is the DIFFERENCE in duration / DV01 of those two bonds.</a:t>
+              <a:t>Take the RECEIVE-fixed side. At t = 0 the manager buys a fixed-rate bond for N (−N cash) and funds it by issuing an FRN at MRR (+N cash): net zero. At maturity the bond repays N (+N) and the FRN is redeemed at N (−N): net zero again. Only the coupon legs survive — receive fixed, pay MRR — which is exactly a receive-fixed swap. Flip every sign and you have pay-fixed. This is why a swap carries the DIFFERENCE in duration and DV01 between the two bonds, not the level of either, and why an FRN contributes almost no duration: it reprices to par at every reset.</a:t>
             </a:r>
             <a:endParaRPr lang="en-US" sz="1200" dirty="0"/>
           </a:p>
@@ -24296,7 +25320,7 @@
                 <a:ea typeface="Trebuchet MS" pitchFamily="34" charset="-122"/>
                 <a:cs typeface="Trebuchet MS" pitchFamily="34" charset="-120"/>
               </a:rPr>
-              <a:t>Post-inception, a rise in expected forward rates raises PV(floating), producing an MTM gain for the fixed-rate payer and a loss for the fixed-rate receiver</a:t>
+              <a:t>Post-inception, a rise in expected forward rates raises PV(floating) — an MTM gain for the fixed-rate payer and a loss for the fixed-rate receiver</a:t>
             </a:r>
             <a:endParaRPr lang="en-US" sz="1600" dirty="0"/>
           </a:p>
@@ -24400,7 +25424,7 @@
                 <a:ea typeface="Calibri" pitchFamily="34" charset="-122"/>
                 <a:cs typeface="Calibri" pitchFamily="34" charset="-120"/>
               </a:rPr>
-              <a:t>Source: CFA Institute, Curriculum Vol 7, Learning Module 7, "Swap Values and Prices", pp. 159–165.</a:t>
+              <a:t>Source: CFA Institute, Curriculum Vol 7, Learning Module 7, "Swap Values and Prices" and Question Set, pp. 159–165 (printed).</a:t>
             </a:r>
             <a:endParaRPr lang="en-US" sz="750" dirty="0"/>
           </a:p>
@@ -24442,7 +25466,7 @@
                 <a:ea typeface="Calibri" pitchFamily="34" charset="-122"/>
                 <a:cs typeface="Calibri" pitchFamily="34" charset="-120"/>
               </a:rPr>
-              <a:t>Rule: expected rates UP ⇒ pay-fixed WINS. Expected rates DOWN ⇒ receive-fixed WINS. Same sign as a position in a fixed-rate bond.</a:t>
+              <a:t>Receive-fixed IS a long fixed-rate bond; pay-fixed IS a short one. Every row below follows from that one equivalence.</a:t>
             </a:r>
             <a:endParaRPr lang="en-US" sz="1300" dirty="0"/>
           </a:p>
@@ -24471,11 +25495,11 @@
             <a:tbl>
               <a:tblPr/>
               <a:tblGrid>
-                <a:gridCol w="3108960"/>
-                <a:gridCol w="1463040"/>
-                <a:gridCol w="1463040"/>
-                <a:gridCol w="1280160"/>
-                <a:gridCol w="1188720"/>
+                <a:gridCol w="2834640"/>
+                <a:gridCol w="1417320"/>
+                <a:gridCol w="1691640"/>
+                <a:gridCol w="1325880"/>
+                <a:gridCol w="1234440"/>
               </a:tblGrid>
               <a:tr h="274320">
                 <a:tc>
@@ -24847,7 +25871,7 @@
                           <a:ea typeface="Consolas" pitchFamily="34" charset="-122"/>
                           <a:cs typeface="Consolas" pitchFamily="34" charset="-120"/>
                         </a:rPr>
-                        <a:t>Down (higher disc.)</a:t>
+                        <a:t>Down (higher disc)</a:t>
                       </a:r>
                       <a:endParaRPr lang="en-US" sz="1100" dirty="0">
                         <a:latin typeface="Consolas" charset="0"/>
@@ -25099,7 +26123,7 @@
                           <a:ea typeface="Consolas" pitchFamily="34" charset="-122"/>
                           <a:cs typeface="Consolas" pitchFamily="34" charset="-120"/>
                         </a:rPr>
-                        <a:t>Up (lower disc.)</a:t>
+                        <a:t>Up (lower disc)</a:t>
                       </a:r>
                       <a:endParaRPr lang="en-US" sz="1100" dirty="0">
                         <a:latin typeface="Consolas" charset="0"/>
@@ -25301,7 +26325,7 @@
                           <a:ea typeface="Consolas" pitchFamily="34" charset="-122"/>
                           <a:cs typeface="Consolas" pitchFamily="34" charset="-120"/>
                         </a:rPr>
-                        <a:t>PV(float) &gt; PV(fix)</a:t>
+                        <a:t>Float &gt; Fixed</a:t>
                       </a:r>
                       <a:endParaRPr lang="en-US" sz="1100" dirty="0">
                         <a:latin typeface="Consolas" charset="0"/>
@@ -25553,7 +26577,7 @@
                           <a:ea typeface="Consolas" pitchFamily="34" charset="-122"/>
                           <a:cs typeface="Consolas" pitchFamily="34" charset="-120"/>
                         </a:rPr>
-                        <a:t>PV(float) &lt; PV(fix)</a:t>
+                        <a:t>Float &lt; Fixed</a:t>
                       </a:r>
                       <a:endParaRPr lang="en-US" sz="1100" dirty="0">
                         <a:latin typeface="Consolas" charset="0"/>
@@ -25749,8 +26773,8 @@
         </p:nvSpPr>
         <p:spPr>
           <a:xfrm>
-            <a:off x="320040" y="3246120"/>
-            <a:ext cx="8503920" cy="1051560"/>
+            <a:off x="320040" y="2926080"/>
+            <a:ext cx="8503920" cy="1143000"/>
           </a:xfrm>
           <a:prstGeom prst="rect">
             <a:avLst/>
@@ -25769,8 +26793,8 @@
         </p:nvSpPr>
         <p:spPr>
           <a:xfrm>
-            <a:off x="320040" y="3246120"/>
-            <a:ext cx="73152" cy="1051560"/>
+            <a:off x="320040" y="2926080"/>
+            <a:ext cx="73152" cy="1143000"/>
           </a:xfrm>
           <a:prstGeom prst="rect">
             <a:avLst/>
@@ -25789,7 +26813,7 @@
         </p:nvSpPr>
         <p:spPr>
           <a:xfrm>
-            <a:off x="457200" y="3291840"/>
+            <a:off x="457200" y="2971800"/>
             <a:ext cx="8275320" cy="256032"/>
           </a:xfrm>
           <a:prstGeom prst="rect">
@@ -25831,8 +26855,8 @@
         </p:nvSpPr>
         <p:spPr>
           <a:xfrm>
-            <a:off x="457200" y="3566160"/>
-            <a:ext cx="8275320" cy="685800"/>
+            <a:off x="457200" y="3246120"/>
+            <a:ext cx="8275320" cy="777240"/>
           </a:xfrm>
           <a:prstGeom prst="rect">
             <a:avLst/>
@@ -25859,7 +26883,7 @@
                 <a:ea typeface="Calibri" pitchFamily="34" charset="-122"/>
                 <a:cs typeface="Calibri" pitchFamily="34" charset="-120"/>
               </a:rPr>
-              <a:t>A receive-fixed swap behaves like a long fixed-rate bond — positive duration. Active managers who want to INCREASE portfolio duration without buying more bonds go receive-fixed; managers who want to CUT duration go pay-fixed. The IRS has become the primary duration-management tool in institutional fixed-income books.</a:t>
+              <a:t>A receive-fixed swap behaves like a long fixed-rate bond — positive duration. A manager who wants MORE portfolio duration without buying bonds receives fixed; one who wants LESS pays fixed. Rows 3 and 4 are the ones students miss: on an unchanged upward-sloping curve, the mere passage of time hands the fixed payer a gain, because the cheap early periods have already been paid away.</a:t>
             </a:r>
             <a:endParaRPr lang="en-US" sz="1200" dirty="0"/>
           </a:p>
@@ -25966,7 +26990,7 @@
                 <a:ea typeface="Trebuchet MS" pitchFamily="34" charset="-122"/>
                 <a:cs typeface="Trebuchet MS" pitchFamily="34" charset="-120"/>
               </a:rPr>
-              <a:t>Worked: Fyleton receives fixed 2.38% on a 5y GBP 200m IRS and the forward curve falls — MTM gain equivalent to a long fixed-rate bond rallying</a:t>
+              <a:t>Worked: Fyleton receives fixed 2.38% on GBP 200m — time on an upward curve costs it, a downward shift in the curve pays it, exactly like a long bond</a:t>
             </a:r>
             <a:endParaRPr lang="en-US" sz="1600" dirty="0"/>
           </a:p>
@@ -26070,7 +27094,7 @@
                 <a:ea typeface="Calibri" pitchFamily="34" charset="-122"/>
                 <a:cs typeface="Calibri" pitchFamily="34" charset="-120"/>
               </a:rPr>
-              <a:t>Source: CFA Institute, Curriculum Vol 7, Learning Module 7, Example 4 (Fyleton Investments), pp. 162–164.</a:t>
+              <a:t>Source: CFA Institute, Curriculum Vol 7, Learning Module 7, Example 4 (Fyleton Investments), pp. 162–163 (printed).</a:t>
             </a:r>
             <a:endParaRPr lang="en-US" sz="750" dirty="0"/>
           </a:p>
@@ -26112,7 +27136,7 @@
                 <a:ea typeface="Calibri" pitchFamily="34" charset="-122"/>
                 <a:cs typeface="Calibri" pitchFamily="34" charset="-120"/>
               </a:rPr>
-              <a:t>Receive-fixed = long-bond proxy. Rates fall → bond price rises → receive-fixed swap MTM positive. Same directional exposure, far cheaper to execute.</a:t>
+              <a:t>Receive-fixed is a long-bond proxy. Rates fall, bonds rally, the swap gains — same directional exposure, far cheaper to put on.</a:t>
             </a:r>
             <a:endParaRPr lang="en-US" sz="1300" dirty="0"/>
           </a:p>
@@ -26174,7 +27198,7 @@
                 <a:ea typeface="Consolas" pitchFamily="34" charset="-122"/>
                 <a:cs typeface="Consolas" pitchFamily="34" charset="-120"/>
               </a:rPr>
-              <a:t>Period settlement (receive-fixed)  =  ( s_N − MRR )  ×  Notional  ×  Period</a:t>
+              <a:t>Settlement (receive-fixed)  =  ( s_N − MRR ) × Notional × Period</a:t>
             </a:r>
             <a:endParaRPr lang="en-US" sz="1800" dirty="0"/>
           </a:p>
@@ -26241,7 +27265,7 @@
                 <a:ea typeface="Trebuchet MS" pitchFamily="34" charset="-122"/>
                 <a:cs typeface="Trebuchet MS" pitchFamily="34" charset="-120"/>
               </a:rPr>
-              <a:t>FYLETON INVESTMENTS — RECEIVE-FIXED 5y GBP 200m</a:t>
+              <a:t>CFA LM 7 EXAMPLE 4 — FYLETON, RECEIVE-FIXED 5y GBP 200m</a:t>
             </a:r>
             <a:endParaRPr lang="en-US" sz="1100" dirty="0"/>
           </a:p>
@@ -26283,7 +27307,7 @@
                 <a:ea typeface="Calibri" pitchFamily="34" charset="-122"/>
                 <a:cs typeface="Calibri" pitchFamily="34" charset="-120"/>
               </a:rPr>
-              <a:t>Fyleton receives fixed s = 2.38% semi-annually, pays 6m GBP MRR. Initial MRR sets at 0.71%. Period = 0.5. Upward-sloping initial forward curve.</a:t>
+              <a:t>Fyleton receives fixed 2.38% semi-annually and pays 6m GBP MRR on GBP 200m, to lengthen portfolio duration. Initial MRR sets at 0.71%. Period = 0.5. Forward curve slopes UP.</a:t>
             </a:r>
             <a:endParaRPr lang="en-US" sz="1200" dirty="0"/>
           </a:p>
@@ -26320,7 +27344,7 @@
               <a:buNone/>
             </a:pPr>
             <a:r>
-              <a:rPr lang="en-US" sz="1150" b="1" dirty="0">
+              <a:rPr lang="en-US" sz="1200" b="1" dirty="0">
                 <a:solidFill>
                   <a:srgbClr val="1B2A4A"/>
                 </a:solidFill>
@@ -26337,7 +27361,7 @@
               <a:buNone/>
             </a:pPr>
             <a:r>
-              <a:rPr lang="en-US" sz="1150" dirty="0">
+              <a:rPr lang="en-US" sz="1200" dirty="0">
                 <a:solidFill>
                   <a:srgbClr val="334155"/>
                 </a:solidFill>
@@ -26345,7 +27369,7 @@
                 <a:ea typeface="Calibri" pitchFamily="34" charset="-122"/>
                 <a:cs typeface="Calibri" pitchFamily="34" charset="-120"/>
               </a:rPr>
-              <a:t>First settlement at t = 0.5: (2.38% − 0.71%) × 200m × 0.5
+              <a:t>First settlement at t = 0.5: (2.38% − 0.71%) × 200m × 0.5 = +GBP 1,670,000 received.
 </a:t>
             </a:r>
             <a:pPr indent="0" marL="0">
@@ -26355,7 +27379,7 @@
               <a:buNone/>
             </a:pPr>
             <a:r>
-              <a:rPr lang="en-US" sz="1150" b="1" dirty="0">
+              <a:rPr lang="en-US" sz="1200" b="1" dirty="0">
                 <a:solidFill>
                   <a:srgbClr val="1B2A4A"/>
                 </a:solidFill>
@@ -26372,7 +27396,7 @@
               <a:buNone/>
             </a:pPr>
             <a:r>
-              <a:rPr lang="en-US" sz="1150" dirty="0">
+              <a:rPr lang="en-US" sz="1200" dirty="0">
                 <a:solidFill>
                   <a:srgbClr val="334155"/>
                 </a:solidFill>
@@ -26380,7 +27404,7 @@
                 <a:ea typeface="Calibri" pitchFamily="34" charset="-122"/>
                 <a:cs typeface="Calibri" pitchFamily="34" charset="-120"/>
               </a:rPr>
-              <a:t>= 0.0167 × 200,000,000 × 0.5 = GBP 1,670,000 RECEIVED
+              <a:t>Case A — time passes, curve unchanged: the MRRs Fyleton pays climb past 2.38%, so PV(floating paid) &gt; PV(fixed received) ⇒ MTM LOSS.
 </a:t>
             </a:r>
             <a:pPr indent="0" marL="0">
@@ -26390,7 +27414,7 @@
               <a:buNone/>
             </a:pPr>
             <a:r>
-              <a:rPr lang="en-US" sz="1150" b="1" dirty="0">
+              <a:rPr lang="en-US" sz="1200" b="1" dirty="0">
                 <a:solidFill>
                   <a:srgbClr val="1B2A4A"/>
                 </a:solidFill>
@@ -26407,7 +27431,7 @@
               <a:buNone/>
             </a:pPr>
             <a:r>
-              <a:rPr lang="en-US" sz="1150" dirty="0">
+              <a:rPr lang="en-US" sz="1200" dirty="0">
                 <a:solidFill>
                   <a:srgbClr val="334155"/>
                 </a:solidFill>
@@ -26415,7 +27439,7 @@
                 <a:ea typeface="Calibri" pitchFamily="34" charset="-122"/>
                 <a:cs typeface="Calibri" pitchFamily="34" charset="-120"/>
               </a:rPr>
-              <a:t>Then forward curve shifts DOWN — PV(floating paid) falls faster than PV(fixed received).
+              <a:t>Case B — the forward curve shifts DOWN: PV(floating paid) falls while the fixed leg is unchanged ⇒ MTM GAIN.
 </a:t>
             </a:r>
             <a:pPr indent="0" marL="0">
@@ -26425,7 +27449,7 @@
               <a:buNone/>
             </a:pPr>
             <a:r>
-              <a:rPr lang="en-US" sz="1150" b="1" dirty="0">
+              <a:rPr lang="en-US" sz="1200" b="1" dirty="0">
                 <a:solidFill>
                   <a:srgbClr val="1B2A4A"/>
                 </a:solidFill>
@@ -26442,7 +27466,7 @@
               <a:buNone/>
             </a:pPr>
             <a:r>
-              <a:rPr lang="en-US" sz="1150" dirty="0">
+              <a:rPr lang="en-US" sz="1200" dirty="0">
                 <a:solidFill>
                   <a:srgbClr val="334155"/>
                 </a:solidFill>
@@ -26450,44 +27474,9 @@
                 <a:ea typeface="Calibri" pitchFamily="34" charset="-122"/>
                 <a:cs typeface="Calibri" pitchFamily="34" charset="-120"/>
               </a:rPr>
-              <a:t>Net: PV(fixed received) &gt; PV(floating paid) → MTM GAIN for Fyleton.
-</a:t>
-            </a:r>
-            <a:pPr indent="0" marL="0">
-              <a:spcAft>
-                <a:spcPts val="200"/>
-              </a:spcAft>
-              <a:buNone/>
-            </a:pPr>
-            <a:r>
-              <a:rPr lang="en-US" sz="1150" b="1" dirty="0">
-                <a:solidFill>
-                  <a:srgbClr val="1B2A4A"/>
-                </a:solidFill>
-                <a:latin typeface="Calibri" pitchFamily="34" charset="0"/>
-                <a:ea typeface="Calibri" pitchFamily="34" charset="-122"/>
-                <a:cs typeface="Calibri" pitchFamily="34" charset="-120"/>
-              </a:rPr>
-              <a:t>5. </a:t>
-            </a:r>
-            <a:pPr indent="0" marL="0">
-              <a:spcAft>
-                <a:spcPts val="200"/>
-              </a:spcAft>
-              <a:buNone/>
-            </a:pPr>
-            <a:r>
-              <a:rPr lang="en-US" sz="1150" dirty="0">
-                <a:solidFill>
-                  <a:srgbClr val="334155"/>
-                </a:solidFill>
-                <a:latin typeface="Calibri" pitchFamily="34" charset="0"/>
-                <a:ea typeface="Calibri" pitchFamily="34" charset="-122"/>
-                <a:cs typeface="Calibri" pitchFamily="34" charset="-120"/>
-              </a:rPr>
-              <a:t>Risk profile mirrors a LONG fixed-rate bond: rates fall → bond rallies → swap MTM gains.</a:t>
-            </a:r>
-            <a:endParaRPr lang="en-US" sz="1150" dirty="0"/>
+              <a:t>Same signature as a long fixed-rate bond: it bleeds as an upward curve rolls through, and rallies when the curve drops.</a:t>
+            </a:r>
+            <a:endParaRPr lang="en-US" sz="1200" dirty="0"/>
           </a:p>
         </p:txBody>
       </p:sp>
@@ -26547,7 +27536,7 @@
                 <a:ea typeface="Consolas" pitchFamily="34" charset="-122"/>
                 <a:cs typeface="Consolas" pitchFamily="34" charset="-120"/>
               </a:rPr>
-              <a:t>First exchange: +GBP 1,670,000 to Fyleton. Subsequent rate cuts compound the MTM gain — classic long-duration profile.</a:t>
+              <a:t>First exchange +GBP 1.67m. Time on an upward curve = LOSS; a downward curve shift = GAIN.</a:t>
             </a:r>
             <a:endParaRPr lang="en-US" sz="1150" dirty="0"/>
           </a:p>
@@ -26778,7 +27767,7 @@
                 <a:ea typeface="Calibri" pitchFamily="34" charset="-122"/>
                 <a:cs typeface="Calibri" pitchFamily="34" charset="-120"/>
               </a:rPr>
-              <a:t>Derivatives derive value from an underlying; firm commitments (forwards, futures, swaps) have symmetric payoffs and V₀ = 0, while contingent claims (options, CDS) have asymmetric payoffs and a premium.</a:t>
+              <a:t>Firm commitments (forwards, futures, swaps): symmetric payoff, V₀ = 0. Contingent claims (options, CDS): asymmetric, and cost a premium. The long is the BUYER.</a:t>
             </a:r>
             <a:endParaRPr lang="en-US" sz="1150" dirty="0"/>
           </a:p>
@@ -26860,7 +27849,7 @@
                 <a:ea typeface="Calibri" pitchFamily="34" charset="-122"/>
                 <a:cs typeface="Calibri" pitchFamily="34" charset="-120"/>
               </a:rPr>
-              <a:t>OTC = customized bilateral under ISDA, with counterparty risk; ETD = standardized, centrally cleared, margined daily. Post-crisis CCP clearing has narrowed the gap on standardized OTC.</a:t>
+              <a:t>OTC = customized and bilateral under an ISDA; ETD = standardized, novated to a CCP, margined daily. Post-2008 clearing of standardized OTC has narrowed the gap.</a:t>
             </a:r>
             <a:endParaRPr lang="en-US" sz="1150" dirty="0"/>
           </a:p>
@@ -26942,7 +27931,7 @@
                 <a:ea typeface="Calibri" pitchFamily="34" charset="-122"/>
                 <a:cs typeface="Calibri" pitchFamily="34" charset="-120"/>
               </a:rPr>
-              <a:t>No-arbitrage engine: F₀(T) = S₀(1+r)^T for assets without carry; extend to F₀ = [S₀ − PV(I) + PV(C)](1+r)^T for dividends, coupons, storage costs.</a:t>
+              <a:t>F₀(T) = S₀(1+r)^T is a PRICE, not a forecast. With carry: F₀ = [S₀ − PV(I) + PV(C)](1+r)^T — costs ADD, income SUBTRACTS.</a:t>
             </a:r>
             <a:endParaRPr lang="en-US" sz="1150" dirty="0"/>
           </a:p>
@@ -27024,7 +28013,7 @@
                 <a:ea typeface="Calibri" pitchFamily="34" charset="-122"/>
                 <a:cs typeface="Calibri" pitchFamily="34" charset="-120"/>
               </a:rPr>
-              <a:t>Forward MTM over life: V_t = S_t − F₀(T)(1+r)^−(T−t) for long — sensitive to both S_t and r. Biomian: INR 300.84 forward → 12.90 MTM at t = 0.25 when S_t = 285.</a:t>
+              <a:t>Price is fixed at inception so V₀ = 0; value moves later. Long MTM: V_t = S_t − F₀(T)(1+r)^−(T−t). Biomian: F₀ = 300.84, short gains 12.90 at t = 0.25 (10.11 if r doubles to 8%).</a:t>
             </a:r>
             <a:endParaRPr lang="en-US" sz="1150" dirty="0"/>
           </a:p>
@@ -27106,7 +28095,7 @@
                 <a:ea typeface="Calibri" pitchFamily="34" charset="-122"/>
                 <a:cs typeface="Calibri" pitchFamily="34" charset="-120"/>
               </a:rPr>
-              <a:t>FX covered interest-rate parity: F_{f/d} = S_{f/d} · e^((rf − rd)T). The currency with the LOWER risk-free rate trades at a forward PREMIUM. Montau KRW/EUR: 1,300 → 1,302.67.</a:t>
+              <a:t>FX parity: F_{f/d} = S_{f/d}·e^((r_f − r_d)T). The LOWER-rate currency trades at a forward PREMIUM. AUD/USD 1.3335 → 1.3325; Montau KRW/EUR 1,300 → 1,302.67.</a:t>
             </a:r>
             <a:endParaRPr lang="en-US" sz="1150" dirty="0"/>
           </a:p>
@@ -27188,7 +28177,7 @@
                 <a:ea typeface="Calibri" pitchFamily="34" charset="-122"/>
                 <a:cs typeface="Calibri" pitchFamily="34" charset="-120"/>
               </a:rPr>
-              <a:t>Futures = forwards with daily MTM + margining. Basis S − F converges to 0 at T. Convexity bias makes futures &gt; forwards when f is positive-correlated with r; central clearing of OTC narrows the practical gap.</a:t>
+              <a:t>Futures = forwards plus daily MTM; a call triggers at MAINTENANCE and restores to INITIAL. Prices split on MTM correlation and, for rate contracts, convexity.</a:t>
             </a:r>
             <a:endParaRPr lang="en-US" sz="1150" dirty="0"/>
           </a:p>
@@ -27270,7 +28259,7 @@
                 <a:ea typeface="Calibri" pitchFamily="34" charset="-122"/>
                 <a:cs typeface="Calibri" pitchFamily="34" charset="-120"/>
               </a:rPr>
-              <a:t>Par swap rate s_N solves Σ IFR_i / (1+z_i)^i = s_N × Σ 1/(1+z_i)^i. 3-year example: s₃ = 3.9641% on zero curve (2.396 / 3.4197 / 4.0005)%.</a:t>
+              <a:t>Par swap rate solves Σ IFR_i/(1+z_i)^i = s_N × Σ 1/(1+z_i)^i. Three-year example: s₃ = 3.9641% on a 2.396 / 3.4197 / 4.0005% zero curve. V₀ = 0 in aggregate, not per period.</a:t>
             </a:r>
             <a:endParaRPr lang="en-US" sz="1150" dirty="0"/>
           </a:p>
@@ -27352,7 +28341,7 @@
                 <a:ea typeface="Calibri" pitchFamily="34" charset="-122"/>
                 <a:cs typeface="Calibri" pitchFamily="34" charset="-120"/>
               </a:rPr>
-              <a:t>IRS ≡ pair of bonds: pay-fixed ≡ long FRN + short fixed bond (negative duration); receive-fixed ≡ long fixed + short FRN (positive duration). Fyleton receive-fixed on falling rates = bond rally.</a:t>
+              <a:t>IRS ≡ a pair of bonds: pay-fixed ≡ long FRN + short fixed bond (negative duration); receive-fixed ≡ long fixed bond + short FRN (positive duration). Rates up ⇒ pay-fixed gains.</a:t>
             </a:r>
             <a:endParaRPr lang="en-US" sz="1150" dirty="0"/>
           </a:p>
@@ -27833,7 +28822,7 @@
                 <a:ea typeface="Calibri" pitchFamily="34" charset="-122"/>
                 <a:cs typeface="Calibri" pitchFamily="34" charset="-120"/>
               </a:rPr>
-              <a:t>Source: CFA Institute, Curriculum Vol 7, Learning Module 1, "Derivative Features", pp. 5–8.</a:t>
+              <a:t>Source: CFA Institute, Curriculum Vol 7, Learning Module 1, "Derivative Features", pp. 5–8 (printed).</a:t>
             </a:r>
             <a:endParaRPr lang="en-US" sz="750" dirty="0"/>
           </a:p>
@@ -27937,7 +28926,24 @@
                 <a:ea typeface="Consolas" pitchFamily="34" charset="-122"/>
                 <a:cs typeface="Consolas" pitchFamily="34" charset="-120"/>
               </a:rPr>
-              <a:t>Payoff at T (long)  =  S_T − F_0(T)        Payoff at T (short)  =  F_0(T) − S_T</a:t>
+              <a:t>Payoff at T (long)   =  S_T − F_0(T)</a:t>
+            </a:r>
+            <a:endParaRPr lang="en-US" sz="1800" dirty="0"/>
+          </a:p>
+          <a:p>
+            <a:pPr algn="ctr" indent="0" marL="0">
+              <a:buNone/>
+            </a:pPr>
+            <a:r>
+              <a:rPr lang="en-US" sz="1800" b="1" dirty="0">
+                <a:solidFill>
+                  <a:srgbClr val="FFFFFF"/>
+                </a:solidFill>
+                <a:latin typeface="Consolas" pitchFamily="34" charset="0"/>
+                <a:ea typeface="Consolas" pitchFamily="34" charset="-122"/>
+                <a:cs typeface="Consolas" pitchFamily="34" charset="-120"/>
+              </a:rPr>
+              <a:t>Payoff at T (short)  =  F_0(T) − S_T</a:t>
             </a:r>
             <a:endParaRPr lang="en-US" sz="1800" dirty="0"/>
           </a:p>
@@ -27979,7 +28985,7 @@
                 <a:ea typeface="Calibri" pitchFamily="34" charset="-122"/>
                 <a:cs typeface="Calibri" pitchFamily="34" charset="-120"/>
               </a:rPr>
-              <a:t>where: S_T = underlying spot price at maturity; F_0(T) = forward price agreed at inception (t = 0).</a:t>
+              <a:t>where: S_T = underlying spot price at maturity; F_0(T) = forward price agreed at inception (t = 0). The long BUYS and gains when S_T rises.</a:t>
             </a:r>
             <a:endParaRPr lang="en-US" sz="1100" dirty="0"/>
           </a:p>
@@ -27994,7 +29000,7 @@
         <p:spPr>
           <a:xfrm>
             <a:off x="320040" y="2331720"/>
-            <a:ext cx="2743200" cy="1920240"/>
+            <a:ext cx="2743200" cy="1554480"/>
           </a:xfrm>
           <a:prstGeom prst="rect">
             <a:avLst/>
@@ -28014,7 +29020,7 @@
         <p:spPr>
           <a:xfrm>
             <a:off x="320040" y="2331720"/>
-            <a:ext cx="73152" cy="1920240"/>
+            <a:ext cx="73152" cy="1554480"/>
           </a:xfrm>
           <a:prstGeom prst="rect">
             <a:avLst/>
@@ -28076,7 +29082,7 @@
         <p:spPr>
           <a:xfrm>
             <a:off x="457200" y="2651760"/>
-            <a:ext cx="2514600" cy="1554480"/>
+            <a:ext cx="2514600" cy="1188720"/>
           </a:xfrm>
           <a:prstGeom prst="rect">
             <a:avLst/>
@@ -28103,7 +29109,7 @@
                 <a:ea typeface="Calibri" pitchFamily="34" charset="-122"/>
                 <a:cs typeface="Calibri" pitchFamily="34" charset="-120"/>
               </a:rPr>
-              <a:t>Equities, fixed income (bonds, interest rates), FX, commodities, credit, volatility. May be a basket or an index, not necessarily a single asset.</a:t>
+              <a:t>Equities, fixed income (bonds, interest rates), FX, commodities, credit, volatility. May be a basket, an index or a variable — not necessarily a single asset.</a:t>
             </a:r>
             <a:endParaRPr lang="en-US" sz="1200" dirty="0"/>
           </a:p>
@@ -28118,7 +29124,7 @@
         <p:spPr>
           <a:xfrm>
             <a:off x="3200400" y="2331720"/>
-            <a:ext cx="2743200" cy="1920240"/>
+            <a:ext cx="2743200" cy="1554480"/>
           </a:xfrm>
           <a:prstGeom prst="rect">
             <a:avLst/>
@@ -28138,7 +29144,7 @@
         <p:spPr>
           <a:xfrm>
             <a:off x="3200400" y="2331720"/>
-            <a:ext cx="73152" cy="1920240"/>
+            <a:ext cx="73152" cy="1554480"/>
           </a:xfrm>
           <a:prstGeom prst="rect">
             <a:avLst/>
@@ -28200,7 +29206,7 @@
         <p:spPr>
           <a:xfrm>
             <a:off x="3337560" y="2651760"/>
-            <a:ext cx="2514600" cy="1554480"/>
+            <a:ext cx="2514600" cy="1188720"/>
           </a:xfrm>
           <a:prstGeom prst="rect">
             <a:avLst/>
@@ -28242,7 +29248,7 @@
         <p:spPr>
           <a:xfrm>
             <a:off x="6080760" y="2331720"/>
-            <a:ext cx="2743200" cy="1920240"/>
+            <a:ext cx="2743200" cy="1554480"/>
           </a:xfrm>
           <a:prstGeom prst="rect">
             <a:avLst/>
@@ -28262,7 +29268,7 @@
         <p:spPr>
           <a:xfrm>
             <a:off x="6080760" y="2331720"/>
-            <a:ext cx="73152" cy="1920240"/>
+            <a:ext cx="73152" cy="1554480"/>
           </a:xfrm>
           <a:prstGeom prst="rect">
             <a:avLst/>
@@ -28309,7 +29315,7 @@
                 <a:ea typeface="Trebuchet MS" pitchFamily="34" charset="-122"/>
                 <a:cs typeface="Trebuchet MS" pitchFamily="34" charset="-120"/>
               </a:rPr>
-              <a:t>CONTRACT SIZE &amp; MATURITY</a:t>
+              <a:t>SIZE &amp; MATURITY</a:t>
             </a:r>
             <a:endParaRPr lang="en-US" sz="1100" dirty="0"/>
           </a:p>
@@ -28324,7 +29330,7 @@
         <p:spPr>
           <a:xfrm>
             <a:off x="6217920" y="2651760"/>
-            <a:ext cx="2514600" cy="1554480"/>
+            <a:ext cx="2514600" cy="1188720"/>
           </a:xfrm>
           <a:prstGeom prst="rect">
             <a:avLst/>
@@ -28534,6 +29540,46 @@
         </p:nvSpPr>
         <p:spPr>
           <a:xfrm>
+            <a:off x="320040" y="4471416"/>
+            <a:ext cx="8503920" cy="192024"/>
+          </a:xfrm>
+          <a:prstGeom prst="rect">
+            <a:avLst/>
+          </a:prstGeom>
+          <a:noFill/>
+          <a:ln/>
+        </p:spPr>
+        <p:txBody>
+          <a:bodyPr wrap="square" lIns="254" tIns="254" rIns="254" bIns="254" rtlCol="0" anchor="t"/>
+          <a:lstStyle/>
+          <a:p>
+            <a:pPr indent="0" marL="0">
+              <a:buNone/>
+            </a:pPr>
+            <a:r>
+              <a:rPr lang="en-US" sz="1000" dirty="0">
+                <a:solidFill>
+                  <a:srgbClr val="6B7A8D"/>
+                </a:solidFill>
+                <a:latin typeface="Calibri" pitchFamily="34" charset="0"/>
+                <a:ea typeface="Calibri" pitchFamily="34" charset="-122"/>
+                <a:cs typeface="Calibri" pitchFamily="34" charset="-120"/>
+              </a:rPr>
+              <a:t>¹ Master Agreement, CSA, Dodd-Frank and EMIR are market context: Vol 7 names only the "ISDA Agreement" and a post-2008 central clearing mandate.
+</a:t>
+            </a:r>
+            <a:endParaRPr lang="en-US" sz="1000" dirty="0"/>
+          </a:p>
+        </p:txBody>
+      </p:sp>
+      <p:sp>
+        <p:nvSpPr>
+          <p:cNvPr id="8" name="Text 6"/>
+          <p:cNvSpPr txBox="1"/>
+          <p:nvPr/>
+        </p:nvSpPr>
+        <p:spPr>
+          <a:xfrm>
             <a:off x="320040" y="4663440"/>
             <a:ext cx="8503920" cy="201168"/>
           </a:xfrm>
@@ -28562,7 +29608,7 @@
                 <a:ea typeface="Calibri" pitchFamily="34" charset="-122"/>
                 <a:cs typeface="Calibri" pitchFamily="34" charset="-120"/>
               </a:rPr>
-              <a:t>Source: CFA Institute, Curriculum Vol 7, Learning Module 1, "Derivative Markets", pp. 14–18.</a:t>
+              <a:t>Source: CFA Institute, Curriculum Vol 7, Learning Module 1, "Derivative Markets", pp. 14–18 (printed).</a:t>
             </a:r>
             <a:endParaRPr lang="en-US" sz="750" dirty="0"/>
           </a:p>
@@ -28570,7 +29616,7 @@
       </p:sp>
       <p:sp>
         <p:nvSpPr>
-          <p:cNvPr id="8" name="Text 6"/>
+          <p:cNvPr id="9" name="Text 7"/>
           <p:cNvSpPr txBox="1"/>
           <p:nvPr/>
         </p:nvSpPr>
@@ -28604,7 +29650,7 @@
                 <a:ea typeface="Calibri" pitchFamily="34" charset="-122"/>
                 <a:cs typeface="Calibri" pitchFamily="34" charset="-120"/>
               </a:rPr>
-              <a:t>Dodd-Frank and EMIR pushed most OTC rate and FX swaps into central clearing, narrowing the structural gap with ETDs.</a:t>
+              <a:t>The post-2008 central clearing mandate pushed most standardized OTC rate and FX swaps onto CCPs, narrowing the structural gap with ETDs.</a:t>
             </a:r>
             <a:endParaRPr lang="en-US" sz="1300" dirty="0"/>
           </a:p>
@@ -28857,7 +29903,7 @@
                           <a:ea typeface="Consolas" pitchFamily="34" charset="-122"/>
                           <a:cs typeface="Consolas" pitchFamily="34" charset="-120"/>
                         </a:rPr>
-                        <a:t>Customized (size, maturity, underlying, delivery)</a:t>
+                        <a:t>Customized: size, maturity, underlying</a:t>
                       </a:r>
                       <a:endParaRPr lang="en-US" sz="1100" dirty="0">
                         <a:latin typeface="Consolas" charset="0"/>
@@ -29009,7 +30055,7 @@
                           <a:ea typeface="Consolas" pitchFamily="34" charset="-122"/>
                           <a:cs typeface="Consolas" pitchFamily="34" charset="-120"/>
                         </a:rPr>
-                        <a:t>Bilateral — mitigated by ISDA + CSA collateral</a:t>
+                        <a:t>Bilateral — mitigated by ISDA + collateral</a:t>
                       </a:r>
                       <a:endParaRPr lang="en-US" sz="1100" dirty="0">
                         <a:latin typeface="Consolas" charset="0"/>
@@ -29617,7 +30663,7 @@
                           <a:ea typeface="Consolas" pitchFamily="34" charset="-122"/>
                           <a:cs typeface="Consolas" pitchFamily="34" charset="-120"/>
                         </a:rPr>
-                        <a:t>Post-2010 central clearing for standardized OTC</a:t>
+                        <a:t>Clearing mandate if standardized</a:t>
                       </a:r>
                       <a:endParaRPr lang="en-US" sz="1100" dirty="0">
                         <a:latin typeface="Consolas" charset="0"/>
@@ -29667,7 +30713,7 @@
                           <a:ea typeface="Consolas" pitchFamily="34" charset="-122"/>
                           <a:cs typeface="Consolas" pitchFamily="34" charset="-120"/>
                         </a:rPr>
-                        <a:t>Exchange + CFTC / ESMA / equivalent</a:t>
+                        <a:t>Exchange + national regulator</a:t>
                       </a:r>
                       <a:endParaRPr lang="en-US" sz="1100" dirty="0">
                         <a:latin typeface="Consolas" charset="0"/>
@@ -29707,14 +30753,14 @@
       </p:graphicFrame>
       <p:sp>
         <p:nvSpPr>
-          <p:cNvPr id="10" name="Shape 7"/>
+          <p:cNvPr id="11" name="Shape 8"/>
           <p:cNvSpPr/>
           <p:nvPr/>
         </p:nvSpPr>
         <p:spPr>
           <a:xfrm>
-            <a:off x="320040" y="3429000"/>
-            <a:ext cx="8503920" cy="914400"/>
+            <a:off x="320040" y="3246120"/>
+            <a:ext cx="8503920" cy="1097280"/>
           </a:xfrm>
           <a:prstGeom prst="rect">
             <a:avLst/>
@@ -29727,14 +30773,14 @@
       </p:sp>
       <p:sp>
         <p:nvSpPr>
-          <p:cNvPr id="11" name="Shape 8"/>
+          <p:cNvPr id="12" name="Shape 9"/>
           <p:cNvSpPr/>
           <p:nvPr/>
         </p:nvSpPr>
         <p:spPr>
           <a:xfrm>
-            <a:off x="320040" y="3429000"/>
-            <a:ext cx="73152" cy="914400"/>
+            <a:off x="320040" y="3246120"/>
+            <a:ext cx="73152" cy="1097280"/>
           </a:xfrm>
           <a:prstGeom prst="rect">
             <a:avLst/>
@@ -29747,13 +30793,13 @@
       </p:sp>
       <p:sp>
         <p:nvSpPr>
-          <p:cNvPr id="12" name="Text 9"/>
+          <p:cNvPr id="13" name="Text 10"/>
           <p:cNvSpPr txBox="1"/>
           <p:nvPr/>
         </p:nvSpPr>
         <p:spPr>
           <a:xfrm>
-            <a:off x="457200" y="3474720"/>
+            <a:off x="457200" y="3291840"/>
             <a:ext cx="8275320" cy="256032"/>
           </a:xfrm>
           <a:prstGeom prst="rect">
@@ -29781,7 +30827,7 @@
                 <a:ea typeface="Trebuchet MS" pitchFamily="34" charset="-122"/>
                 <a:cs typeface="Trebuchet MS" pitchFamily="34" charset="-120"/>
               </a:rPr>
-              <a:t>ISDA MASTER AGREEMENT</a:t>
+              <a:t>CENTRAL CLEARING BY NOVATION</a:t>
             </a:r>
             <a:endParaRPr lang="en-US" sz="1100" dirty="0"/>
           </a:p>
@@ -29789,14 +30835,14 @@
       </p:sp>
       <p:sp>
         <p:nvSpPr>
-          <p:cNvPr id="13" name="Text 10"/>
+          <p:cNvPr id="14" name="Text 11"/>
           <p:cNvSpPr txBox="1"/>
           <p:nvPr/>
         </p:nvSpPr>
         <p:spPr>
           <a:xfrm>
-            <a:off x="457200" y="3749040"/>
-            <a:ext cx="8275320" cy="548640"/>
+            <a:off x="457200" y="3566160"/>
+            <a:ext cx="8275320" cy="731520"/>
           </a:xfrm>
           <a:prstGeom prst="rect">
             <a:avLst/>
@@ -29823,7 +30869,7 @@
                 <a:ea typeface="Calibri" pitchFamily="34" charset="-122"/>
                 <a:cs typeface="Calibri" pitchFamily="34" charset="-120"/>
               </a:rPr>
-              <a:t>A standardized legal shell covering netting, default, early termination and collateral (via the Credit Support Annex). Enables one agreement to cover thousands of trades between two counterparties — the plumbing of OTC derivative markets.</a:t>
+              <a:t>A trade executed on a swap execution facility is submitted to a central counterparty, which NOVATES it — replacing one bilateral contract with two identical contracts facing the CCP. Bilateral credit risk disappears; it is concentrated in the CCP instead, which is why CCP safeguards are themselves a systemic question.</a:t>
             </a:r>
             <a:endParaRPr lang="en-US" sz="1200" dirty="0"/>
           </a:p>
@@ -30034,7 +31080,7 @@
                 <a:ea typeface="Calibri" pitchFamily="34" charset="-122"/>
                 <a:cs typeface="Calibri" pitchFamily="34" charset="-120"/>
               </a:rPr>
-              <a:t>Source: CFA Institute, Curriculum Vol 7, Learning Module 2, "Forward Commitment vs Contingent Claim", pp. 26–49.</a:t>
+              <a:t>Source: CFA Institute, Curriculum Vol 7, Learning Module 2, "Forwards, Futures, and Swaps" / "Contingent Claims", pp. 26–49 (printed).</a:t>
             </a:r>
             <a:endParaRPr lang="en-US" sz="750" dirty="0"/>
           </a:p>
@@ -30091,7 +31137,7 @@
         <p:spPr>
           <a:xfrm>
             <a:off x="320040" y="1188720"/>
-            <a:ext cx="4160520" cy="3108960"/>
+            <a:ext cx="4160520" cy="2148840"/>
           </a:xfrm>
           <a:prstGeom prst="rect">
             <a:avLst/>
@@ -30111,7 +31157,7 @@
         <p:spPr>
           <a:xfrm>
             <a:off x="320040" y="1188720"/>
-            <a:ext cx="73152" cy="3108960"/>
+            <a:ext cx="73152" cy="2148840"/>
           </a:xfrm>
           <a:prstGeom prst="rect">
             <a:avLst/>
@@ -30173,7 +31219,7 @@
         <p:spPr>
           <a:xfrm>
             <a:off x="502920" y="1600200"/>
-            <a:ext cx="3794760" cy="2606040"/>
+            <a:ext cx="3794760" cy="1645920"/>
           </a:xfrm>
           <a:prstGeom prst="rect">
             <a:avLst/>
@@ -30312,7 +31358,7 @@
         <p:spPr>
           <a:xfrm>
             <a:off x="4663440" y="1188720"/>
-            <a:ext cx="4160520" cy="3108960"/>
+            <a:ext cx="4160520" cy="2148840"/>
           </a:xfrm>
           <a:prstGeom prst="rect">
             <a:avLst/>
@@ -30332,7 +31378,7 @@
         <p:spPr>
           <a:xfrm>
             <a:off x="4663440" y="1188720"/>
-            <a:ext cx="73152" cy="3108960"/>
+            <a:ext cx="73152" cy="2148840"/>
           </a:xfrm>
           <a:prstGeom prst="rect">
             <a:avLst/>
@@ -30394,7 +31440,7 @@
         <p:spPr>
           <a:xfrm>
             <a:off x="4846320" y="1600200"/>
-            <a:ext cx="3794760" cy="2606040"/>
+            <a:ext cx="3794760" cy="1645920"/>
           </a:xfrm>
           <a:prstGeom prst="rect">
             <a:avLst/>
@@ -30523,46 +31569,6 @@
             <a:endParaRPr lang="en-US" sz="1150" dirty="0"/>
           </a:p>
         </p:txBody>
-      </p:sp>
-      <p:sp>
-        <p:nvSpPr>
-          <p:cNvPr id="17" name="Shape 15"/>
-          <p:cNvSpPr/>
-          <p:nvPr/>
-        </p:nvSpPr>
-        <p:spPr>
-          <a:xfrm>
-            <a:off x="320040" y="4343400"/>
-            <a:ext cx="8503920" cy="0"/>
-          </a:xfrm>
-          <a:prstGeom prst="rect">
-            <a:avLst/>
-          </a:prstGeom>
-          <a:solidFill>
-            <a:srgbClr val="FEF0E7"/>
-          </a:solidFill>
-          <a:ln/>
-        </p:spPr>
-      </p:sp>
-      <p:sp>
-        <p:nvSpPr>
-          <p:cNvPr id="18" name="Shape 16"/>
-          <p:cNvSpPr/>
-          <p:nvPr/>
-        </p:nvSpPr>
-        <p:spPr>
-          <a:xfrm>
-            <a:off x="320040" y="4343400"/>
-            <a:ext cx="73152" cy="0"/>
-          </a:xfrm>
-          <a:prstGeom prst="rect">
-            <a:avLst/>
-          </a:prstGeom>
-          <a:solidFill>
-            <a:srgbClr val="E8600A"/>
-          </a:solidFill>
-          <a:ln/>
-        </p:spPr>
       </p:sp>
     </p:spTree>
   </p:cSld>
@@ -30769,7 +31775,7 @@
                 <a:ea typeface="Calibri" pitchFamily="34" charset="-122"/>
                 <a:cs typeface="Calibri" pitchFamily="34" charset="-120"/>
               </a:rPr>
-              <a:t>Source: CFA Institute, Curriculum Vol 7, Learning Module 2, "Forwards, Futures, and Swaps", pp. 26–37.</a:t>
+              <a:t>Source: CFA Institute, Curriculum Vol 7, Learning Module 2, "Forwards, Futures, and Swaps", pp. 26–37 (printed).</a:t>
             </a:r>
             <a:endParaRPr lang="en-US" sz="750" dirty="0"/>
           </a:p>
@@ -31215,7 +32221,7 @@
                           <a:ea typeface="Consolas" pitchFamily="34" charset="-122"/>
                           <a:cs typeface="Consolas" pitchFamily="34" charset="-120"/>
                         </a:rPr>
-                        <a:t>OTC (centrally cleared std)</a:t>
+                        <a:t>OTC (cleared if std)</a:t>
                       </a:r>
                       <a:endParaRPr lang="en-US" sz="1100" dirty="0">
                         <a:latin typeface="Consolas" charset="0"/>
@@ -31569,7 +32575,7 @@
                           <a:ea typeface="Consolas" pitchFamily="34" charset="-122"/>
                           <a:cs typeface="Consolas" pitchFamily="34" charset="-120"/>
                         </a:rPr>
-                        <a:t>Single economic exchange + daily MTM</a:t>
+                        <a:t>Single exchange + daily MTM</a:t>
                       </a:r>
                       <a:endParaRPr lang="en-US" sz="1100" dirty="0">
                         <a:latin typeface="Consolas" charset="0"/>
@@ -31619,7 +32625,7 @@
                           <a:ea typeface="Consolas" pitchFamily="34" charset="-122"/>
                           <a:cs typeface="Consolas" pitchFamily="34" charset="-120"/>
                         </a:rPr>
-                        <a:t>Periodic exchange over life</a:t>
+                        <a:t>Periodic over life</a:t>
                       </a:r>
                       <a:endParaRPr lang="en-US" sz="1100" dirty="0">
                         <a:latin typeface="Consolas" charset="0"/>
@@ -32225,7 +33231,7 @@
                           <a:ea typeface="Consolas" pitchFamily="34" charset="-122"/>
                           <a:cs typeface="Consolas" pitchFamily="34" charset="-120"/>
                         </a:rPr>
-                        <a:t>Symmetric (strip of forwards)</a:t>
+                        <a:t>Symmetric</a:t>
                       </a:r>
                       <a:endParaRPr lang="en-US" sz="1100" dirty="0">
                         <a:latin typeface="Consolas" charset="0"/>
